--- a/outputs/presentations/10class_comparison_v2.pptx
+++ b/outputs/presentations/10class_comparison_v2.pptx
@@ -12,6 +12,8 @@
     <p:sldId id="260" r:id="rId11"/>
     <p:sldId id="261" r:id="rId12"/>
     <p:sldId id="262" r:id="rId13"/>
+    <p:sldId id="263" r:id="rId14"/>
+    <p:sldId id="264" r:id="rId15"/>
   </p:sldIdLst>
   <p:sldSz cx="12191695" cy="6858000" type="screen4x3"/>
   <p:notesSz cx="6858000" cy="9144000"/>
@@ -5327,7 +5329,7 @@
                 </a:solidFill>
                 <a:latin typeface="맑은 고딕"/>
               </a:rPr>
-              <a:t>Per-class Top-1 Accuracy (%)</a:t>
+              <a:t>Per-class Top-1 Accuracy - i.i.d. 모델 (LR / LGB / MLP 77d)</a:t>
             </a:r>
           </a:p>
         </p:txBody>
@@ -5341,8 +5343,8 @@
           <p:nvPr/>
         </p:nvGraphicFramePr>
         <p:xfrm>
-          <a:off x="472287.5" y="1005840"/>
-          <a:ext cx="10607040" cy="5029200"/>
+          <a:off x="883767.5" y="1005840"/>
+          <a:ext cx="10424160" cy="5029200"/>
         </p:xfrm>
         <a:graphic>
           <a:graphicData uri="http://schemas.openxmlformats.org/drawingml/2006/table">
@@ -5351,14 +5353,11 @@
                 <a:tableStyleId>{5C22544A-7EE6-4342-B048-85BDC9FD1C3A}</a:tableStyleId>
               </a:tblPr>
               <a:tblGrid>
-                <a:gridCol w="1371600"/>
-                <a:gridCol w="914400"/>
-                <a:gridCol w="1097280"/>
-                <a:gridCol w="1097280"/>
-                <a:gridCol w="1371600"/>
-                <a:gridCol w="1463040"/>
-                <a:gridCol w="1463040"/>
-                <a:gridCol w="1828800"/>
+                <a:gridCol w="1645920"/>
+                <a:gridCol w="1005840"/>
+                <a:gridCol w="2587752"/>
+                <a:gridCol w="2587752"/>
+                <a:gridCol w="2596896"/>
               </a:tblGrid>
               <a:tr h="457200">
                 <a:tc>
@@ -5368,7 +5367,7 @@
                     <a:p>
                       <a:pPr algn="ctr"/>
                       <a:r>
-                        <a:rPr sz="1400" b="1">
+                        <a:rPr sz="1500" b="1">
                           <a:solidFill>
                             <a:srgbClr val="FFFFFF"/>
                           </a:solidFill>
@@ -5391,7 +5390,7 @@
                     <a:p>
                       <a:pPr algn="ctr"/>
                       <a:r>
-                        <a:rPr sz="1400" b="1">
+                        <a:rPr sz="1500" b="1">
                           <a:solidFill>
                             <a:srgbClr val="FFFFFF"/>
                           </a:solidFill>
@@ -5414,7 +5413,7 @@
                     <a:p>
                       <a:pPr algn="ctr"/>
                       <a:r>
-                        <a:rPr sz="1400" b="1">
+                        <a:rPr sz="1500" b="1">
                           <a:solidFill>
                             <a:srgbClr val="FFFFFF"/>
                           </a:solidFill>
@@ -5437,7 +5436,7 @@
                     <a:p>
                       <a:pPr algn="ctr"/>
                       <a:r>
-                        <a:rPr sz="1400" b="1">
+                        <a:rPr sz="1500" b="1">
                           <a:solidFill>
                             <a:srgbClr val="FFFFFF"/>
                           </a:solidFill>
@@ -5460,82 +5459,13 @@
                     <a:p>
                       <a:pPr algn="ctr"/>
                       <a:r>
-                        <a:rPr sz="1400" b="1">
+                        <a:rPr sz="1500" b="1">
                           <a:solidFill>
                             <a:srgbClr val="FFFFFF"/>
                           </a:solidFill>
                           <a:latin typeface="맑은 고딕"/>
                         </a:rPr>
                         <a:t>MLP 77d</a:t>
-                      </a:r>
-                    </a:p>
-                  </a:txBody>
-                  <a:tcPr>
-                    <a:solidFill>
-                      <a:srgbClr val="2980B9"/>
-                    </a:solidFill>
-                  </a:tcPr>
-                </a:tc>
-                <a:tc>
-                  <a:txBody>
-                    <a:bodyPr/>
-                    <a:lstStyle/>
-                    <a:p>
-                      <a:pPr algn="ctr"/>
-                      <a:r>
-                        <a:rPr sz="1400" b="1">
-                          <a:solidFill>
-                            <a:srgbClr val="FFFFFF"/>
-                          </a:solidFill>
-                          <a:latin typeface="맑은 고딕"/>
-                        </a:rPr>
-                        <a:t>MLP 135d</a:t>
-                      </a:r>
-                    </a:p>
-                  </a:txBody>
-                  <a:tcPr>
-                    <a:solidFill>
-                      <a:srgbClr val="2980B9"/>
-                    </a:solidFill>
-                  </a:tcPr>
-                </a:tc>
-                <a:tc>
-                  <a:txBody>
-                    <a:bodyPr/>
-                    <a:lstStyle/>
-                    <a:p>
-                      <a:pPr algn="ctr"/>
-                      <a:r>
-                        <a:rPr sz="1400" b="1">
-                          <a:solidFill>
-                            <a:srgbClr val="FFFFFF"/>
-                          </a:solidFill>
-                          <a:latin typeface="맑은 고딕"/>
-                        </a:rPr>
-                        <a:t>RNN</a:t>
-                      </a:r>
-                    </a:p>
-                  </a:txBody>
-                  <a:tcPr>
-                    <a:solidFill>
-                      <a:srgbClr val="2980B9"/>
-                    </a:solidFill>
-                  </a:tcPr>
-                </a:tc>
-                <a:tc>
-                  <a:txBody>
-                    <a:bodyPr/>
-                    <a:lstStyle/>
-                    <a:p>
-                      <a:pPr algn="ctr"/>
-                      <a:r>
-                        <a:rPr sz="1400" b="1">
-                          <a:solidFill>
-                            <a:srgbClr val="FFFFFF"/>
-                          </a:solidFill>
-                          <a:latin typeface="맑은 고딕"/>
-                        </a:rPr>
-                        <a:t>Transformer</a:t>
                       </a:r>
                     </a:p>
                   </a:txBody>
@@ -5554,7 +5484,7 @@
                     <a:p>
                       <a:pPr algn="ctr"/>
                       <a:r>
-                        <a:rPr sz="1400" b="0">
+                        <a:rPr sz="1500" b="0">
                           <a:solidFill>
                             <a:srgbClr val="2C3E50"/>
                           </a:solidFill>
@@ -5577,7 +5507,7 @@
                     <a:p>
                       <a:pPr algn="ctr"/>
                       <a:r>
-                        <a:rPr sz="1400" b="0">
+                        <a:rPr sz="1500" b="0">
                           <a:solidFill>
                             <a:srgbClr val="2C3E50"/>
                           </a:solidFill>
@@ -5600,7 +5530,7 @@
                     <a:p>
                       <a:pPr algn="ctr"/>
                       <a:r>
-                        <a:rPr sz="1400" b="0">
+                        <a:rPr sz="1500" b="0">
                           <a:solidFill>
                             <a:srgbClr val="2C3E50"/>
                           </a:solidFill>
@@ -5623,7 +5553,7 @@
                     <a:p>
                       <a:pPr algn="ctr"/>
                       <a:r>
-                        <a:rPr sz="1400" b="0">
+                        <a:rPr sz="1500" b="0">
                           <a:solidFill>
                             <a:srgbClr val="2C3E50"/>
                           </a:solidFill>
@@ -5646,7 +5576,7 @@
                     <a:p>
                       <a:pPr algn="ctr"/>
                       <a:r>
-                        <a:rPr sz="1400" b="0">
+                        <a:rPr sz="1500" b="0">
                           <a:solidFill>
                             <a:srgbClr val="2C3E50"/>
                           </a:solidFill>
@@ -5659,75 +5589,6 @@
                   <a:tcPr>
                     <a:solidFill>
                       <a:srgbClr val="FDEDED"/>
-                    </a:solidFill>
-                  </a:tcPr>
-                </a:tc>
-                <a:tc>
-                  <a:txBody>
-                    <a:bodyPr/>
-                    <a:lstStyle/>
-                    <a:p>
-                      <a:pPr algn="ctr"/>
-                      <a:r>
-                        <a:rPr sz="1400" b="0">
-                          <a:solidFill>
-                            <a:srgbClr val="2C3E50"/>
-                          </a:solidFill>
-                          <a:latin typeface="맑은 고딕"/>
-                        </a:rPr>
-                        <a:t>88.4</a:t>
-                      </a:r>
-                    </a:p>
-                  </a:txBody>
-                  <a:tcPr>
-                    <a:solidFill>
-                      <a:srgbClr val="D5F5E3"/>
-                    </a:solidFill>
-                  </a:tcPr>
-                </a:tc>
-                <a:tc>
-                  <a:txBody>
-                    <a:bodyPr/>
-                    <a:lstStyle/>
-                    <a:p>
-                      <a:pPr algn="ctr"/>
-                      <a:r>
-                        <a:rPr sz="1400" b="0">
-                          <a:solidFill>
-                            <a:srgbClr val="2C3E50"/>
-                          </a:solidFill>
-                          <a:latin typeface="맑은 고딕"/>
-                        </a:rPr>
-                        <a:t>87.2</a:t>
-                      </a:r>
-                    </a:p>
-                  </a:txBody>
-                  <a:tcPr>
-                    <a:solidFill>
-                      <a:srgbClr val="D5F5E3"/>
-                    </a:solidFill>
-                  </a:tcPr>
-                </a:tc>
-                <a:tc>
-                  <a:txBody>
-                    <a:bodyPr/>
-                    <a:lstStyle/>
-                    <a:p>
-                      <a:pPr algn="ctr"/>
-                      <a:r>
-                        <a:rPr sz="1400" b="0">
-                          <a:solidFill>
-                            <a:srgbClr val="2C3E50"/>
-                          </a:solidFill>
-                          <a:latin typeface="맑은 고딕"/>
-                        </a:rPr>
-                        <a:t>87.6</a:t>
-                      </a:r>
-                    </a:p>
-                  </a:txBody>
-                  <a:tcPr>
-                    <a:solidFill>
-                      <a:srgbClr val="D5F5E3"/>
                     </a:solidFill>
                   </a:tcPr>
                 </a:tc>
@@ -5740,7 +5601,7 @@
                     <a:p>
                       <a:pPr algn="ctr"/>
                       <a:r>
-                        <a:rPr sz="1400" b="0">
+                        <a:rPr sz="1500" b="0">
                           <a:solidFill>
                             <a:srgbClr val="2C3E50"/>
                           </a:solidFill>
@@ -5763,7 +5624,7 @@
                     <a:p>
                       <a:pPr algn="ctr"/>
                       <a:r>
-                        <a:rPr sz="1400" b="0">
+                        <a:rPr sz="1500" b="0">
                           <a:solidFill>
                             <a:srgbClr val="2C3E50"/>
                           </a:solidFill>
@@ -5786,7 +5647,7 @@
                     <a:p>
                       <a:pPr algn="ctr"/>
                       <a:r>
-                        <a:rPr sz="1400" b="0">
+                        <a:rPr sz="1500" b="0">
                           <a:solidFill>
                             <a:srgbClr val="2C3E50"/>
                           </a:solidFill>
@@ -5809,7 +5670,7 @@
                     <a:p>
                       <a:pPr algn="ctr"/>
                       <a:r>
-                        <a:rPr sz="1400" b="0">
+                        <a:rPr sz="1500" b="0">
                           <a:solidFill>
                             <a:srgbClr val="2C3E50"/>
                           </a:solidFill>
@@ -5832,88 +5693,19 @@
                     <a:p>
                       <a:pPr algn="ctr"/>
                       <a:r>
-                        <a:rPr sz="1400" b="0">
-                          <a:solidFill>
-                            <a:srgbClr val="2C3E50"/>
-                          </a:solidFill>
-                          <a:latin typeface="맑은 고딕"/>
-                        </a:rPr>
-                        <a:t>100</a:t>
+                        <a:rPr sz="1500" b="0">
+                          <a:solidFill>
+                            <a:srgbClr val="2C3E50"/>
+                          </a:solidFill>
+                          <a:latin typeface="맑은 고딕"/>
+                        </a:rPr>
+                        <a:t>100.0</a:t>
                       </a:r>
                     </a:p>
                   </a:txBody>
                   <a:tcPr>
                     <a:solidFill>
                       <a:srgbClr val="FFFFFF"/>
-                    </a:solidFill>
-                  </a:tcPr>
-                </a:tc>
-                <a:tc>
-                  <a:txBody>
-                    <a:bodyPr/>
-                    <a:lstStyle/>
-                    <a:p>
-                      <a:pPr algn="ctr"/>
-                      <a:r>
-                        <a:rPr sz="1400" b="0">
-                          <a:solidFill>
-                            <a:srgbClr val="2C3E50"/>
-                          </a:solidFill>
-                          <a:latin typeface="맑은 고딕"/>
-                        </a:rPr>
-                        <a:t>83.7</a:t>
-                      </a:r>
-                    </a:p>
-                  </a:txBody>
-                  <a:tcPr>
-                    <a:solidFill>
-                      <a:srgbClr val="D5F5E3"/>
-                    </a:solidFill>
-                  </a:tcPr>
-                </a:tc>
-                <a:tc>
-                  <a:txBody>
-                    <a:bodyPr/>
-                    <a:lstStyle/>
-                    <a:p>
-                      <a:pPr algn="ctr"/>
-                      <a:r>
-                        <a:rPr sz="1400" b="0">
-                          <a:solidFill>
-                            <a:srgbClr val="2C3E50"/>
-                          </a:solidFill>
-                          <a:latin typeface="맑은 고딕"/>
-                        </a:rPr>
-                        <a:t>82.8</a:t>
-                      </a:r>
-                    </a:p>
-                  </a:txBody>
-                  <a:tcPr>
-                    <a:solidFill>
-                      <a:srgbClr val="D5F5E3"/>
-                    </a:solidFill>
-                  </a:tcPr>
-                </a:tc>
-                <a:tc>
-                  <a:txBody>
-                    <a:bodyPr/>
-                    <a:lstStyle/>
-                    <a:p>
-                      <a:pPr algn="ctr"/>
-                      <a:r>
-                        <a:rPr sz="1400" b="0">
-                          <a:solidFill>
-                            <a:srgbClr val="2C3E50"/>
-                          </a:solidFill>
-                          <a:latin typeface="맑은 고딕"/>
-                        </a:rPr>
-                        <a:t>82.2</a:t>
-                      </a:r>
-                    </a:p>
-                  </a:txBody>
-                  <a:tcPr>
-                    <a:solidFill>
-                      <a:srgbClr val="D5F5E3"/>
                     </a:solidFill>
                   </a:tcPr>
                 </a:tc>
@@ -5926,7 +5718,7 @@
                     <a:p>
                       <a:pPr algn="ctr"/>
                       <a:r>
-                        <a:rPr sz="1400" b="0">
+                        <a:rPr sz="1500" b="0">
                           <a:solidFill>
                             <a:srgbClr val="2C3E50"/>
                           </a:solidFill>
@@ -5949,7 +5741,7 @@
                     <a:p>
                       <a:pPr algn="ctr"/>
                       <a:r>
-                        <a:rPr sz="1400" b="0">
+                        <a:rPr sz="1500" b="0">
                           <a:solidFill>
                             <a:srgbClr val="2C3E50"/>
                           </a:solidFill>
@@ -5972,7 +5764,7 @@
                     <a:p>
                       <a:pPr algn="ctr"/>
                       <a:r>
-                        <a:rPr sz="1400" b="0">
+                        <a:rPr sz="1500" b="0">
                           <a:solidFill>
                             <a:srgbClr val="2C3E50"/>
                           </a:solidFill>
@@ -5995,7 +5787,7 @@
                     <a:p>
                       <a:pPr algn="ctr"/>
                       <a:r>
-                        <a:rPr sz="1400" b="0">
+                        <a:rPr sz="1500" b="0">
                           <a:solidFill>
                             <a:srgbClr val="2C3E50"/>
                           </a:solidFill>
@@ -6018,76 +5810,7 @@
                     <a:p>
                       <a:pPr algn="ctr"/>
                       <a:r>
-                        <a:rPr sz="1400" b="0">
-                          <a:solidFill>
-                            <a:srgbClr val="2C3E50"/>
-                          </a:solidFill>
-                          <a:latin typeface="맑은 고딕"/>
-                        </a:rPr>
-                        <a:t>0.0</a:t>
-                      </a:r>
-                    </a:p>
-                  </a:txBody>
-                  <a:tcPr>
-                    <a:solidFill>
-                      <a:srgbClr val="FDEDED"/>
-                    </a:solidFill>
-                  </a:tcPr>
-                </a:tc>
-                <a:tc>
-                  <a:txBody>
-                    <a:bodyPr/>
-                    <a:lstStyle/>
-                    <a:p>
-                      <a:pPr algn="ctr"/>
-                      <a:r>
-                        <a:rPr sz="1400" b="0">
-                          <a:solidFill>
-                            <a:srgbClr val="2C3E50"/>
-                          </a:solidFill>
-                          <a:latin typeface="맑은 고딕"/>
-                        </a:rPr>
-                        <a:t>0.0</a:t>
-                      </a:r>
-                    </a:p>
-                  </a:txBody>
-                  <a:tcPr>
-                    <a:solidFill>
-                      <a:srgbClr val="FDEDED"/>
-                    </a:solidFill>
-                  </a:tcPr>
-                </a:tc>
-                <a:tc>
-                  <a:txBody>
-                    <a:bodyPr/>
-                    <a:lstStyle/>
-                    <a:p>
-                      <a:pPr algn="ctr"/>
-                      <a:r>
-                        <a:rPr sz="1400" b="0">
-                          <a:solidFill>
-                            <a:srgbClr val="2C3E50"/>
-                          </a:solidFill>
-                          <a:latin typeface="맑은 고딕"/>
-                        </a:rPr>
-                        <a:t>0.0</a:t>
-                      </a:r>
-                    </a:p>
-                  </a:txBody>
-                  <a:tcPr>
-                    <a:solidFill>
-                      <a:srgbClr val="FDEDED"/>
-                    </a:solidFill>
-                  </a:tcPr>
-                </a:tc>
-                <a:tc>
-                  <a:txBody>
-                    <a:bodyPr/>
-                    <a:lstStyle/>
-                    <a:p>
-                      <a:pPr algn="ctr"/>
-                      <a:r>
-                        <a:rPr sz="1400" b="0">
+                        <a:rPr sz="1500" b="0">
                           <a:solidFill>
                             <a:srgbClr val="2C3E50"/>
                           </a:solidFill>
@@ -6112,7 +5835,7 @@
                     <a:p>
                       <a:pPr algn="ctr"/>
                       <a:r>
-                        <a:rPr sz="1400" b="0">
+                        <a:rPr sz="1500" b="0">
                           <a:solidFill>
                             <a:srgbClr val="2C3E50"/>
                           </a:solidFill>
@@ -6135,7 +5858,7 @@
                     <a:p>
                       <a:pPr algn="ctr"/>
                       <a:r>
-                        <a:rPr sz="1400" b="0">
+                        <a:rPr sz="1500" b="0">
                           <a:solidFill>
                             <a:srgbClr val="2C3E50"/>
                           </a:solidFill>
@@ -6158,7 +5881,7 @@
                     <a:p>
                       <a:pPr algn="ctr"/>
                       <a:r>
-                        <a:rPr sz="1400" b="0">
+                        <a:rPr sz="1500" b="0">
                           <a:solidFill>
                             <a:srgbClr val="2C3E50"/>
                           </a:solidFill>
@@ -6181,7 +5904,7 @@
                     <a:p>
                       <a:pPr algn="ctr"/>
                       <a:r>
-                        <a:rPr sz="1400" b="0">
+                        <a:rPr sz="1500" b="0">
                           <a:solidFill>
                             <a:srgbClr val="2C3E50"/>
                           </a:solidFill>
@@ -6204,76 +5927,7 @@
                     <a:p>
                       <a:pPr algn="ctr"/>
                       <a:r>
-                        <a:rPr sz="1400" b="0">
-                          <a:solidFill>
-                            <a:srgbClr val="2C3E50"/>
-                          </a:solidFill>
-                          <a:latin typeface="맑은 고딕"/>
-                        </a:rPr>
-                        <a:t>0.0</a:t>
-                      </a:r>
-                    </a:p>
-                  </a:txBody>
-                  <a:tcPr>
-                    <a:solidFill>
-                      <a:srgbClr val="FDEDED"/>
-                    </a:solidFill>
-                  </a:tcPr>
-                </a:tc>
-                <a:tc>
-                  <a:txBody>
-                    <a:bodyPr/>
-                    <a:lstStyle/>
-                    <a:p>
-                      <a:pPr algn="ctr"/>
-                      <a:r>
-                        <a:rPr sz="1400" b="0">
-                          <a:solidFill>
-                            <a:srgbClr val="2C3E50"/>
-                          </a:solidFill>
-                          <a:latin typeface="맑은 고딕"/>
-                        </a:rPr>
-                        <a:t>0.0</a:t>
-                      </a:r>
-                    </a:p>
-                  </a:txBody>
-                  <a:tcPr>
-                    <a:solidFill>
-                      <a:srgbClr val="FDEDED"/>
-                    </a:solidFill>
-                  </a:tcPr>
-                </a:tc>
-                <a:tc>
-                  <a:txBody>
-                    <a:bodyPr/>
-                    <a:lstStyle/>
-                    <a:p>
-                      <a:pPr algn="ctr"/>
-                      <a:r>
-                        <a:rPr sz="1400" b="0">
-                          <a:solidFill>
-                            <a:srgbClr val="2C3E50"/>
-                          </a:solidFill>
-                          <a:latin typeface="맑은 고딕"/>
-                        </a:rPr>
-                        <a:t>0.0</a:t>
-                      </a:r>
-                    </a:p>
-                  </a:txBody>
-                  <a:tcPr>
-                    <a:solidFill>
-                      <a:srgbClr val="FDEDED"/>
-                    </a:solidFill>
-                  </a:tcPr>
-                </a:tc>
-                <a:tc>
-                  <a:txBody>
-                    <a:bodyPr/>
-                    <a:lstStyle/>
-                    <a:p>
-                      <a:pPr algn="ctr"/>
-                      <a:r>
-                        <a:rPr sz="1400" b="0">
+                        <a:rPr sz="1500" b="0">
                           <a:solidFill>
                             <a:srgbClr val="2C3E50"/>
                           </a:solidFill>
@@ -6298,7 +5952,7 @@
                     <a:p>
                       <a:pPr algn="ctr"/>
                       <a:r>
-                        <a:rPr sz="1400" b="0">
+                        <a:rPr sz="1500" b="0">
                           <a:solidFill>
                             <a:srgbClr val="2C3E50"/>
                           </a:solidFill>
@@ -6321,7 +5975,7 @@
                     <a:p>
                       <a:pPr algn="ctr"/>
                       <a:r>
-                        <a:rPr sz="1400" b="0">
+                        <a:rPr sz="1500" b="0">
                           <a:solidFill>
                             <a:srgbClr val="2C3E50"/>
                           </a:solidFill>
@@ -6344,7 +5998,7 @@
                     <a:p>
                       <a:pPr algn="ctr"/>
                       <a:r>
-                        <a:rPr sz="1400" b="0">
+                        <a:rPr sz="1500" b="0">
                           <a:solidFill>
                             <a:srgbClr val="2C3E50"/>
                           </a:solidFill>
@@ -6367,7 +6021,7 @@
                     <a:p>
                       <a:pPr algn="ctr"/>
                       <a:r>
-                        <a:rPr sz="1400" b="0">
+                        <a:rPr sz="1500" b="0">
                           <a:solidFill>
                             <a:srgbClr val="2C3E50"/>
                           </a:solidFill>
@@ -6390,76 +6044,7 @@
                     <a:p>
                       <a:pPr algn="ctr"/>
                       <a:r>
-                        <a:rPr sz="1400" b="0">
-                          <a:solidFill>
-                            <a:srgbClr val="2C3E50"/>
-                          </a:solidFill>
-                          <a:latin typeface="맑은 고딕"/>
-                        </a:rPr>
-                        <a:t>0.0</a:t>
-                      </a:r>
-                    </a:p>
-                  </a:txBody>
-                  <a:tcPr>
-                    <a:solidFill>
-                      <a:srgbClr val="FDEDED"/>
-                    </a:solidFill>
-                  </a:tcPr>
-                </a:tc>
-                <a:tc>
-                  <a:txBody>
-                    <a:bodyPr/>
-                    <a:lstStyle/>
-                    <a:p>
-                      <a:pPr algn="ctr"/>
-                      <a:r>
-                        <a:rPr sz="1400" b="0">
-                          <a:solidFill>
-                            <a:srgbClr val="2C3E50"/>
-                          </a:solidFill>
-                          <a:latin typeface="맑은 고딕"/>
-                        </a:rPr>
-                        <a:t>0.0</a:t>
-                      </a:r>
-                    </a:p>
-                  </a:txBody>
-                  <a:tcPr>
-                    <a:solidFill>
-                      <a:srgbClr val="FDEDED"/>
-                    </a:solidFill>
-                  </a:tcPr>
-                </a:tc>
-                <a:tc>
-                  <a:txBody>
-                    <a:bodyPr/>
-                    <a:lstStyle/>
-                    <a:p>
-                      <a:pPr algn="ctr"/>
-                      <a:r>
-                        <a:rPr sz="1400" b="0">
-                          <a:solidFill>
-                            <a:srgbClr val="2C3E50"/>
-                          </a:solidFill>
-                          <a:latin typeface="맑은 고딕"/>
-                        </a:rPr>
-                        <a:t>0.0</a:t>
-                      </a:r>
-                    </a:p>
-                  </a:txBody>
-                  <a:tcPr>
-                    <a:solidFill>
-                      <a:srgbClr val="FDEDED"/>
-                    </a:solidFill>
-                  </a:tcPr>
-                </a:tc>
-                <a:tc>
-                  <a:txBody>
-                    <a:bodyPr/>
-                    <a:lstStyle/>
-                    <a:p>
-                      <a:pPr algn="ctr"/>
-                      <a:r>
-                        <a:rPr sz="1400" b="0">
+                        <a:rPr sz="1500" b="0">
                           <a:solidFill>
                             <a:srgbClr val="2C3E50"/>
                           </a:solidFill>
@@ -6484,7 +6069,7 @@
                     <a:p>
                       <a:pPr algn="ctr"/>
                       <a:r>
-                        <a:rPr sz="1400" b="0">
+                        <a:rPr sz="1500" b="0">
                           <a:solidFill>
                             <a:srgbClr val="2C3E50"/>
                           </a:solidFill>
@@ -6507,7 +6092,7 @@
                     <a:p>
                       <a:pPr algn="ctr"/>
                       <a:r>
-                        <a:rPr sz="1400" b="0">
+                        <a:rPr sz="1500" b="0">
                           <a:solidFill>
                             <a:srgbClr val="2C3E50"/>
                           </a:solidFill>
@@ -6530,7 +6115,7 @@
                     <a:p>
                       <a:pPr algn="ctr"/>
                       <a:r>
-                        <a:rPr sz="1400" b="0">
+                        <a:rPr sz="1500" b="0">
                           <a:solidFill>
                             <a:srgbClr val="2C3E50"/>
                           </a:solidFill>
@@ -6553,7 +6138,7 @@
                     <a:p>
                       <a:pPr algn="ctr"/>
                       <a:r>
-                        <a:rPr sz="1400" b="0">
+                        <a:rPr sz="1500" b="0">
                           <a:solidFill>
                             <a:srgbClr val="2C3E50"/>
                           </a:solidFill>
@@ -6576,76 +6161,7 @@
                     <a:p>
                       <a:pPr algn="ctr"/>
                       <a:r>
-                        <a:rPr sz="1400" b="0">
-                          <a:solidFill>
-                            <a:srgbClr val="2C3E50"/>
-                          </a:solidFill>
-                          <a:latin typeface="맑은 고딕"/>
-                        </a:rPr>
-                        <a:t>0.0</a:t>
-                      </a:r>
-                    </a:p>
-                  </a:txBody>
-                  <a:tcPr>
-                    <a:solidFill>
-                      <a:srgbClr val="FDEDED"/>
-                    </a:solidFill>
-                  </a:tcPr>
-                </a:tc>
-                <a:tc>
-                  <a:txBody>
-                    <a:bodyPr/>
-                    <a:lstStyle/>
-                    <a:p>
-                      <a:pPr algn="ctr"/>
-                      <a:r>
-                        <a:rPr sz="1400" b="0">
-                          <a:solidFill>
-                            <a:srgbClr val="2C3E50"/>
-                          </a:solidFill>
-                          <a:latin typeface="맑은 고딕"/>
-                        </a:rPr>
-                        <a:t>0.0</a:t>
-                      </a:r>
-                    </a:p>
-                  </a:txBody>
-                  <a:tcPr>
-                    <a:solidFill>
-                      <a:srgbClr val="FDEDED"/>
-                    </a:solidFill>
-                  </a:tcPr>
-                </a:tc>
-                <a:tc>
-                  <a:txBody>
-                    <a:bodyPr/>
-                    <a:lstStyle/>
-                    <a:p>
-                      <a:pPr algn="ctr"/>
-                      <a:r>
-                        <a:rPr sz="1400" b="0">
-                          <a:solidFill>
-                            <a:srgbClr val="2C3E50"/>
-                          </a:solidFill>
-                          <a:latin typeface="맑은 고딕"/>
-                        </a:rPr>
-                        <a:t>0.0</a:t>
-                      </a:r>
-                    </a:p>
-                  </a:txBody>
-                  <a:tcPr>
-                    <a:solidFill>
-                      <a:srgbClr val="FDEDED"/>
-                    </a:solidFill>
-                  </a:tcPr>
-                </a:tc>
-                <a:tc>
-                  <a:txBody>
-                    <a:bodyPr/>
-                    <a:lstStyle/>
-                    <a:p>
-                      <a:pPr algn="ctr"/>
-                      <a:r>
-                        <a:rPr sz="1400" b="0">
+                        <a:rPr sz="1500" b="0">
                           <a:solidFill>
                             <a:srgbClr val="2C3E50"/>
                           </a:solidFill>
@@ -6670,7 +6186,7 @@
                     <a:p>
                       <a:pPr algn="ctr"/>
                       <a:r>
-                        <a:rPr sz="1400" b="0">
+                        <a:rPr sz="1500" b="0">
                           <a:solidFill>
                             <a:srgbClr val="2C3E50"/>
                           </a:solidFill>
@@ -6693,7 +6209,7 @@
                     <a:p>
                       <a:pPr algn="ctr"/>
                       <a:r>
-                        <a:rPr sz="1400" b="0">
+                        <a:rPr sz="1500" b="0">
                           <a:solidFill>
                             <a:srgbClr val="2C3E50"/>
                           </a:solidFill>
@@ -6716,7 +6232,7 @@
                     <a:p>
                       <a:pPr algn="ctr"/>
                       <a:r>
-                        <a:rPr sz="1400" b="0">
+                        <a:rPr sz="1500" b="0">
                           <a:solidFill>
                             <a:srgbClr val="2C3E50"/>
                           </a:solidFill>
@@ -6739,7 +6255,7 @@
                     <a:p>
                       <a:pPr algn="ctr"/>
                       <a:r>
-                        <a:rPr sz="1400" b="0">
+                        <a:rPr sz="1500" b="0">
                           <a:solidFill>
                             <a:srgbClr val="2C3E50"/>
                           </a:solidFill>
@@ -6762,7 +6278,7 @@
                     <a:p>
                       <a:pPr algn="ctr"/>
                       <a:r>
-                        <a:rPr sz="1400" b="0">
+                        <a:rPr sz="1500" b="0">
                           <a:solidFill>
                             <a:srgbClr val="2C3E50"/>
                           </a:solidFill>
@@ -6775,75 +6291,6 @@
                   <a:tcPr>
                     <a:solidFill>
                       <a:srgbClr val="FDEDED"/>
-                    </a:solidFill>
-                  </a:tcPr>
-                </a:tc>
-                <a:tc>
-                  <a:txBody>
-                    <a:bodyPr/>
-                    <a:lstStyle/>
-                    <a:p>
-                      <a:pPr algn="ctr"/>
-                      <a:r>
-                        <a:rPr sz="1400" b="0">
-                          <a:solidFill>
-                            <a:srgbClr val="2C3E50"/>
-                          </a:solidFill>
-                          <a:latin typeface="맑은 고딕"/>
-                        </a:rPr>
-                        <a:t>7.3</a:t>
-                      </a:r>
-                    </a:p>
-                  </a:txBody>
-                  <a:tcPr>
-                    <a:solidFill>
-                      <a:srgbClr val="D5F5E3"/>
-                    </a:solidFill>
-                  </a:tcPr>
-                </a:tc>
-                <a:tc>
-                  <a:txBody>
-                    <a:bodyPr/>
-                    <a:lstStyle/>
-                    <a:p>
-                      <a:pPr algn="ctr"/>
-                      <a:r>
-                        <a:rPr sz="1400" b="0">
-                          <a:solidFill>
-                            <a:srgbClr val="2C3E50"/>
-                          </a:solidFill>
-                          <a:latin typeface="맑은 고딕"/>
-                        </a:rPr>
-                        <a:t>8.7</a:t>
-                      </a:r>
-                    </a:p>
-                  </a:txBody>
-                  <a:tcPr>
-                    <a:solidFill>
-                      <a:srgbClr val="D5F5E3"/>
-                    </a:solidFill>
-                  </a:tcPr>
-                </a:tc>
-                <a:tc>
-                  <a:txBody>
-                    <a:bodyPr/>
-                    <a:lstStyle/>
-                    <a:p>
-                      <a:pPr algn="ctr"/>
-                      <a:r>
-                        <a:rPr sz="1400" b="0">
-                          <a:solidFill>
-                            <a:srgbClr val="2C3E50"/>
-                          </a:solidFill>
-                          <a:latin typeface="맑은 고딕"/>
-                        </a:rPr>
-                        <a:t>10.7</a:t>
-                      </a:r>
-                    </a:p>
-                  </a:txBody>
-                  <a:tcPr>
-                    <a:solidFill>
-                      <a:srgbClr val="D5F5E3"/>
                     </a:solidFill>
                   </a:tcPr>
                 </a:tc>
@@ -6856,7 +6303,7 @@
                     <a:p>
                       <a:pPr algn="ctr"/>
                       <a:r>
-                        <a:rPr sz="1400" b="0">
+                        <a:rPr sz="1500" b="0">
                           <a:solidFill>
                             <a:srgbClr val="2C3E50"/>
                           </a:solidFill>
@@ -6879,7 +6326,7 @@
                     <a:p>
                       <a:pPr algn="ctr"/>
                       <a:r>
-                        <a:rPr sz="1400" b="0">
+                        <a:rPr sz="1500" b="0">
                           <a:solidFill>
                             <a:srgbClr val="2C3E50"/>
                           </a:solidFill>
@@ -6902,7 +6349,7 @@
                     <a:p>
                       <a:pPr algn="ctr"/>
                       <a:r>
-                        <a:rPr sz="1400" b="0">
+                        <a:rPr sz="1500" b="0">
                           <a:solidFill>
                             <a:srgbClr val="2C3E50"/>
                           </a:solidFill>
@@ -6925,7 +6372,7 @@
                     <a:p>
                       <a:pPr algn="ctr"/>
                       <a:r>
-                        <a:rPr sz="1400" b="0">
+                        <a:rPr sz="1500" b="0">
                           <a:solidFill>
                             <a:srgbClr val="2C3E50"/>
                           </a:solidFill>
@@ -6948,7 +6395,7 @@
                     <a:p>
                       <a:pPr algn="ctr"/>
                       <a:r>
-                        <a:rPr sz="1400" b="0">
+                        <a:rPr sz="1500" b="0">
                           <a:solidFill>
                             <a:srgbClr val="2C3E50"/>
                           </a:solidFill>
@@ -6961,75 +6408,6 @@
                   <a:tcPr>
                     <a:solidFill>
                       <a:srgbClr val="FDEDED"/>
-                    </a:solidFill>
-                  </a:tcPr>
-                </a:tc>
-                <a:tc>
-                  <a:txBody>
-                    <a:bodyPr/>
-                    <a:lstStyle/>
-                    <a:p>
-                      <a:pPr algn="ctr"/>
-                      <a:r>
-                        <a:rPr sz="1400" b="0">
-                          <a:solidFill>
-                            <a:srgbClr val="2C3E50"/>
-                          </a:solidFill>
-                          <a:latin typeface="맑은 고딕"/>
-                        </a:rPr>
-                        <a:t>19.5</a:t>
-                      </a:r>
-                    </a:p>
-                  </a:txBody>
-                  <a:tcPr>
-                    <a:solidFill>
-                      <a:srgbClr val="D5F5E3"/>
-                    </a:solidFill>
-                  </a:tcPr>
-                </a:tc>
-                <a:tc>
-                  <a:txBody>
-                    <a:bodyPr/>
-                    <a:lstStyle/>
-                    <a:p>
-                      <a:pPr algn="ctr"/>
-                      <a:r>
-                        <a:rPr sz="1400" b="0">
-                          <a:solidFill>
-                            <a:srgbClr val="2C3E50"/>
-                          </a:solidFill>
-                          <a:latin typeface="맑은 고딕"/>
-                        </a:rPr>
-                        <a:t>16.6</a:t>
-                      </a:r>
-                    </a:p>
-                  </a:txBody>
-                  <a:tcPr>
-                    <a:solidFill>
-                      <a:srgbClr val="D5F5E3"/>
-                    </a:solidFill>
-                  </a:tcPr>
-                </a:tc>
-                <a:tc>
-                  <a:txBody>
-                    <a:bodyPr/>
-                    <a:lstStyle/>
-                    <a:p>
-                      <a:pPr algn="ctr"/>
-                      <a:r>
-                        <a:rPr sz="1400" b="0">
-                          <a:solidFill>
-                            <a:srgbClr val="2C3E50"/>
-                          </a:solidFill>
-                          <a:latin typeface="맑은 고딕"/>
-                        </a:rPr>
-                        <a:t>17.3</a:t>
-                      </a:r>
-                    </a:p>
-                  </a:txBody>
-                  <a:tcPr>
-                    <a:solidFill>
-                      <a:srgbClr val="D5F5E3"/>
                     </a:solidFill>
                   </a:tcPr>
                 </a:tc>
@@ -7042,7 +6420,7 @@
                     <a:p>
                       <a:pPr algn="ctr"/>
                       <a:r>
-                        <a:rPr sz="1400" b="0">
+                        <a:rPr sz="1500" b="0">
                           <a:solidFill>
                             <a:srgbClr val="2C3E50"/>
                           </a:solidFill>
@@ -7065,7 +6443,7 @@
                     <a:p>
                       <a:pPr algn="ctr"/>
                       <a:r>
-                        <a:rPr sz="1400" b="0">
+                        <a:rPr sz="1500" b="0">
                           <a:solidFill>
                             <a:srgbClr val="2C3E50"/>
                           </a:solidFill>
@@ -7088,7 +6466,7 @@
                     <a:p>
                       <a:pPr algn="ctr"/>
                       <a:r>
-                        <a:rPr sz="1400" b="0">
+                        <a:rPr sz="1500" b="0">
                           <a:solidFill>
                             <a:srgbClr val="2C3E50"/>
                           </a:solidFill>
@@ -7111,7 +6489,7 @@
                     <a:p>
                       <a:pPr algn="ctr"/>
                       <a:r>
-                        <a:rPr sz="1400" b="0">
+                        <a:rPr sz="1500" b="0">
                           <a:solidFill>
                             <a:srgbClr val="2C3E50"/>
                           </a:solidFill>
@@ -7134,7 +6512,7 @@
                     <a:p>
                       <a:pPr algn="ctr"/>
                       <a:r>
-                        <a:rPr sz="1400" b="0">
+                        <a:rPr sz="1500" b="0">
                           <a:solidFill>
                             <a:srgbClr val="2C3E50"/>
                           </a:solidFill>
@@ -7147,75 +6525,6 @@
                   <a:tcPr>
                     <a:solidFill>
                       <a:srgbClr val="FDEDED"/>
-                    </a:solidFill>
-                  </a:tcPr>
-                </a:tc>
-                <a:tc>
-                  <a:txBody>
-                    <a:bodyPr/>
-                    <a:lstStyle/>
-                    <a:p>
-                      <a:pPr algn="ctr"/>
-                      <a:r>
-                        <a:rPr sz="1400" b="0">
-                          <a:solidFill>
-                            <a:srgbClr val="2C3E50"/>
-                          </a:solidFill>
-                          <a:latin typeface="맑은 고딕"/>
-                        </a:rPr>
-                        <a:t>85.9</a:t>
-                      </a:r>
-                    </a:p>
-                  </a:txBody>
-                  <a:tcPr>
-                    <a:solidFill>
-                      <a:srgbClr val="D5F5E3"/>
-                    </a:solidFill>
-                  </a:tcPr>
-                </a:tc>
-                <a:tc>
-                  <a:txBody>
-                    <a:bodyPr/>
-                    <a:lstStyle/>
-                    <a:p>
-                      <a:pPr algn="ctr"/>
-                      <a:r>
-                        <a:rPr sz="1400" b="0">
-                          <a:solidFill>
-                            <a:srgbClr val="2C3E50"/>
-                          </a:solidFill>
-                          <a:latin typeface="맑은 고딕"/>
-                        </a:rPr>
-                        <a:t>81.2</a:t>
-                      </a:r>
-                    </a:p>
-                  </a:txBody>
-                  <a:tcPr>
-                    <a:solidFill>
-                      <a:srgbClr val="D5F5E3"/>
-                    </a:solidFill>
-                  </a:tcPr>
-                </a:tc>
-                <a:tc>
-                  <a:txBody>
-                    <a:bodyPr/>
-                    <a:lstStyle/>
-                    <a:p>
-                      <a:pPr algn="ctr"/>
-                      <a:r>
-                        <a:rPr sz="1400" b="0">
-                          <a:solidFill>
-                            <a:srgbClr val="2C3E50"/>
-                          </a:solidFill>
-                          <a:latin typeface="맑은 고딕"/>
-                        </a:rPr>
-                        <a:t>85.6</a:t>
-                      </a:r>
-                    </a:p>
-                  </a:txBody>
-                  <a:tcPr>
-                    <a:solidFill>
-                      <a:srgbClr val="D5F5E3"/>
                     </a:solidFill>
                   </a:tcPr>
                 </a:tc>
@@ -7228,7 +6537,7 @@
                     <a:p>
                       <a:pPr algn="ctr"/>
                       <a:r>
-                        <a:rPr sz="1400" b="0">
+                        <a:rPr sz="1500" b="0">
                           <a:solidFill>
                             <a:srgbClr val="2C3E50"/>
                           </a:solidFill>
@@ -7251,7 +6560,7 @@
                     <a:p>
                       <a:pPr algn="ctr"/>
                       <a:r>
-                        <a:rPr sz="1400" b="0">
+                        <a:rPr sz="1500" b="0">
                           <a:solidFill>
                             <a:srgbClr val="2C3E50"/>
                           </a:solidFill>
@@ -7274,7 +6583,7 @@
                     <a:p>
                       <a:pPr algn="ctr"/>
                       <a:r>
-                        <a:rPr sz="1400" b="0">
+                        <a:rPr sz="1500" b="0">
                           <a:solidFill>
                             <a:srgbClr val="2C3E50"/>
                           </a:solidFill>
@@ -7297,7 +6606,7 @@
                     <a:p>
                       <a:pPr algn="ctr"/>
                       <a:r>
-                        <a:rPr sz="1400" b="0">
+                        <a:rPr sz="1500" b="0">
                           <a:solidFill>
                             <a:srgbClr val="2C3E50"/>
                           </a:solidFill>
@@ -7320,7 +6629,7 @@
                     <a:p>
                       <a:pPr algn="ctr"/>
                       <a:r>
-                        <a:rPr sz="1400" b="0">
+                        <a:rPr sz="1500" b="0">
                           <a:solidFill>
                             <a:srgbClr val="2C3E50"/>
                           </a:solidFill>
@@ -7333,75 +6642,6 @@
                   <a:tcPr>
                     <a:solidFill>
                       <a:srgbClr val="FDEDED"/>
-                    </a:solidFill>
-                  </a:tcPr>
-                </a:tc>
-                <a:tc>
-                  <a:txBody>
-                    <a:bodyPr/>
-                    <a:lstStyle/>
-                    <a:p>
-                      <a:pPr algn="ctr"/>
-                      <a:r>
-                        <a:rPr sz="1400" b="0">
-                          <a:solidFill>
-                            <a:srgbClr val="2C3E50"/>
-                          </a:solidFill>
-                          <a:latin typeface="맑은 고딕"/>
-                        </a:rPr>
-                        <a:t>2.9</a:t>
-                      </a:r>
-                    </a:p>
-                  </a:txBody>
-                  <a:tcPr>
-                    <a:solidFill>
-                      <a:srgbClr val="D5F5E3"/>
-                    </a:solidFill>
-                  </a:tcPr>
-                </a:tc>
-                <a:tc>
-                  <a:txBody>
-                    <a:bodyPr/>
-                    <a:lstStyle/>
-                    <a:p>
-                      <a:pPr algn="ctr"/>
-                      <a:r>
-                        <a:rPr sz="1400" b="0">
-                          <a:solidFill>
-                            <a:srgbClr val="2C3E50"/>
-                          </a:solidFill>
-                          <a:latin typeface="맑은 고딕"/>
-                        </a:rPr>
-                        <a:t>10.9</a:t>
-                      </a:r>
-                    </a:p>
-                  </a:txBody>
-                  <a:tcPr>
-                    <a:solidFill>
-                      <a:srgbClr val="D5F5E3"/>
-                    </a:solidFill>
-                  </a:tcPr>
-                </a:tc>
-                <a:tc>
-                  <a:txBody>
-                    <a:bodyPr/>
-                    <a:lstStyle/>
-                    <a:p>
-                      <a:pPr algn="ctr"/>
-                      <a:r>
-                        <a:rPr sz="1400" b="0">
-                          <a:solidFill>
-                            <a:srgbClr val="2C3E50"/>
-                          </a:solidFill>
-                          <a:latin typeface="맑은 고딕"/>
-                        </a:rPr>
-                        <a:t>17.2</a:t>
-                      </a:r>
-                    </a:p>
-                  </a:txBody>
-                  <a:tcPr>
-                    <a:solidFill>
-                      <a:srgbClr val="D5F5E3"/>
                     </a:solidFill>
                   </a:tcPr>
                 </a:tc>
@@ -7440,7 +6680,7 @@
                 </a:solidFill>
                 <a:latin typeface="맑은 고딕"/>
               </a:rPr>
-              <a:t>빨강 = 0% (해당 클래스 예측 불가)  |  초록 = 유의미한 예측 성능</a:t>
+              <a:t>LR/MLP 77d: Strike만 예측  |  LGB: 전 클래스 균등하게 낮음  |  빨강 = 0%</a:t>
             </a:r>
           </a:p>
         </p:txBody>
@@ -7536,7 +6776,7 @@
                 </a:solidFill>
                 <a:latin typeface="맑은 고딕"/>
               </a:rPr>
-              <a:t>Per-class Top-4 Accuracy (%)</a:t>
+              <a:t>Per-class Top-1 Accuracy — Context &amp; Sequence 모델</a:t>
             </a:r>
           </a:p>
         </p:txBody>
@@ -7550,8 +6790,8 @@
           <p:nvPr/>
         </p:nvGraphicFramePr>
         <p:xfrm>
-          <a:off x="472287.5" y="1005840"/>
-          <a:ext cx="10607040" cy="5303520"/>
+          <a:off x="883767.5" y="1005840"/>
+          <a:ext cx="10424160" cy="5029200"/>
         </p:xfrm>
         <a:graphic>
           <a:graphicData uri="http://schemas.openxmlformats.org/drawingml/2006/table">
@@ -7560,24 +6800,21 @@
                 <a:tableStyleId>{5C22544A-7EE6-4342-B048-85BDC9FD1C3A}</a:tableStyleId>
               </a:tblPr>
               <a:tblGrid>
-                <a:gridCol w="1371600"/>
-                <a:gridCol w="914400"/>
-                <a:gridCol w="1097280"/>
-                <a:gridCol w="1097280"/>
-                <a:gridCol w="1371600"/>
-                <a:gridCol w="1463040"/>
-                <a:gridCol w="1463040"/>
-                <a:gridCol w="1828800"/>
+                <a:gridCol w="1645920"/>
+                <a:gridCol w="1005840"/>
+                <a:gridCol w="2587752"/>
+                <a:gridCol w="2587752"/>
+                <a:gridCol w="2596896"/>
               </a:tblGrid>
-              <a:tr h="441960">
-                <a:tc>
-                  <a:txBody>
-                    <a:bodyPr/>
-                    <a:lstStyle/>
-                    <a:p>
-                      <a:pPr algn="ctr"/>
-                      <a:r>
-                        <a:rPr sz="1400" b="1">
+              <a:tr h="457200">
+                <a:tc>
+                  <a:txBody>
+                    <a:bodyPr/>
+                    <a:lstStyle/>
+                    <a:p>
+                      <a:pPr algn="ctr"/>
+                      <a:r>
+                        <a:rPr sz="1500" b="1">
                           <a:solidFill>
                             <a:srgbClr val="FFFFFF"/>
                           </a:solidFill>
@@ -7600,7 +6837,7 @@
                     <a:p>
                       <a:pPr algn="ctr"/>
                       <a:r>
-                        <a:rPr sz="1400" b="1">
+                        <a:rPr sz="1500" b="1">
                           <a:solidFill>
                             <a:srgbClr val="FFFFFF"/>
                           </a:solidFill>
@@ -7623,13 +6860,13 @@
                     <a:p>
                       <a:pPr algn="ctr"/>
                       <a:r>
-                        <a:rPr sz="1400" b="1">
+                        <a:rPr sz="1500" b="1">
                           <a:solidFill>
                             <a:srgbClr val="FFFFFF"/>
                           </a:solidFill>
                           <a:latin typeface="맑은 고딕"/>
                         </a:rPr>
-                        <a:t>LR</a:t>
+                        <a:t>MLP 135d</a:t>
                       </a:r>
                     </a:p>
                   </a:txBody>
@@ -7646,13 +6883,13 @@
                     <a:p>
                       <a:pPr algn="ctr"/>
                       <a:r>
-                        <a:rPr sz="1400" b="1">
+                        <a:rPr sz="1500" b="1">
                           <a:solidFill>
                             <a:srgbClr val="FFFFFF"/>
                           </a:solidFill>
                           <a:latin typeface="맑은 고딕"/>
                         </a:rPr>
-                        <a:t>LGB</a:t>
+                        <a:t>RNN</a:t>
                       </a:r>
                     </a:p>
                   </a:txBody>
@@ -7669,13 +6906,13 @@
                     <a:p>
                       <a:pPr algn="ctr"/>
                       <a:r>
-                        <a:rPr sz="1400" b="1">
+                        <a:rPr sz="1500" b="1">
                           <a:solidFill>
                             <a:srgbClr val="FFFFFF"/>
                           </a:solidFill>
                           <a:latin typeface="맑은 고딕"/>
                         </a:rPr>
-                        <a:t>MLP 77d</a:t>
+                        <a:t>Transformer</a:t>
                       </a:r>
                     </a:p>
                   </a:txBody>
@@ -7685,85 +6922,16 @@
                     </a:solidFill>
                   </a:tcPr>
                 </a:tc>
-                <a:tc>
-                  <a:txBody>
-                    <a:bodyPr/>
-                    <a:lstStyle/>
-                    <a:p>
-                      <a:pPr algn="ctr"/>
-                      <a:r>
-                        <a:rPr sz="1400" b="1">
-                          <a:solidFill>
-                            <a:srgbClr val="FFFFFF"/>
-                          </a:solidFill>
-                          <a:latin typeface="맑은 고딕"/>
-                        </a:rPr>
-                        <a:t>MLP 135d</a:t>
-                      </a:r>
-                    </a:p>
-                  </a:txBody>
-                  <a:tcPr>
-                    <a:solidFill>
-                      <a:srgbClr val="2980B9"/>
-                    </a:solidFill>
-                  </a:tcPr>
-                </a:tc>
-                <a:tc>
-                  <a:txBody>
-                    <a:bodyPr/>
-                    <a:lstStyle/>
-                    <a:p>
-                      <a:pPr algn="ctr"/>
-                      <a:r>
-                        <a:rPr sz="1400" b="1">
-                          <a:solidFill>
-                            <a:srgbClr val="FFFFFF"/>
-                          </a:solidFill>
-                          <a:latin typeface="맑은 고딕"/>
-                        </a:rPr>
-                        <a:t>RNN</a:t>
-                      </a:r>
-                    </a:p>
-                  </a:txBody>
-                  <a:tcPr>
-                    <a:solidFill>
-                      <a:srgbClr val="2980B9"/>
-                    </a:solidFill>
-                  </a:tcPr>
-                </a:tc>
-                <a:tc>
-                  <a:txBody>
-                    <a:bodyPr/>
-                    <a:lstStyle/>
-                    <a:p>
-                      <a:pPr algn="ctr"/>
-                      <a:r>
-                        <a:rPr sz="1400" b="1">
-                          <a:solidFill>
-                            <a:srgbClr val="FFFFFF"/>
-                          </a:solidFill>
-                          <a:latin typeface="맑은 고딕"/>
-                        </a:rPr>
-                        <a:t>Transformer</a:t>
-                      </a:r>
-                    </a:p>
-                  </a:txBody>
-                  <a:tcPr>
-                    <a:solidFill>
-                      <a:srgbClr val="2980B9"/>
-                    </a:solidFill>
-                  </a:tcPr>
-                </a:tc>
               </a:tr>
-              <a:tr h="441960">
-                <a:tc>
-                  <a:txBody>
-                    <a:bodyPr/>
-                    <a:lstStyle/>
-                    <a:p>
-                      <a:pPr algn="ctr"/>
-                      <a:r>
-                        <a:rPr sz="1400" b="0">
+              <a:tr h="457200">
+                <a:tc>
+                  <a:txBody>
+                    <a:bodyPr/>
+                    <a:lstStyle/>
+                    <a:p>
+                      <a:pPr algn="ctr"/>
+                      <a:r>
+                        <a:rPr sz="1500" b="0">
                           <a:solidFill>
                             <a:srgbClr val="2C3E50"/>
                           </a:solidFill>
@@ -7786,7 +6954,7 @@
                     <a:p>
                       <a:pPr algn="ctr"/>
                       <a:r>
-                        <a:rPr sz="1400" b="0">
+                        <a:rPr sz="1500" b="0">
                           <a:solidFill>
                             <a:srgbClr val="2C3E50"/>
                           </a:solidFill>
@@ -7809,13 +6977,84 @@
                     <a:p>
                       <a:pPr algn="ctr"/>
                       <a:r>
-                        <a:rPr sz="1400" b="0">
-                          <a:solidFill>
-                            <a:srgbClr val="2C3E50"/>
-                          </a:solidFill>
-                          <a:latin typeface="맑은 고딕"/>
-                        </a:rPr>
-                        <a:t>100.0</a:t>
+                        <a:rPr sz="1500" b="0">
+                          <a:solidFill>
+                            <a:srgbClr val="2C3E50"/>
+                          </a:solidFill>
+                          <a:latin typeface="맑은 고딕"/>
+                        </a:rPr>
+                        <a:t>88.4</a:t>
+                      </a:r>
+                    </a:p>
+                  </a:txBody>
+                  <a:tcPr>
+                    <a:solidFill>
+                      <a:srgbClr val="D5F5E3"/>
+                    </a:solidFill>
+                  </a:tcPr>
+                </a:tc>
+                <a:tc>
+                  <a:txBody>
+                    <a:bodyPr/>
+                    <a:lstStyle/>
+                    <a:p>
+                      <a:pPr algn="ctr"/>
+                      <a:r>
+                        <a:rPr sz="1500" b="0">
+                          <a:solidFill>
+                            <a:srgbClr val="2C3E50"/>
+                          </a:solidFill>
+                          <a:latin typeface="맑은 고딕"/>
+                        </a:rPr>
+                        <a:t>87.2</a:t>
+                      </a:r>
+                    </a:p>
+                  </a:txBody>
+                  <a:tcPr>
+                    <a:solidFill>
+                      <a:srgbClr val="D5F5E3"/>
+                    </a:solidFill>
+                  </a:tcPr>
+                </a:tc>
+                <a:tc>
+                  <a:txBody>
+                    <a:bodyPr/>
+                    <a:lstStyle/>
+                    <a:p>
+                      <a:pPr algn="ctr"/>
+                      <a:r>
+                        <a:rPr sz="1500" b="0">
+                          <a:solidFill>
+                            <a:srgbClr val="2C3E50"/>
+                          </a:solidFill>
+                          <a:latin typeface="맑은 고딕"/>
+                        </a:rPr>
+                        <a:t>87.6</a:t>
+                      </a:r>
+                    </a:p>
+                  </a:txBody>
+                  <a:tcPr>
+                    <a:solidFill>
+                      <a:srgbClr val="D5F5E3"/>
+                    </a:solidFill>
+                  </a:tcPr>
+                </a:tc>
+              </a:tr>
+              <a:tr h="457200">
+                <a:tc>
+                  <a:txBody>
+                    <a:bodyPr/>
+                    <a:lstStyle/>
+                    <a:p>
+                      <a:pPr algn="ctr"/>
+                      <a:r>
+                        <a:rPr sz="1500" b="0">
+                          <a:solidFill>
+                            <a:srgbClr val="2C3E50"/>
+                          </a:solidFill>
+                          <a:latin typeface="맑은 고딕"/>
+                        </a:rPr>
+                        <a:t>Strike</a:t>
                       </a:r>
                     </a:p>
                   </a:txBody>
@@ -7832,13 +7071,13 @@
                     <a:p>
                       <a:pPr algn="ctr"/>
                       <a:r>
-                        <a:rPr sz="1400" b="0">
-                          <a:solidFill>
-                            <a:srgbClr val="2C3E50"/>
-                          </a:solidFill>
-                          <a:latin typeface="맑은 고딕"/>
-                        </a:rPr>
-                        <a:t>70.6</a:t>
+                        <a:rPr sz="1500" b="0">
+                          <a:solidFill>
+                            <a:srgbClr val="2C3E50"/>
+                          </a:solidFill>
+                          <a:latin typeface="맑은 고딕"/>
+                        </a:rPr>
+                        <a:t>41.11%</a:t>
                       </a:r>
                     </a:p>
                   </a:txBody>
@@ -7855,13 +7094,84 @@
                     <a:p>
                       <a:pPr algn="ctr"/>
                       <a:r>
-                        <a:rPr sz="1400" b="0">
-                          <a:solidFill>
-                            <a:srgbClr val="2C3E50"/>
-                          </a:solidFill>
-                          <a:latin typeface="맑은 고딕"/>
-                        </a:rPr>
-                        <a:t>100.0</a:t>
+                        <a:rPr sz="1500" b="0">
+                          <a:solidFill>
+                            <a:srgbClr val="2C3E50"/>
+                          </a:solidFill>
+                          <a:latin typeface="맑은 고딕"/>
+                        </a:rPr>
+                        <a:t>83.7</a:t>
+                      </a:r>
+                    </a:p>
+                  </a:txBody>
+                  <a:tcPr>
+                    <a:solidFill>
+                      <a:srgbClr val="D5F5E3"/>
+                    </a:solidFill>
+                  </a:tcPr>
+                </a:tc>
+                <a:tc>
+                  <a:txBody>
+                    <a:bodyPr/>
+                    <a:lstStyle/>
+                    <a:p>
+                      <a:pPr algn="ctr"/>
+                      <a:r>
+                        <a:rPr sz="1500" b="0">
+                          <a:solidFill>
+                            <a:srgbClr val="2C3E50"/>
+                          </a:solidFill>
+                          <a:latin typeface="맑은 고딕"/>
+                        </a:rPr>
+                        <a:t>82.8</a:t>
+                      </a:r>
+                    </a:p>
+                  </a:txBody>
+                  <a:tcPr>
+                    <a:solidFill>
+                      <a:srgbClr val="D5F5E3"/>
+                    </a:solidFill>
+                  </a:tcPr>
+                </a:tc>
+                <a:tc>
+                  <a:txBody>
+                    <a:bodyPr/>
+                    <a:lstStyle/>
+                    <a:p>
+                      <a:pPr algn="ctr"/>
+                      <a:r>
+                        <a:rPr sz="1500" b="0">
+                          <a:solidFill>
+                            <a:srgbClr val="2C3E50"/>
+                          </a:solidFill>
+                          <a:latin typeface="맑은 고딕"/>
+                        </a:rPr>
+                        <a:t>82.2</a:t>
+                      </a:r>
+                    </a:p>
+                  </a:txBody>
+                  <a:tcPr>
+                    <a:solidFill>
+                      <a:srgbClr val="D5F5E3"/>
+                    </a:solidFill>
+                  </a:tcPr>
+                </a:tc>
+              </a:tr>
+              <a:tr h="457200">
+                <a:tc>
+                  <a:txBody>
+                    <a:bodyPr/>
+                    <a:lstStyle/>
+                    <a:p>
+                      <a:pPr algn="ctr"/>
+                      <a:r>
+                        <a:rPr sz="1500" b="0">
+                          <a:solidFill>
+                            <a:srgbClr val="2C3E50"/>
+                          </a:solidFill>
+                          <a:latin typeface="맑은 고딕"/>
+                        </a:rPr>
+                        <a:t>Single</a:t>
                       </a:r>
                     </a:p>
                   </a:txBody>
@@ -7878,13 +7188,738 @@
                     <a:p>
                       <a:pPr algn="ctr"/>
                       <a:r>
-                        <a:rPr sz="1400" b="0">
-                          <a:solidFill>
-                            <a:srgbClr val="2C3E50"/>
-                          </a:solidFill>
-                          <a:latin typeface="맑은 고딕"/>
-                        </a:rPr>
-                        <a:t>99.6</a:t>
+                        <a:rPr sz="1500" b="0">
+                          <a:solidFill>
+                            <a:srgbClr val="2C3E50"/>
+                          </a:solidFill>
+                          <a:latin typeface="맑은 고딕"/>
+                        </a:rPr>
+                        <a:t>3.64%</a:t>
+                      </a:r>
+                    </a:p>
+                  </a:txBody>
+                  <a:tcPr>
+                    <a:solidFill>
+                      <a:srgbClr val="FFFFFF"/>
+                    </a:solidFill>
+                  </a:tcPr>
+                </a:tc>
+                <a:tc>
+                  <a:txBody>
+                    <a:bodyPr/>
+                    <a:lstStyle/>
+                    <a:p>
+                      <a:pPr algn="ctr"/>
+                      <a:r>
+                        <a:rPr sz="1500" b="0">
+                          <a:solidFill>
+                            <a:srgbClr val="2C3E50"/>
+                          </a:solidFill>
+                          <a:latin typeface="맑은 고딕"/>
+                        </a:rPr>
+                        <a:t>0.0</a:t>
+                      </a:r>
+                    </a:p>
+                  </a:txBody>
+                  <a:tcPr>
+                    <a:solidFill>
+                      <a:srgbClr val="FDEDED"/>
+                    </a:solidFill>
+                  </a:tcPr>
+                </a:tc>
+                <a:tc>
+                  <a:txBody>
+                    <a:bodyPr/>
+                    <a:lstStyle/>
+                    <a:p>
+                      <a:pPr algn="ctr"/>
+                      <a:r>
+                        <a:rPr sz="1500" b="0">
+                          <a:solidFill>
+                            <a:srgbClr val="2C3E50"/>
+                          </a:solidFill>
+                          <a:latin typeface="맑은 고딕"/>
+                        </a:rPr>
+                        <a:t>0.0</a:t>
+                      </a:r>
+                    </a:p>
+                  </a:txBody>
+                  <a:tcPr>
+                    <a:solidFill>
+                      <a:srgbClr val="FDEDED"/>
+                    </a:solidFill>
+                  </a:tcPr>
+                </a:tc>
+                <a:tc>
+                  <a:txBody>
+                    <a:bodyPr/>
+                    <a:lstStyle/>
+                    <a:p>
+                      <a:pPr algn="ctr"/>
+                      <a:r>
+                        <a:rPr sz="1500" b="0">
+                          <a:solidFill>
+                            <a:srgbClr val="2C3E50"/>
+                          </a:solidFill>
+                          <a:latin typeface="맑은 고딕"/>
+                        </a:rPr>
+                        <a:t>0.0</a:t>
+                      </a:r>
+                    </a:p>
+                  </a:txBody>
+                  <a:tcPr>
+                    <a:solidFill>
+                      <a:srgbClr val="FDEDED"/>
+                    </a:solidFill>
+                  </a:tcPr>
+                </a:tc>
+              </a:tr>
+              <a:tr h="457200">
+                <a:tc>
+                  <a:txBody>
+                    <a:bodyPr/>
+                    <a:lstStyle/>
+                    <a:p>
+                      <a:pPr algn="ctr"/>
+                      <a:r>
+                        <a:rPr sz="1500" b="0">
+                          <a:solidFill>
+                            <a:srgbClr val="2C3E50"/>
+                          </a:solidFill>
+                          <a:latin typeface="맑은 고딕"/>
+                        </a:rPr>
+                        <a:t>Double</a:t>
+                      </a:r>
+                    </a:p>
+                  </a:txBody>
+                  <a:tcPr>
+                    <a:solidFill>
+                      <a:srgbClr val="FFFFFF"/>
+                    </a:solidFill>
+                  </a:tcPr>
+                </a:tc>
+                <a:tc>
+                  <a:txBody>
+                    <a:bodyPr/>
+                    <a:lstStyle/>
+                    <a:p>
+                      <a:pPr algn="ctr"/>
+                      <a:r>
+                        <a:rPr sz="1500" b="0">
+                          <a:solidFill>
+                            <a:srgbClr val="2C3E50"/>
+                          </a:solidFill>
+                          <a:latin typeface="맑은 고딕"/>
+                        </a:rPr>
+                        <a:t>1.09%</a:t>
+                      </a:r>
+                    </a:p>
+                  </a:txBody>
+                  <a:tcPr>
+                    <a:solidFill>
+                      <a:srgbClr val="FFFFFF"/>
+                    </a:solidFill>
+                  </a:tcPr>
+                </a:tc>
+                <a:tc>
+                  <a:txBody>
+                    <a:bodyPr/>
+                    <a:lstStyle/>
+                    <a:p>
+                      <a:pPr algn="ctr"/>
+                      <a:r>
+                        <a:rPr sz="1500" b="0">
+                          <a:solidFill>
+                            <a:srgbClr val="2C3E50"/>
+                          </a:solidFill>
+                          <a:latin typeface="맑은 고딕"/>
+                        </a:rPr>
+                        <a:t>0.0</a:t>
+                      </a:r>
+                    </a:p>
+                  </a:txBody>
+                  <a:tcPr>
+                    <a:solidFill>
+                      <a:srgbClr val="FDEDED"/>
+                    </a:solidFill>
+                  </a:tcPr>
+                </a:tc>
+                <a:tc>
+                  <a:txBody>
+                    <a:bodyPr/>
+                    <a:lstStyle/>
+                    <a:p>
+                      <a:pPr algn="ctr"/>
+                      <a:r>
+                        <a:rPr sz="1500" b="0">
+                          <a:solidFill>
+                            <a:srgbClr val="2C3E50"/>
+                          </a:solidFill>
+                          <a:latin typeface="맑은 고딕"/>
+                        </a:rPr>
+                        <a:t>0.0</a:t>
+                      </a:r>
+                    </a:p>
+                  </a:txBody>
+                  <a:tcPr>
+                    <a:solidFill>
+                      <a:srgbClr val="FDEDED"/>
+                    </a:solidFill>
+                  </a:tcPr>
+                </a:tc>
+                <a:tc>
+                  <a:txBody>
+                    <a:bodyPr/>
+                    <a:lstStyle/>
+                    <a:p>
+                      <a:pPr algn="ctr"/>
+                      <a:r>
+                        <a:rPr sz="1500" b="0">
+                          <a:solidFill>
+                            <a:srgbClr val="2C3E50"/>
+                          </a:solidFill>
+                          <a:latin typeface="맑은 고딕"/>
+                        </a:rPr>
+                        <a:t>0.0</a:t>
+                      </a:r>
+                    </a:p>
+                  </a:txBody>
+                  <a:tcPr>
+                    <a:solidFill>
+                      <a:srgbClr val="FDEDED"/>
+                    </a:solidFill>
+                  </a:tcPr>
+                </a:tc>
+              </a:tr>
+              <a:tr h="457200">
+                <a:tc>
+                  <a:txBody>
+                    <a:bodyPr/>
+                    <a:lstStyle/>
+                    <a:p>
+                      <a:pPr algn="ctr"/>
+                      <a:r>
+                        <a:rPr sz="1500" b="0">
+                          <a:solidFill>
+                            <a:srgbClr val="2C3E50"/>
+                          </a:solidFill>
+                          <a:latin typeface="맑은 고딕"/>
+                        </a:rPr>
+                        <a:t>Triple</a:t>
+                      </a:r>
+                    </a:p>
+                  </a:txBody>
+                  <a:tcPr>
+                    <a:solidFill>
+                      <a:srgbClr val="FFFFFF"/>
+                    </a:solidFill>
+                  </a:tcPr>
+                </a:tc>
+                <a:tc>
+                  <a:txBody>
+                    <a:bodyPr/>
+                    <a:lstStyle/>
+                    <a:p>
+                      <a:pPr algn="ctr"/>
+                      <a:r>
+                        <a:rPr sz="1500" b="0">
+                          <a:solidFill>
+                            <a:srgbClr val="2C3E50"/>
+                          </a:solidFill>
+                          <a:latin typeface="맑은 고딕"/>
+                        </a:rPr>
+                        <a:t>0.09%</a:t>
+                      </a:r>
+                    </a:p>
+                  </a:txBody>
+                  <a:tcPr>
+                    <a:solidFill>
+                      <a:srgbClr val="FFFFFF"/>
+                    </a:solidFill>
+                  </a:tcPr>
+                </a:tc>
+                <a:tc>
+                  <a:txBody>
+                    <a:bodyPr/>
+                    <a:lstStyle/>
+                    <a:p>
+                      <a:pPr algn="ctr"/>
+                      <a:r>
+                        <a:rPr sz="1500" b="0">
+                          <a:solidFill>
+                            <a:srgbClr val="2C3E50"/>
+                          </a:solidFill>
+                          <a:latin typeface="맑은 고딕"/>
+                        </a:rPr>
+                        <a:t>0.0</a:t>
+                      </a:r>
+                    </a:p>
+                  </a:txBody>
+                  <a:tcPr>
+                    <a:solidFill>
+                      <a:srgbClr val="FDEDED"/>
+                    </a:solidFill>
+                  </a:tcPr>
+                </a:tc>
+                <a:tc>
+                  <a:txBody>
+                    <a:bodyPr/>
+                    <a:lstStyle/>
+                    <a:p>
+                      <a:pPr algn="ctr"/>
+                      <a:r>
+                        <a:rPr sz="1500" b="0">
+                          <a:solidFill>
+                            <a:srgbClr val="2C3E50"/>
+                          </a:solidFill>
+                          <a:latin typeface="맑은 고딕"/>
+                        </a:rPr>
+                        <a:t>0.0</a:t>
+                      </a:r>
+                    </a:p>
+                  </a:txBody>
+                  <a:tcPr>
+                    <a:solidFill>
+                      <a:srgbClr val="FDEDED"/>
+                    </a:solidFill>
+                  </a:tcPr>
+                </a:tc>
+                <a:tc>
+                  <a:txBody>
+                    <a:bodyPr/>
+                    <a:lstStyle/>
+                    <a:p>
+                      <a:pPr algn="ctr"/>
+                      <a:r>
+                        <a:rPr sz="1500" b="0">
+                          <a:solidFill>
+                            <a:srgbClr val="2C3E50"/>
+                          </a:solidFill>
+                          <a:latin typeface="맑은 고딕"/>
+                        </a:rPr>
+                        <a:t>0.0</a:t>
+                      </a:r>
+                    </a:p>
+                  </a:txBody>
+                  <a:tcPr>
+                    <a:solidFill>
+                      <a:srgbClr val="FDEDED"/>
+                    </a:solidFill>
+                  </a:tcPr>
+                </a:tc>
+              </a:tr>
+              <a:tr h="457200">
+                <a:tc>
+                  <a:txBody>
+                    <a:bodyPr/>
+                    <a:lstStyle/>
+                    <a:p>
+                      <a:pPr algn="ctr"/>
+                      <a:r>
+                        <a:rPr sz="1500" b="0">
+                          <a:solidFill>
+                            <a:srgbClr val="2C3E50"/>
+                          </a:solidFill>
+                          <a:latin typeface="맑은 고딕"/>
+                        </a:rPr>
+                        <a:t>HomeRun</a:t>
+                      </a:r>
+                    </a:p>
+                  </a:txBody>
+                  <a:tcPr>
+                    <a:solidFill>
+                      <a:srgbClr val="FFFFFF"/>
+                    </a:solidFill>
+                  </a:tcPr>
+                </a:tc>
+                <a:tc>
+                  <a:txBody>
+                    <a:bodyPr/>
+                    <a:lstStyle/>
+                    <a:p>
+                      <a:pPr algn="ctr"/>
+                      <a:r>
+                        <a:rPr sz="1500" b="0">
+                          <a:solidFill>
+                            <a:srgbClr val="2C3E50"/>
+                          </a:solidFill>
+                          <a:latin typeface="맑은 고딕"/>
+                        </a:rPr>
+                        <a:t>0.81%</a:t>
+                      </a:r>
+                    </a:p>
+                  </a:txBody>
+                  <a:tcPr>
+                    <a:solidFill>
+                      <a:srgbClr val="FFFFFF"/>
+                    </a:solidFill>
+                  </a:tcPr>
+                </a:tc>
+                <a:tc>
+                  <a:txBody>
+                    <a:bodyPr/>
+                    <a:lstStyle/>
+                    <a:p>
+                      <a:pPr algn="ctr"/>
+                      <a:r>
+                        <a:rPr sz="1500" b="0">
+                          <a:solidFill>
+                            <a:srgbClr val="2C3E50"/>
+                          </a:solidFill>
+                          <a:latin typeface="맑은 고딕"/>
+                        </a:rPr>
+                        <a:t>0.0</a:t>
+                      </a:r>
+                    </a:p>
+                  </a:txBody>
+                  <a:tcPr>
+                    <a:solidFill>
+                      <a:srgbClr val="FDEDED"/>
+                    </a:solidFill>
+                  </a:tcPr>
+                </a:tc>
+                <a:tc>
+                  <a:txBody>
+                    <a:bodyPr/>
+                    <a:lstStyle/>
+                    <a:p>
+                      <a:pPr algn="ctr"/>
+                      <a:r>
+                        <a:rPr sz="1500" b="0">
+                          <a:solidFill>
+                            <a:srgbClr val="2C3E50"/>
+                          </a:solidFill>
+                          <a:latin typeface="맑은 고딕"/>
+                        </a:rPr>
+                        <a:t>0.0</a:t>
+                      </a:r>
+                    </a:p>
+                  </a:txBody>
+                  <a:tcPr>
+                    <a:solidFill>
+                      <a:srgbClr val="FDEDED"/>
+                    </a:solidFill>
+                  </a:tcPr>
+                </a:tc>
+                <a:tc>
+                  <a:txBody>
+                    <a:bodyPr/>
+                    <a:lstStyle/>
+                    <a:p>
+                      <a:pPr algn="ctr"/>
+                      <a:r>
+                        <a:rPr sz="1500" b="0">
+                          <a:solidFill>
+                            <a:srgbClr val="2C3E50"/>
+                          </a:solidFill>
+                          <a:latin typeface="맑은 고딕"/>
+                        </a:rPr>
+                        <a:t>0.0</a:t>
+                      </a:r>
+                    </a:p>
+                  </a:txBody>
+                  <a:tcPr>
+                    <a:solidFill>
+                      <a:srgbClr val="FDEDED"/>
+                    </a:solidFill>
+                  </a:tcPr>
+                </a:tc>
+              </a:tr>
+              <a:tr h="457200">
+                <a:tc>
+                  <a:txBody>
+                    <a:bodyPr/>
+                    <a:lstStyle/>
+                    <a:p>
+                      <a:pPr algn="ctr"/>
+                      <a:r>
+                        <a:rPr sz="1500" b="0">
+                          <a:solidFill>
+                            <a:srgbClr val="2C3E50"/>
+                          </a:solidFill>
+                          <a:latin typeface="맑은 고딕"/>
+                        </a:rPr>
+                        <a:t>FieldOut</a:t>
+                      </a:r>
+                    </a:p>
+                  </a:txBody>
+                  <a:tcPr>
+                    <a:solidFill>
+                      <a:srgbClr val="FFFFFF"/>
+                    </a:solidFill>
+                  </a:tcPr>
+                </a:tc>
+                <a:tc>
+                  <a:txBody>
+                    <a:bodyPr/>
+                    <a:lstStyle/>
+                    <a:p>
+                      <a:pPr algn="ctr"/>
+                      <a:r>
+                        <a:rPr sz="1500" b="0">
+                          <a:solidFill>
+                            <a:srgbClr val="2C3E50"/>
+                          </a:solidFill>
+                          <a:latin typeface="맑은 고딕"/>
+                        </a:rPr>
+                        <a:t>11.75%</a:t>
+                      </a:r>
+                    </a:p>
+                  </a:txBody>
+                  <a:tcPr>
+                    <a:solidFill>
+                      <a:srgbClr val="FFFFFF"/>
+                    </a:solidFill>
+                  </a:tcPr>
+                </a:tc>
+                <a:tc>
+                  <a:txBody>
+                    <a:bodyPr/>
+                    <a:lstStyle/>
+                    <a:p>
+                      <a:pPr algn="ctr"/>
+                      <a:r>
+                        <a:rPr sz="1500" b="0">
+                          <a:solidFill>
+                            <a:srgbClr val="2C3E50"/>
+                          </a:solidFill>
+                          <a:latin typeface="맑은 고딕"/>
+                        </a:rPr>
+                        <a:t>7.3</a:t>
+                      </a:r>
+                    </a:p>
+                  </a:txBody>
+                  <a:tcPr>
+                    <a:solidFill>
+                      <a:srgbClr val="FDF2E9"/>
+                    </a:solidFill>
+                  </a:tcPr>
+                </a:tc>
+                <a:tc>
+                  <a:txBody>
+                    <a:bodyPr/>
+                    <a:lstStyle/>
+                    <a:p>
+                      <a:pPr algn="ctr"/>
+                      <a:r>
+                        <a:rPr sz="1500" b="0">
+                          <a:solidFill>
+                            <a:srgbClr val="2C3E50"/>
+                          </a:solidFill>
+                          <a:latin typeface="맑은 고딕"/>
+                        </a:rPr>
+                        <a:t>8.7</a:t>
+                      </a:r>
+                    </a:p>
+                  </a:txBody>
+                  <a:tcPr>
+                    <a:solidFill>
+                      <a:srgbClr val="FDF2E9"/>
+                    </a:solidFill>
+                  </a:tcPr>
+                </a:tc>
+                <a:tc>
+                  <a:txBody>
+                    <a:bodyPr/>
+                    <a:lstStyle/>
+                    <a:p>
+                      <a:pPr algn="ctr"/>
+                      <a:r>
+                        <a:rPr sz="1500" b="0">
+                          <a:solidFill>
+                            <a:srgbClr val="2C3E50"/>
+                          </a:solidFill>
+                          <a:latin typeface="맑은 고딕"/>
+                        </a:rPr>
+                        <a:t>10.7</a:t>
+                      </a:r>
+                    </a:p>
+                  </a:txBody>
+                  <a:tcPr>
+                    <a:solidFill>
+                      <a:srgbClr val="FDF2E9"/>
+                    </a:solidFill>
+                  </a:tcPr>
+                </a:tc>
+              </a:tr>
+              <a:tr h="457200">
+                <a:tc>
+                  <a:txBody>
+                    <a:bodyPr/>
+                    <a:lstStyle/>
+                    <a:p>
+                      <a:pPr algn="ctr"/>
+                      <a:r>
+                        <a:rPr sz="1500" b="0">
+                          <a:solidFill>
+                            <a:srgbClr val="2C3E50"/>
+                          </a:solidFill>
+                          <a:latin typeface="맑은 고딕"/>
+                        </a:rPr>
+                        <a:t>Strikeout</a:t>
+                      </a:r>
+                    </a:p>
+                  </a:txBody>
+                  <a:tcPr>
+                    <a:solidFill>
+                      <a:srgbClr val="FFFFFF"/>
+                    </a:solidFill>
+                  </a:tcPr>
+                </a:tc>
+                <a:tc>
+                  <a:txBody>
+                    <a:bodyPr/>
+                    <a:lstStyle/>
+                    <a:p>
+                      <a:pPr algn="ctr"/>
+                      <a:r>
+                        <a:rPr sz="1500" b="0">
+                          <a:solidFill>
+                            <a:srgbClr val="2C3E50"/>
+                          </a:solidFill>
+                          <a:latin typeface="맑은 고딕"/>
+                        </a:rPr>
+                        <a:t>5.89%</a:t>
+                      </a:r>
+                    </a:p>
+                  </a:txBody>
+                  <a:tcPr>
+                    <a:solidFill>
+                      <a:srgbClr val="FFFFFF"/>
+                    </a:solidFill>
+                  </a:tcPr>
+                </a:tc>
+                <a:tc>
+                  <a:txBody>
+                    <a:bodyPr/>
+                    <a:lstStyle/>
+                    <a:p>
+                      <a:pPr algn="ctr"/>
+                      <a:r>
+                        <a:rPr sz="1500" b="0">
+                          <a:solidFill>
+                            <a:srgbClr val="2C3E50"/>
+                          </a:solidFill>
+                          <a:latin typeface="맑은 고딕"/>
+                        </a:rPr>
+                        <a:t>19.5</a:t>
+                      </a:r>
+                    </a:p>
+                  </a:txBody>
+                  <a:tcPr>
+                    <a:solidFill>
+                      <a:srgbClr val="FDF2E9"/>
+                    </a:solidFill>
+                  </a:tcPr>
+                </a:tc>
+                <a:tc>
+                  <a:txBody>
+                    <a:bodyPr/>
+                    <a:lstStyle/>
+                    <a:p>
+                      <a:pPr algn="ctr"/>
+                      <a:r>
+                        <a:rPr sz="1500" b="0">
+                          <a:solidFill>
+                            <a:srgbClr val="2C3E50"/>
+                          </a:solidFill>
+                          <a:latin typeface="맑은 고딕"/>
+                        </a:rPr>
+                        <a:t>16.6</a:t>
+                      </a:r>
+                    </a:p>
+                  </a:txBody>
+                  <a:tcPr>
+                    <a:solidFill>
+                      <a:srgbClr val="FDF2E9"/>
+                    </a:solidFill>
+                  </a:tcPr>
+                </a:tc>
+                <a:tc>
+                  <a:txBody>
+                    <a:bodyPr/>
+                    <a:lstStyle/>
+                    <a:p>
+                      <a:pPr algn="ctr"/>
+                      <a:r>
+                        <a:rPr sz="1500" b="0">
+                          <a:solidFill>
+                            <a:srgbClr val="2C3E50"/>
+                          </a:solidFill>
+                          <a:latin typeface="맑은 고딕"/>
+                        </a:rPr>
+                        <a:t>17.3</a:t>
+                      </a:r>
+                    </a:p>
+                  </a:txBody>
+                  <a:tcPr>
+                    <a:solidFill>
+                      <a:srgbClr val="FDF2E9"/>
+                    </a:solidFill>
+                  </a:tcPr>
+                </a:tc>
+              </a:tr>
+              <a:tr h="457200">
+                <a:tc>
+                  <a:txBody>
+                    <a:bodyPr/>
+                    <a:lstStyle/>
+                    <a:p>
+                      <a:pPr algn="ctr"/>
+                      <a:r>
+                        <a:rPr sz="1500" b="0">
+                          <a:solidFill>
+                            <a:srgbClr val="2C3E50"/>
+                          </a:solidFill>
+                          <a:latin typeface="맑은 고딕"/>
+                        </a:rPr>
+                        <a:t>Walk</a:t>
+                      </a:r>
+                    </a:p>
+                  </a:txBody>
+                  <a:tcPr>
+                    <a:solidFill>
+                      <a:srgbClr val="FFFFFF"/>
+                    </a:solidFill>
+                  </a:tcPr>
+                </a:tc>
+                <a:tc>
+                  <a:txBody>
+                    <a:bodyPr/>
+                    <a:lstStyle/>
+                    <a:p>
+                      <a:pPr algn="ctr"/>
+                      <a:r>
+                        <a:rPr sz="1500" b="0">
+                          <a:solidFill>
+                            <a:srgbClr val="2C3E50"/>
+                          </a:solidFill>
+                          <a:latin typeface="맑은 고딕"/>
+                        </a:rPr>
+                        <a:t>2.04%</a:t>
+                      </a:r>
+                    </a:p>
+                  </a:txBody>
+                  <a:tcPr>
+                    <a:solidFill>
+                      <a:srgbClr val="FFFFFF"/>
+                    </a:solidFill>
+                  </a:tcPr>
+                </a:tc>
+                <a:tc>
+                  <a:txBody>
+                    <a:bodyPr/>
+                    <a:lstStyle/>
+                    <a:p>
+                      <a:pPr algn="ctr"/>
+                      <a:r>
+                        <a:rPr sz="1500" b="0">
+                          <a:solidFill>
+                            <a:srgbClr val="2C3E50"/>
+                          </a:solidFill>
+                          <a:latin typeface="맑은 고딕"/>
+                        </a:rPr>
+                        <a:t>85.9</a:t>
                       </a:r>
                     </a:p>
                   </a:txBody>
@@ -7901,13 +7936,13 @@
                     <a:p>
                       <a:pPr algn="ctr"/>
                       <a:r>
-                        <a:rPr sz="1400" b="0">
-                          <a:solidFill>
-                            <a:srgbClr val="2C3E50"/>
-                          </a:solidFill>
-                          <a:latin typeface="맑은 고딕"/>
-                        </a:rPr>
-                        <a:t>99.4</a:t>
+                        <a:rPr sz="1500" b="0">
+                          <a:solidFill>
+                            <a:srgbClr val="2C3E50"/>
+                          </a:solidFill>
+                          <a:latin typeface="맑은 고딕"/>
+                        </a:rPr>
+                        <a:t>81.2</a:t>
                       </a:r>
                     </a:p>
                   </a:txBody>
@@ -7924,13 +7959,13 @@
                     <a:p>
                       <a:pPr algn="ctr"/>
                       <a:r>
-                        <a:rPr sz="1400" b="0">
-                          <a:solidFill>
-                            <a:srgbClr val="2C3E50"/>
-                          </a:solidFill>
-                          <a:latin typeface="맑은 고딕"/>
-                        </a:rPr>
-                        <a:t>99.6</a:t>
+                        <a:rPr sz="1500" b="0">
+                          <a:solidFill>
+                            <a:srgbClr val="2C3E50"/>
+                          </a:solidFill>
+                          <a:latin typeface="맑은 고딕"/>
+                        </a:rPr>
+                        <a:t>85.6</a:t>
                       </a:r>
                     </a:p>
                   </a:txBody>
@@ -7941,21 +7976,21 @@
                   </a:tcPr>
                 </a:tc>
               </a:tr>
-              <a:tr h="441960">
-                <a:tc>
-                  <a:txBody>
-                    <a:bodyPr/>
-                    <a:lstStyle/>
-                    <a:p>
-                      <a:pPr algn="ctr"/>
-                      <a:r>
-                        <a:rPr sz="1400" b="0">
-                          <a:solidFill>
-                            <a:srgbClr val="2C3E50"/>
-                          </a:solidFill>
-                          <a:latin typeface="맑은 고딕"/>
-                        </a:rPr>
-                        <a:t>Strike</a:t>
+              <a:tr h="457200">
+                <a:tc>
+                  <a:txBody>
+                    <a:bodyPr/>
+                    <a:lstStyle/>
+                    <a:p>
+                      <a:pPr algn="ctr"/>
+                      <a:r>
+                        <a:rPr sz="1500" b="0">
+                          <a:solidFill>
+                            <a:srgbClr val="2C3E50"/>
+                          </a:solidFill>
+                          <a:latin typeface="맑은 고딕"/>
+                        </a:rPr>
+                        <a:t>HBP</a:t>
                       </a:r>
                     </a:p>
                   </a:txBody>
@@ -7972,13 +8007,13 @@
                     <a:p>
                       <a:pPr algn="ctr"/>
                       <a:r>
-                        <a:rPr sz="1400" b="0">
-                          <a:solidFill>
-                            <a:srgbClr val="2C3E50"/>
-                          </a:solidFill>
-                          <a:latin typeface="맑은 고딕"/>
-                        </a:rPr>
-                        <a:t>41.11%</a:t>
+                        <a:rPr sz="1500" b="0">
+                          <a:solidFill>
+                            <a:srgbClr val="2C3E50"/>
+                          </a:solidFill>
+                          <a:latin typeface="맑은 고딕"/>
+                        </a:rPr>
+                        <a:t>0.28%</a:t>
                       </a:r>
                     </a:p>
                   </a:txBody>
@@ -7995,454 +8030,13 @@
                     <a:p>
                       <a:pPr algn="ctr"/>
                       <a:r>
-                        <a:rPr sz="1400" b="0">
-                          <a:solidFill>
-                            <a:srgbClr val="2C3E50"/>
-                          </a:solidFill>
-                          <a:latin typeface="맑은 고딕"/>
-                        </a:rPr>
-                        <a:t>100.0</a:t>
-                      </a:r>
-                    </a:p>
-                  </a:txBody>
-                  <a:tcPr>
-                    <a:solidFill>
-                      <a:srgbClr val="FFFFFF"/>
-                    </a:solidFill>
-                  </a:tcPr>
-                </a:tc>
-                <a:tc>
-                  <a:txBody>
-                    <a:bodyPr/>
-                    <a:lstStyle/>
-                    <a:p>
-                      <a:pPr algn="ctr"/>
-                      <a:r>
-                        <a:rPr sz="1400" b="0">
-                          <a:solidFill>
-                            <a:srgbClr val="2C3E50"/>
-                          </a:solidFill>
-                          <a:latin typeface="맑은 고딕"/>
-                        </a:rPr>
-                        <a:t>70.4</a:t>
-                      </a:r>
-                    </a:p>
-                  </a:txBody>
-                  <a:tcPr>
-                    <a:solidFill>
-                      <a:srgbClr val="FFFFFF"/>
-                    </a:solidFill>
-                  </a:tcPr>
-                </a:tc>
-                <a:tc>
-                  <a:txBody>
-                    <a:bodyPr/>
-                    <a:lstStyle/>
-                    <a:p>
-                      <a:pPr algn="ctr"/>
-                      <a:r>
-                        <a:rPr sz="1400" b="0">
-                          <a:solidFill>
-                            <a:srgbClr val="2C3E50"/>
-                          </a:solidFill>
-                          <a:latin typeface="맑은 고딕"/>
-                        </a:rPr>
-                        <a:t>100.0</a:t>
-                      </a:r>
-                    </a:p>
-                  </a:txBody>
-                  <a:tcPr>
-                    <a:solidFill>
-                      <a:srgbClr val="FFFFFF"/>
-                    </a:solidFill>
-                  </a:tcPr>
-                </a:tc>
-                <a:tc>
-                  <a:txBody>
-                    <a:bodyPr/>
-                    <a:lstStyle/>
-                    <a:p>
-                      <a:pPr algn="ctr"/>
-                      <a:r>
-                        <a:rPr sz="1400" b="0">
-                          <a:solidFill>
-                            <a:srgbClr val="2C3E50"/>
-                          </a:solidFill>
-                          <a:latin typeface="맑은 고딕"/>
-                        </a:rPr>
-                        <a:t>100.0</a:t>
-                      </a:r>
-                    </a:p>
-                  </a:txBody>
-                  <a:tcPr>
-                    <a:solidFill>
-                      <a:srgbClr val="D5F5E3"/>
-                    </a:solidFill>
-                  </a:tcPr>
-                </a:tc>
-                <a:tc>
-                  <a:txBody>
-                    <a:bodyPr/>
-                    <a:lstStyle/>
-                    <a:p>
-                      <a:pPr algn="ctr"/>
-                      <a:r>
-                        <a:rPr sz="1400" b="0">
-                          <a:solidFill>
-                            <a:srgbClr val="2C3E50"/>
-                          </a:solidFill>
-                          <a:latin typeface="맑은 고딕"/>
-                        </a:rPr>
-                        <a:t>100.0</a:t>
-                      </a:r>
-                    </a:p>
-                  </a:txBody>
-                  <a:tcPr>
-                    <a:solidFill>
-                      <a:srgbClr val="D5F5E3"/>
-                    </a:solidFill>
-                  </a:tcPr>
-                </a:tc>
-                <a:tc>
-                  <a:txBody>
-                    <a:bodyPr/>
-                    <a:lstStyle/>
-                    <a:p>
-                      <a:pPr algn="ctr"/>
-                      <a:r>
-                        <a:rPr sz="1400" b="0">
-                          <a:solidFill>
-                            <a:srgbClr val="2C3E50"/>
-                          </a:solidFill>
-                          <a:latin typeface="맑은 고딕"/>
-                        </a:rPr>
-                        <a:t>100.0</a:t>
-                      </a:r>
-                    </a:p>
-                  </a:txBody>
-                  <a:tcPr>
-                    <a:solidFill>
-                      <a:srgbClr val="D5F5E3"/>
-                    </a:solidFill>
-                  </a:tcPr>
-                </a:tc>
-              </a:tr>
-              <a:tr h="441960">
-                <a:tc>
-                  <a:txBody>
-                    <a:bodyPr/>
-                    <a:lstStyle/>
-                    <a:p>
-                      <a:pPr algn="ctr"/>
-                      <a:r>
-                        <a:rPr sz="1400" b="0">
-                          <a:solidFill>
-                            <a:srgbClr val="2C3E50"/>
-                          </a:solidFill>
-                          <a:latin typeface="맑은 고딕"/>
-                        </a:rPr>
-                        <a:t>Single</a:t>
-                      </a:r>
-                    </a:p>
-                  </a:txBody>
-                  <a:tcPr>
-                    <a:solidFill>
-                      <a:srgbClr val="FFFFFF"/>
-                    </a:solidFill>
-                  </a:tcPr>
-                </a:tc>
-                <a:tc>
-                  <a:txBody>
-                    <a:bodyPr/>
-                    <a:lstStyle/>
-                    <a:p>
-                      <a:pPr algn="ctr"/>
-                      <a:r>
-                        <a:rPr sz="1400" b="0">
-                          <a:solidFill>
-                            <a:srgbClr val="2C3E50"/>
-                          </a:solidFill>
-                          <a:latin typeface="맑은 고딕"/>
-                        </a:rPr>
-                        <a:t>3.64%</a:t>
-                      </a:r>
-                    </a:p>
-                  </a:txBody>
-                  <a:tcPr>
-                    <a:solidFill>
-                      <a:srgbClr val="FFFFFF"/>
-                    </a:solidFill>
-                  </a:tcPr>
-                </a:tc>
-                <a:tc>
-                  <a:txBody>
-                    <a:bodyPr/>
-                    <a:lstStyle/>
-                    <a:p>
-                      <a:pPr algn="ctr"/>
-                      <a:r>
-                        <a:rPr sz="1400" b="0">
-                          <a:solidFill>
-                            <a:srgbClr val="2C3E50"/>
-                          </a:solidFill>
-                          <a:latin typeface="맑은 고딕"/>
-                        </a:rPr>
-                        <a:t>0.2</a:t>
-                      </a:r>
-                    </a:p>
-                  </a:txBody>
-                  <a:tcPr>
-                    <a:solidFill>
-                      <a:srgbClr val="FFFFFF"/>
-                    </a:solidFill>
-                  </a:tcPr>
-                </a:tc>
-                <a:tc>
-                  <a:txBody>
-                    <a:bodyPr/>
-                    <a:lstStyle/>
-                    <a:p>
-                      <a:pPr algn="ctr"/>
-                      <a:r>
-                        <a:rPr sz="1400" b="0">
-                          <a:solidFill>
-                            <a:srgbClr val="2C3E50"/>
-                          </a:solidFill>
-                          <a:latin typeface="맑은 고딕"/>
-                        </a:rPr>
-                        <a:t>47.8</a:t>
-                      </a:r>
-                    </a:p>
-                  </a:txBody>
-                  <a:tcPr>
-                    <a:solidFill>
-                      <a:srgbClr val="FFFFFF"/>
-                    </a:solidFill>
-                  </a:tcPr>
-                </a:tc>
-                <a:tc>
-                  <a:txBody>
-                    <a:bodyPr/>
-                    <a:lstStyle/>
-                    <a:p>
-                      <a:pPr algn="ctr"/>
-                      <a:r>
-                        <a:rPr sz="1400" b="0">
-                          <a:solidFill>
-                            <a:srgbClr val="2C3E50"/>
-                          </a:solidFill>
-                          <a:latin typeface="맑은 고딕"/>
-                        </a:rPr>
-                        <a:t>0.0</a:t>
-                      </a:r>
-                    </a:p>
-                  </a:txBody>
-                  <a:tcPr>
-                    <a:solidFill>
-                      <a:srgbClr val="FDEDED"/>
-                    </a:solidFill>
-                  </a:tcPr>
-                </a:tc>
-                <a:tc>
-                  <a:txBody>
-                    <a:bodyPr/>
-                    <a:lstStyle/>
-                    <a:p>
-                      <a:pPr algn="ctr"/>
-                      <a:r>
-                        <a:rPr sz="1400" b="0">
-                          <a:solidFill>
-                            <a:srgbClr val="2C3E50"/>
-                          </a:solidFill>
-                          <a:latin typeface="맑은 고딕"/>
-                        </a:rPr>
-                        <a:t>88.9</a:t>
-                      </a:r>
-                    </a:p>
-                  </a:txBody>
-                  <a:tcPr>
-                    <a:solidFill>
-                      <a:srgbClr val="D5F5E3"/>
-                    </a:solidFill>
-                  </a:tcPr>
-                </a:tc>
-                <a:tc>
-                  <a:txBody>
-                    <a:bodyPr/>
-                    <a:lstStyle/>
-                    <a:p>
-                      <a:pPr algn="ctr"/>
-                      <a:r>
-                        <a:rPr sz="1400" b="0">
-                          <a:solidFill>
-                            <a:srgbClr val="2C3E50"/>
-                          </a:solidFill>
-                          <a:latin typeface="맑은 고딕"/>
-                        </a:rPr>
-                        <a:t>90.1</a:t>
-                      </a:r>
-                    </a:p>
-                  </a:txBody>
-                  <a:tcPr>
-                    <a:solidFill>
-                      <a:srgbClr val="D5F5E3"/>
-                    </a:solidFill>
-                  </a:tcPr>
-                </a:tc>
-                <a:tc>
-                  <a:txBody>
-                    <a:bodyPr/>
-                    <a:lstStyle/>
-                    <a:p>
-                      <a:pPr algn="ctr"/>
-                      <a:r>
-                        <a:rPr sz="1400" b="0">
-                          <a:solidFill>
-                            <a:srgbClr val="2C3E50"/>
-                          </a:solidFill>
-                          <a:latin typeface="맑은 고딕"/>
-                        </a:rPr>
-                        <a:t>89.6</a:t>
-                      </a:r>
-                    </a:p>
-                  </a:txBody>
-                  <a:tcPr>
-                    <a:solidFill>
-                      <a:srgbClr val="D5F5E3"/>
-                    </a:solidFill>
-                  </a:tcPr>
-                </a:tc>
-              </a:tr>
-              <a:tr h="441960">
-                <a:tc>
-                  <a:txBody>
-                    <a:bodyPr/>
-                    <a:lstStyle/>
-                    <a:p>
-                      <a:pPr algn="ctr"/>
-                      <a:r>
-                        <a:rPr sz="1400" b="0">
-                          <a:solidFill>
-                            <a:srgbClr val="2C3E50"/>
-                          </a:solidFill>
-                          <a:latin typeface="맑은 고딕"/>
-                        </a:rPr>
-                        <a:t>Double</a:t>
-                      </a:r>
-                    </a:p>
-                  </a:txBody>
-                  <a:tcPr>
-                    <a:solidFill>
-                      <a:srgbClr val="FFFFFF"/>
-                    </a:solidFill>
-                  </a:tcPr>
-                </a:tc>
-                <a:tc>
-                  <a:txBody>
-                    <a:bodyPr/>
-                    <a:lstStyle/>
-                    <a:p>
-                      <a:pPr algn="ctr"/>
-                      <a:r>
-                        <a:rPr sz="1400" b="0">
-                          <a:solidFill>
-                            <a:srgbClr val="2C3E50"/>
-                          </a:solidFill>
-                          <a:latin typeface="맑은 고딕"/>
-                        </a:rPr>
-                        <a:t>1.09%</a:t>
-                      </a:r>
-                    </a:p>
-                  </a:txBody>
-                  <a:tcPr>
-                    <a:solidFill>
-                      <a:srgbClr val="FFFFFF"/>
-                    </a:solidFill>
-                  </a:tcPr>
-                </a:tc>
-                <a:tc>
-                  <a:txBody>
-                    <a:bodyPr/>
-                    <a:lstStyle/>
-                    <a:p>
-                      <a:pPr algn="ctr"/>
-                      <a:r>
-                        <a:rPr sz="1400" b="0">
-                          <a:solidFill>
-                            <a:srgbClr val="2C3E50"/>
-                          </a:solidFill>
-                          <a:latin typeface="맑은 고딕"/>
-                        </a:rPr>
-                        <a:t>0.0</a:t>
-                      </a:r>
-                    </a:p>
-                  </a:txBody>
-                  <a:tcPr>
-                    <a:solidFill>
-                      <a:srgbClr val="FDEDED"/>
-                    </a:solidFill>
-                  </a:tcPr>
-                </a:tc>
-                <a:tc>
-                  <a:txBody>
-                    <a:bodyPr/>
-                    <a:lstStyle/>
-                    <a:p>
-                      <a:pPr algn="ctr"/>
-                      <a:r>
-                        <a:rPr sz="1400" b="0">
-                          <a:solidFill>
-                            <a:srgbClr val="2C3E50"/>
-                          </a:solidFill>
-                          <a:latin typeface="맑은 고딕"/>
-                        </a:rPr>
-                        <a:t>28.5</a:t>
-                      </a:r>
-                    </a:p>
-                  </a:txBody>
-                  <a:tcPr>
-                    <a:solidFill>
-                      <a:srgbClr val="FFFFFF"/>
-                    </a:solidFill>
-                  </a:tcPr>
-                </a:tc>
-                <a:tc>
-                  <a:txBody>
-                    <a:bodyPr/>
-                    <a:lstStyle/>
-                    <a:p>
-                      <a:pPr algn="ctr"/>
-                      <a:r>
-                        <a:rPr sz="1400" b="0">
-                          <a:solidFill>
-                            <a:srgbClr val="2C3E50"/>
-                          </a:solidFill>
-                          <a:latin typeface="맑은 고딕"/>
-                        </a:rPr>
-                        <a:t>0.0</a:t>
-                      </a:r>
-                    </a:p>
-                  </a:txBody>
-                  <a:tcPr>
-                    <a:solidFill>
-                      <a:srgbClr val="FDEDED"/>
-                    </a:solidFill>
-                  </a:tcPr>
-                </a:tc>
-                <a:tc>
-                  <a:txBody>
-                    <a:bodyPr/>
-                    <a:lstStyle/>
-                    <a:p>
-                      <a:pPr algn="ctr"/>
-                      <a:r>
-                        <a:rPr sz="1400" b="0">
-                          <a:solidFill>
-                            <a:srgbClr val="2C3E50"/>
-                          </a:solidFill>
-                          <a:latin typeface="맑은 고딕"/>
-                        </a:rPr>
-                        <a:t>37.4</a:t>
+                        <a:rPr sz="1500" b="0">
+                          <a:solidFill>
+                            <a:srgbClr val="2C3E50"/>
+                          </a:solidFill>
+                          <a:latin typeface="맑은 고딕"/>
+                        </a:rPr>
+                        <a:t>2.9</a:t>
                       </a:r>
                     </a:p>
                   </a:txBody>
@@ -8459,13 +8053,13 @@
                     <a:p>
                       <a:pPr algn="ctr"/>
                       <a:r>
-                        <a:rPr sz="1400" b="0">
-                          <a:solidFill>
-                            <a:srgbClr val="2C3E50"/>
-                          </a:solidFill>
-                          <a:latin typeface="맑은 고딕"/>
-                        </a:rPr>
-                        <a:t>36.5</a:t>
+                        <a:rPr sz="1500" b="0">
+                          <a:solidFill>
+                            <a:srgbClr val="2C3E50"/>
+                          </a:solidFill>
+                          <a:latin typeface="맑은 고딕"/>
+                        </a:rPr>
+                        <a:t>10.9</a:t>
                       </a:r>
                     </a:p>
                   </a:txBody>
@@ -8482,1321 +8076,19 @@
                     <a:p>
                       <a:pPr algn="ctr"/>
                       <a:r>
-                        <a:rPr sz="1400" b="0">
-                          <a:solidFill>
-                            <a:srgbClr val="2C3E50"/>
-                          </a:solidFill>
-                          <a:latin typeface="맑은 고딕"/>
-                        </a:rPr>
-                        <a:t>27.5</a:t>
+                        <a:rPr sz="1500" b="0">
+                          <a:solidFill>
+                            <a:srgbClr val="2C3E50"/>
+                          </a:solidFill>
+                          <a:latin typeface="맑은 고딕"/>
+                        </a:rPr>
+                        <a:t>17.2</a:t>
                       </a:r>
                     </a:p>
                   </a:txBody>
                   <a:tcPr>
                     <a:solidFill>
                       <a:srgbClr val="FDF2E9"/>
-                    </a:solidFill>
-                  </a:tcPr>
-                </a:tc>
-              </a:tr>
-              <a:tr h="441960">
-                <a:tc>
-                  <a:txBody>
-                    <a:bodyPr/>
-                    <a:lstStyle/>
-                    <a:p>
-                      <a:pPr algn="ctr"/>
-                      <a:r>
-                        <a:rPr sz="1400" b="0">
-                          <a:solidFill>
-                            <a:srgbClr val="2C3E50"/>
-                          </a:solidFill>
-                          <a:latin typeface="맑은 고딕"/>
-                        </a:rPr>
-                        <a:t>Triple</a:t>
-                      </a:r>
-                    </a:p>
-                  </a:txBody>
-                  <a:tcPr>
-                    <a:solidFill>
-                      <a:srgbClr val="FFFFFF"/>
-                    </a:solidFill>
-                  </a:tcPr>
-                </a:tc>
-                <a:tc>
-                  <a:txBody>
-                    <a:bodyPr/>
-                    <a:lstStyle/>
-                    <a:p>
-                      <a:pPr algn="ctr"/>
-                      <a:r>
-                        <a:rPr sz="1400" b="0">
-                          <a:solidFill>
-                            <a:srgbClr val="2C3E50"/>
-                          </a:solidFill>
-                          <a:latin typeface="맑은 고딕"/>
-                        </a:rPr>
-                        <a:t>0.09%</a:t>
-                      </a:r>
-                    </a:p>
-                  </a:txBody>
-                  <a:tcPr>
-                    <a:solidFill>
-                      <a:srgbClr val="FFFFFF"/>
-                    </a:solidFill>
-                  </a:tcPr>
-                </a:tc>
-                <a:tc>
-                  <a:txBody>
-                    <a:bodyPr/>
-                    <a:lstStyle/>
-                    <a:p>
-                      <a:pPr algn="ctr"/>
-                      <a:r>
-                        <a:rPr sz="1400" b="0">
-                          <a:solidFill>
-                            <a:srgbClr val="2C3E50"/>
-                          </a:solidFill>
-                          <a:latin typeface="맑은 고딕"/>
-                        </a:rPr>
-                        <a:t>0.0</a:t>
-                      </a:r>
-                    </a:p>
-                  </a:txBody>
-                  <a:tcPr>
-                    <a:solidFill>
-                      <a:srgbClr val="FDEDED"/>
-                    </a:solidFill>
-                  </a:tcPr>
-                </a:tc>
-                <a:tc>
-                  <a:txBody>
-                    <a:bodyPr/>
-                    <a:lstStyle/>
-                    <a:p>
-                      <a:pPr algn="ctr"/>
-                      <a:r>
-                        <a:rPr sz="1400" b="0">
-                          <a:solidFill>
-                            <a:srgbClr val="2C3E50"/>
-                          </a:solidFill>
-                          <a:latin typeface="맑은 고딕"/>
-                        </a:rPr>
-                        <a:t>0.0</a:t>
-                      </a:r>
-                    </a:p>
-                  </a:txBody>
-                  <a:tcPr>
-                    <a:solidFill>
-                      <a:srgbClr val="FDEDED"/>
-                    </a:solidFill>
-                  </a:tcPr>
-                </a:tc>
-                <a:tc>
-                  <a:txBody>
-                    <a:bodyPr/>
-                    <a:lstStyle/>
-                    <a:p>
-                      <a:pPr algn="ctr"/>
-                      <a:r>
-                        <a:rPr sz="1400" b="0">
-                          <a:solidFill>
-                            <a:srgbClr val="2C3E50"/>
-                          </a:solidFill>
-                          <a:latin typeface="맑은 고딕"/>
-                        </a:rPr>
-                        <a:t>0.0</a:t>
-                      </a:r>
-                    </a:p>
-                  </a:txBody>
-                  <a:tcPr>
-                    <a:solidFill>
-                      <a:srgbClr val="FDEDED"/>
-                    </a:solidFill>
-                  </a:tcPr>
-                </a:tc>
-                <a:tc>
-                  <a:txBody>
-                    <a:bodyPr/>
-                    <a:lstStyle/>
-                    <a:p>
-                      <a:pPr algn="ctr"/>
-                      <a:r>
-                        <a:rPr sz="1400" b="0">
-                          <a:solidFill>
-                            <a:srgbClr val="2C3E50"/>
-                          </a:solidFill>
-                          <a:latin typeface="맑은 고딕"/>
-                        </a:rPr>
-                        <a:t>0.0</a:t>
-                      </a:r>
-                    </a:p>
-                  </a:txBody>
-                  <a:tcPr>
-                    <a:solidFill>
-                      <a:srgbClr val="FDEDED"/>
-                    </a:solidFill>
-                  </a:tcPr>
-                </a:tc>
-                <a:tc>
-                  <a:txBody>
-                    <a:bodyPr/>
-                    <a:lstStyle/>
-                    <a:p>
-                      <a:pPr algn="ctr"/>
-                      <a:r>
-                        <a:rPr sz="1400" b="0">
-                          <a:solidFill>
-                            <a:srgbClr val="2C3E50"/>
-                          </a:solidFill>
-                          <a:latin typeface="맑은 고딕"/>
-                        </a:rPr>
-                        <a:t>0.0</a:t>
-                      </a:r>
-                    </a:p>
-                  </a:txBody>
-                  <a:tcPr>
-                    <a:solidFill>
-                      <a:srgbClr val="FDEDED"/>
-                    </a:solidFill>
-                  </a:tcPr>
-                </a:tc>
-                <a:tc>
-                  <a:txBody>
-                    <a:bodyPr/>
-                    <a:lstStyle/>
-                    <a:p>
-                      <a:pPr algn="ctr"/>
-                      <a:r>
-                        <a:rPr sz="1400" b="0">
-                          <a:solidFill>
-                            <a:srgbClr val="2C3E50"/>
-                          </a:solidFill>
-                          <a:latin typeface="맑은 고딕"/>
-                        </a:rPr>
-                        <a:t>0.0</a:t>
-                      </a:r>
-                    </a:p>
-                  </a:txBody>
-                  <a:tcPr>
-                    <a:solidFill>
-                      <a:srgbClr val="FDEDED"/>
-                    </a:solidFill>
-                  </a:tcPr>
-                </a:tc>
-              </a:tr>
-              <a:tr h="441960">
-                <a:tc>
-                  <a:txBody>
-                    <a:bodyPr/>
-                    <a:lstStyle/>
-                    <a:p>
-                      <a:pPr algn="ctr"/>
-                      <a:r>
-                        <a:rPr sz="1400" b="0">
-                          <a:solidFill>
-                            <a:srgbClr val="2C3E50"/>
-                          </a:solidFill>
-                          <a:latin typeface="맑은 고딕"/>
-                        </a:rPr>
-                        <a:t>HomeRun</a:t>
-                      </a:r>
-                    </a:p>
-                  </a:txBody>
-                  <a:tcPr>
-                    <a:solidFill>
-                      <a:srgbClr val="FFFFFF"/>
-                    </a:solidFill>
-                  </a:tcPr>
-                </a:tc>
-                <a:tc>
-                  <a:txBody>
-                    <a:bodyPr/>
-                    <a:lstStyle/>
-                    <a:p>
-                      <a:pPr algn="ctr"/>
-                      <a:r>
-                        <a:rPr sz="1400" b="0">
-                          <a:solidFill>
-                            <a:srgbClr val="2C3E50"/>
-                          </a:solidFill>
-                          <a:latin typeface="맑은 고딕"/>
-                        </a:rPr>
-                        <a:t>0.81%</a:t>
-                      </a:r>
-                    </a:p>
-                  </a:txBody>
-                  <a:tcPr>
-                    <a:solidFill>
-                      <a:srgbClr val="FFFFFF"/>
-                    </a:solidFill>
-                  </a:tcPr>
-                </a:tc>
-                <a:tc>
-                  <a:txBody>
-                    <a:bodyPr/>
-                    <a:lstStyle/>
-                    <a:p>
-                      <a:pPr algn="ctr"/>
-                      <a:r>
-                        <a:rPr sz="1400" b="0">
-                          <a:solidFill>
-                            <a:srgbClr val="2C3E50"/>
-                          </a:solidFill>
-                          <a:latin typeface="맑은 고딕"/>
-                        </a:rPr>
-                        <a:t>0.0</a:t>
-                      </a:r>
-                    </a:p>
-                  </a:txBody>
-                  <a:tcPr>
-                    <a:solidFill>
-                      <a:srgbClr val="FDEDED"/>
-                    </a:solidFill>
-                  </a:tcPr>
-                </a:tc>
-                <a:tc>
-                  <a:txBody>
-                    <a:bodyPr/>
-                    <a:lstStyle/>
-                    <a:p>
-                      <a:pPr algn="ctr"/>
-                      <a:r>
-                        <a:rPr sz="1400" b="0">
-                          <a:solidFill>
-                            <a:srgbClr val="2C3E50"/>
-                          </a:solidFill>
-                          <a:latin typeface="맑은 고딕"/>
-                        </a:rPr>
-                        <a:t>20.5</a:t>
-                      </a:r>
-                    </a:p>
-                  </a:txBody>
-                  <a:tcPr>
-                    <a:solidFill>
-                      <a:srgbClr val="FFFFFF"/>
-                    </a:solidFill>
-                  </a:tcPr>
-                </a:tc>
-                <a:tc>
-                  <a:txBody>
-                    <a:bodyPr/>
-                    <a:lstStyle/>
-                    <a:p>
-                      <a:pPr algn="ctr"/>
-                      <a:r>
-                        <a:rPr sz="1400" b="0">
-                          <a:solidFill>
-                            <a:srgbClr val="2C3E50"/>
-                          </a:solidFill>
-                          <a:latin typeface="맑은 고딕"/>
-                        </a:rPr>
-                        <a:t>0.0</a:t>
-                      </a:r>
-                    </a:p>
-                  </a:txBody>
-                  <a:tcPr>
-                    <a:solidFill>
-                      <a:srgbClr val="FDEDED"/>
-                    </a:solidFill>
-                  </a:tcPr>
-                </a:tc>
-                <a:tc>
-                  <a:txBody>
-                    <a:bodyPr/>
-                    <a:lstStyle/>
-                    <a:p>
-                      <a:pPr algn="ctr"/>
-                      <a:r>
-                        <a:rPr sz="1400" b="0">
-                          <a:solidFill>
-                            <a:srgbClr val="2C3E50"/>
-                          </a:solidFill>
-                          <a:latin typeface="맑은 고딕"/>
-                        </a:rPr>
-                        <a:t>18.1</a:t>
-                      </a:r>
-                    </a:p>
-                  </a:txBody>
-                  <a:tcPr>
-                    <a:solidFill>
-                      <a:srgbClr val="FDF2E9"/>
-                    </a:solidFill>
-                  </a:tcPr>
-                </a:tc>
-                <a:tc>
-                  <a:txBody>
-                    <a:bodyPr/>
-                    <a:lstStyle/>
-                    <a:p>
-                      <a:pPr algn="ctr"/>
-                      <a:r>
-                        <a:rPr sz="1400" b="0">
-                          <a:solidFill>
-                            <a:srgbClr val="2C3E50"/>
-                          </a:solidFill>
-                          <a:latin typeface="맑은 고딕"/>
-                        </a:rPr>
-                        <a:t>10.4</a:t>
-                      </a:r>
-                    </a:p>
-                  </a:txBody>
-                  <a:tcPr>
-                    <a:solidFill>
-                      <a:srgbClr val="FDF2E9"/>
-                    </a:solidFill>
-                  </a:tcPr>
-                </a:tc>
-                <a:tc>
-                  <a:txBody>
-                    <a:bodyPr/>
-                    <a:lstStyle/>
-                    <a:p>
-                      <a:pPr algn="ctr"/>
-                      <a:r>
-                        <a:rPr sz="1400" b="0">
-                          <a:solidFill>
-                            <a:srgbClr val="2C3E50"/>
-                          </a:solidFill>
-                          <a:latin typeface="맑은 고딕"/>
-                        </a:rPr>
-                        <a:t>15.6</a:t>
-                      </a:r>
-                    </a:p>
-                  </a:txBody>
-                  <a:tcPr>
-                    <a:solidFill>
-                      <a:srgbClr val="FDF2E9"/>
-                    </a:solidFill>
-                  </a:tcPr>
-                </a:tc>
-              </a:tr>
-              <a:tr h="441960">
-                <a:tc>
-                  <a:txBody>
-                    <a:bodyPr/>
-                    <a:lstStyle/>
-                    <a:p>
-                      <a:pPr algn="ctr"/>
-                      <a:r>
-                        <a:rPr sz="1400" b="0">
-                          <a:solidFill>
-                            <a:srgbClr val="2C3E50"/>
-                          </a:solidFill>
-                          <a:latin typeface="맑은 고딕"/>
-                        </a:rPr>
-                        <a:t>FieldOut</a:t>
-                      </a:r>
-                    </a:p>
-                  </a:txBody>
-                  <a:tcPr>
-                    <a:solidFill>
-                      <a:srgbClr val="FFFFFF"/>
-                    </a:solidFill>
-                  </a:tcPr>
-                </a:tc>
-                <a:tc>
-                  <a:txBody>
-                    <a:bodyPr/>
-                    <a:lstStyle/>
-                    <a:p>
-                      <a:pPr algn="ctr"/>
-                      <a:r>
-                        <a:rPr sz="1400" b="0">
-                          <a:solidFill>
-                            <a:srgbClr val="2C3E50"/>
-                          </a:solidFill>
-                          <a:latin typeface="맑은 고딕"/>
-                        </a:rPr>
-                        <a:t>11.75%</a:t>
-                      </a:r>
-                    </a:p>
-                  </a:txBody>
-                  <a:tcPr>
-                    <a:solidFill>
-                      <a:srgbClr val="FFFFFF"/>
-                    </a:solidFill>
-                  </a:tcPr>
-                </a:tc>
-                <a:tc>
-                  <a:txBody>
-                    <a:bodyPr/>
-                    <a:lstStyle/>
-                    <a:p>
-                      <a:pPr algn="ctr"/>
-                      <a:r>
-                        <a:rPr sz="1400" b="0">
-                          <a:solidFill>
-                            <a:srgbClr val="2C3E50"/>
-                          </a:solidFill>
-                          <a:latin typeface="맑은 고딕"/>
-                        </a:rPr>
-                        <a:t>100.0</a:t>
-                      </a:r>
-                    </a:p>
-                  </a:txBody>
-                  <a:tcPr>
-                    <a:solidFill>
-                      <a:srgbClr val="FFFFFF"/>
-                    </a:solidFill>
-                  </a:tcPr>
-                </a:tc>
-                <a:tc>
-                  <a:txBody>
-                    <a:bodyPr/>
-                    <a:lstStyle/>
-                    <a:p>
-                      <a:pPr algn="ctr"/>
-                      <a:r>
-                        <a:rPr sz="1400" b="0">
-                          <a:solidFill>
-                            <a:srgbClr val="2C3E50"/>
-                          </a:solidFill>
-                          <a:latin typeface="맑은 고딕"/>
-                        </a:rPr>
-                        <a:t>62.2</a:t>
-                      </a:r>
-                    </a:p>
-                  </a:txBody>
-                  <a:tcPr>
-                    <a:solidFill>
-                      <a:srgbClr val="FFFFFF"/>
-                    </a:solidFill>
-                  </a:tcPr>
-                </a:tc>
-                <a:tc>
-                  <a:txBody>
-                    <a:bodyPr/>
-                    <a:lstStyle/>
-                    <a:p>
-                      <a:pPr algn="ctr"/>
-                      <a:r>
-                        <a:rPr sz="1400" b="0">
-                          <a:solidFill>
-                            <a:srgbClr val="2C3E50"/>
-                          </a:solidFill>
-                          <a:latin typeface="맑은 고딕"/>
-                        </a:rPr>
-                        <a:t>100.0</a:t>
-                      </a:r>
-                    </a:p>
-                  </a:txBody>
-                  <a:tcPr>
-                    <a:solidFill>
-                      <a:srgbClr val="FFFFFF"/>
-                    </a:solidFill>
-                  </a:tcPr>
-                </a:tc>
-                <a:tc>
-                  <a:txBody>
-                    <a:bodyPr/>
-                    <a:lstStyle/>
-                    <a:p>
-                      <a:pPr algn="ctr"/>
-                      <a:r>
-                        <a:rPr sz="1400" b="0">
-                          <a:solidFill>
-                            <a:srgbClr val="2C3E50"/>
-                          </a:solidFill>
-                          <a:latin typeface="맑은 고딕"/>
-                        </a:rPr>
-                        <a:t>100.0</a:t>
-                      </a:r>
-                    </a:p>
-                  </a:txBody>
-                  <a:tcPr>
-                    <a:solidFill>
-                      <a:srgbClr val="D5F5E3"/>
-                    </a:solidFill>
-                  </a:tcPr>
-                </a:tc>
-                <a:tc>
-                  <a:txBody>
-                    <a:bodyPr/>
-                    <a:lstStyle/>
-                    <a:p>
-                      <a:pPr algn="ctr"/>
-                      <a:r>
-                        <a:rPr sz="1400" b="0">
-                          <a:solidFill>
-                            <a:srgbClr val="2C3E50"/>
-                          </a:solidFill>
-                          <a:latin typeface="맑은 고딕"/>
-                        </a:rPr>
-                        <a:t>100.0</a:t>
-                      </a:r>
-                    </a:p>
-                  </a:txBody>
-                  <a:tcPr>
-                    <a:solidFill>
-                      <a:srgbClr val="D5F5E3"/>
-                    </a:solidFill>
-                  </a:tcPr>
-                </a:tc>
-                <a:tc>
-                  <a:txBody>
-                    <a:bodyPr/>
-                    <a:lstStyle/>
-                    <a:p>
-                      <a:pPr algn="ctr"/>
-                      <a:r>
-                        <a:rPr sz="1400" b="0">
-                          <a:solidFill>
-                            <a:srgbClr val="2C3E50"/>
-                          </a:solidFill>
-                          <a:latin typeface="맑은 고딕"/>
-                        </a:rPr>
-                        <a:t>100.0</a:t>
-                      </a:r>
-                    </a:p>
-                  </a:txBody>
-                  <a:tcPr>
-                    <a:solidFill>
-                      <a:srgbClr val="D5F5E3"/>
-                    </a:solidFill>
-                  </a:tcPr>
-                </a:tc>
-              </a:tr>
-              <a:tr h="441960">
-                <a:tc>
-                  <a:txBody>
-                    <a:bodyPr/>
-                    <a:lstStyle/>
-                    <a:p>
-                      <a:pPr algn="ctr"/>
-                      <a:r>
-                        <a:rPr sz="1400" b="0">
-                          <a:solidFill>
-                            <a:srgbClr val="2C3E50"/>
-                          </a:solidFill>
-                          <a:latin typeface="맑은 고딕"/>
-                        </a:rPr>
-                        <a:t>Strikeout</a:t>
-                      </a:r>
-                    </a:p>
-                  </a:txBody>
-                  <a:tcPr>
-                    <a:solidFill>
-                      <a:srgbClr val="FFFFFF"/>
-                    </a:solidFill>
-                  </a:tcPr>
-                </a:tc>
-                <a:tc>
-                  <a:txBody>
-                    <a:bodyPr/>
-                    <a:lstStyle/>
-                    <a:p>
-                      <a:pPr algn="ctr"/>
-                      <a:r>
-                        <a:rPr sz="1400" b="0">
-                          <a:solidFill>
-                            <a:srgbClr val="2C3E50"/>
-                          </a:solidFill>
-                          <a:latin typeface="맑은 고딕"/>
-                        </a:rPr>
-                        <a:t>5.89%</a:t>
-                      </a:r>
-                    </a:p>
-                  </a:txBody>
-                  <a:tcPr>
-                    <a:solidFill>
-                      <a:srgbClr val="FFFFFF"/>
-                    </a:solidFill>
-                  </a:tcPr>
-                </a:tc>
-                <a:tc>
-                  <a:txBody>
-                    <a:bodyPr/>
-                    <a:lstStyle/>
-                    <a:p>
-                      <a:pPr algn="ctr"/>
-                      <a:r>
-                        <a:rPr sz="1400" b="0">
-                          <a:solidFill>
-                            <a:srgbClr val="2C3E50"/>
-                          </a:solidFill>
-                          <a:latin typeface="맑은 고딕"/>
-                        </a:rPr>
-                        <a:t>99.8</a:t>
-                      </a:r>
-                    </a:p>
-                  </a:txBody>
-                  <a:tcPr>
-                    <a:solidFill>
-                      <a:srgbClr val="FFFFFF"/>
-                    </a:solidFill>
-                  </a:tcPr>
-                </a:tc>
-                <a:tc>
-                  <a:txBody>
-                    <a:bodyPr/>
-                    <a:lstStyle/>
-                    <a:p>
-                      <a:pPr algn="ctr"/>
-                      <a:r>
-                        <a:rPr sz="1400" b="0">
-                          <a:solidFill>
-                            <a:srgbClr val="2C3E50"/>
-                          </a:solidFill>
-                          <a:latin typeface="맑은 고딕"/>
-                        </a:rPr>
-                        <a:t>54.3</a:t>
-                      </a:r>
-                    </a:p>
-                  </a:txBody>
-                  <a:tcPr>
-                    <a:solidFill>
-                      <a:srgbClr val="FFFFFF"/>
-                    </a:solidFill>
-                  </a:tcPr>
-                </a:tc>
-                <a:tc>
-                  <a:txBody>
-                    <a:bodyPr/>
-                    <a:lstStyle/>
-                    <a:p>
-                      <a:pPr algn="ctr"/>
-                      <a:r>
-                        <a:rPr sz="1400" b="0">
-                          <a:solidFill>
-                            <a:srgbClr val="2C3E50"/>
-                          </a:solidFill>
-                          <a:latin typeface="맑은 고딕"/>
-                        </a:rPr>
-                        <a:t>100.0</a:t>
-                      </a:r>
-                    </a:p>
-                  </a:txBody>
-                  <a:tcPr>
-                    <a:solidFill>
-                      <a:srgbClr val="FFFFFF"/>
-                    </a:solidFill>
-                  </a:tcPr>
-                </a:tc>
-                <a:tc>
-                  <a:txBody>
-                    <a:bodyPr/>
-                    <a:lstStyle/>
-                    <a:p>
-                      <a:pPr algn="ctr"/>
-                      <a:r>
-                        <a:rPr sz="1400" b="0">
-                          <a:solidFill>
-                            <a:srgbClr val="2C3E50"/>
-                          </a:solidFill>
-                          <a:latin typeface="맑은 고딕"/>
-                        </a:rPr>
-                        <a:t>100.0</a:t>
-                      </a:r>
-                    </a:p>
-                  </a:txBody>
-                  <a:tcPr>
-                    <a:solidFill>
-                      <a:srgbClr val="D5F5E3"/>
-                    </a:solidFill>
-                  </a:tcPr>
-                </a:tc>
-                <a:tc>
-                  <a:txBody>
-                    <a:bodyPr/>
-                    <a:lstStyle/>
-                    <a:p>
-                      <a:pPr algn="ctr"/>
-                      <a:r>
-                        <a:rPr sz="1400" b="0">
-                          <a:solidFill>
-                            <a:srgbClr val="2C3E50"/>
-                          </a:solidFill>
-                          <a:latin typeface="맑은 고딕"/>
-                        </a:rPr>
-                        <a:t>99.9</a:t>
-                      </a:r>
-                    </a:p>
-                  </a:txBody>
-                  <a:tcPr>
-                    <a:solidFill>
-                      <a:srgbClr val="D5F5E3"/>
-                    </a:solidFill>
-                  </a:tcPr>
-                </a:tc>
-                <a:tc>
-                  <a:txBody>
-                    <a:bodyPr/>
-                    <a:lstStyle/>
-                    <a:p>
-                      <a:pPr algn="ctr"/>
-                      <a:r>
-                        <a:rPr sz="1400" b="0">
-                          <a:solidFill>
-                            <a:srgbClr val="2C3E50"/>
-                          </a:solidFill>
-                          <a:latin typeface="맑은 고딕"/>
-                        </a:rPr>
-                        <a:t>99.8</a:t>
-                      </a:r>
-                    </a:p>
-                  </a:txBody>
-                  <a:tcPr>
-                    <a:solidFill>
-                      <a:srgbClr val="D5F5E3"/>
-                    </a:solidFill>
-                  </a:tcPr>
-                </a:tc>
-              </a:tr>
-              <a:tr h="441960">
-                <a:tc>
-                  <a:txBody>
-                    <a:bodyPr/>
-                    <a:lstStyle/>
-                    <a:p>
-                      <a:pPr algn="ctr"/>
-                      <a:r>
-                        <a:rPr sz="1400" b="0">
-                          <a:solidFill>
-                            <a:srgbClr val="2C3E50"/>
-                          </a:solidFill>
-                          <a:latin typeface="맑은 고딕"/>
-                        </a:rPr>
-                        <a:t>Walk</a:t>
-                      </a:r>
-                    </a:p>
-                  </a:txBody>
-                  <a:tcPr>
-                    <a:solidFill>
-                      <a:srgbClr val="FFFFFF"/>
-                    </a:solidFill>
-                  </a:tcPr>
-                </a:tc>
-                <a:tc>
-                  <a:txBody>
-                    <a:bodyPr/>
-                    <a:lstStyle/>
-                    <a:p>
-                      <a:pPr algn="ctr"/>
-                      <a:r>
-                        <a:rPr sz="1400" b="0">
-                          <a:solidFill>
-                            <a:srgbClr val="2C3E50"/>
-                          </a:solidFill>
-                          <a:latin typeface="맑은 고딕"/>
-                        </a:rPr>
-                        <a:t>2.04%</a:t>
-                      </a:r>
-                    </a:p>
-                  </a:txBody>
-                  <a:tcPr>
-                    <a:solidFill>
-                      <a:srgbClr val="FFFFFF"/>
-                    </a:solidFill>
-                  </a:tcPr>
-                </a:tc>
-                <a:tc>
-                  <a:txBody>
-                    <a:bodyPr/>
-                    <a:lstStyle/>
-                    <a:p>
-                      <a:pPr algn="ctr"/>
-                      <a:r>
-                        <a:rPr sz="1400" b="0">
-                          <a:solidFill>
-                            <a:srgbClr val="2C3E50"/>
-                          </a:solidFill>
-                          <a:latin typeface="맑은 고딕"/>
-                        </a:rPr>
-                        <a:t>0.0</a:t>
-                      </a:r>
-                    </a:p>
-                  </a:txBody>
-                  <a:tcPr>
-                    <a:solidFill>
-                      <a:srgbClr val="FDEDED"/>
-                    </a:solidFill>
-                  </a:tcPr>
-                </a:tc>
-                <a:tc>
-                  <a:txBody>
-                    <a:bodyPr/>
-                    <a:lstStyle/>
-                    <a:p>
-                      <a:pPr algn="ctr"/>
-                      <a:r>
-                        <a:rPr sz="1400" b="0">
-                          <a:solidFill>
-                            <a:srgbClr val="2C3E50"/>
-                          </a:solidFill>
-                          <a:latin typeface="맑은 고딕"/>
-                        </a:rPr>
-                        <a:t>38.3</a:t>
-                      </a:r>
-                    </a:p>
-                  </a:txBody>
-                  <a:tcPr>
-                    <a:solidFill>
-                      <a:srgbClr val="FFFFFF"/>
-                    </a:solidFill>
-                  </a:tcPr>
-                </a:tc>
-                <a:tc>
-                  <a:txBody>
-                    <a:bodyPr/>
-                    <a:lstStyle/>
-                    <a:p>
-                      <a:pPr algn="ctr"/>
-                      <a:r>
-                        <a:rPr sz="1400" b="0">
-                          <a:solidFill>
-                            <a:srgbClr val="2C3E50"/>
-                          </a:solidFill>
-                          <a:latin typeface="맑은 고딕"/>
-                        </a:rPr>
-                        <a:t>0.0</a:t>
-                      </a:r>
-                    </a:p>
-                  </a:txBody>
-                  <a:tcPr>
-                    <a:solidFill>
-                      <a:srgbClr val="FDEDED"/>
-                    </a:solidFill>
-                  </a:tcPr>
-                </a:tc>
-                <a:tc>
-                  <a:txBody>
-                    <a:bodyPr/>
-                    <a:lstStyle/>
-                    <a:p>
-                      <a:pPr algn="ctr"/>
-                      <a:r>
-                        <a:rPr sz="1400" b="0">
-                          <a:solidFill>
-                            <a:srgbClr val="2C3E50"/>
-                          </a:solidFill>
-                          <a:latin typeface="맑은 고딕"/>
-                        </a:rPr>
-                        <a:t>98.2</a:t>
-                      </a:r>
-                    </a:p>
-                  </a:txBody>
-                  <a:tcPr>
-                    <a:solidFill>
-                      <a:srgbClr val="D5F5E3"/>
-                    </a:solidFill>
-                  </a:tcPr>
-                </a:tc>
-                <a:tc>
-                  <a:txBody>
-                    <a:bodyPr/>
-                    <a:lstStyle/>
-                    <a:p>
-                      <a:pPr algn="ctr"/>
-                      <a:r>
-                        <a:rPr sz="1400" b="0">
-                          <a:solidFill>
-                            <a:srgbClr val="2C3E50"/>
-                          </a:solidFill>
-                          <a:latin typeface="맑은 고딕"/>
-                        </a:rPr>
-                        <a:t>98.0</a:t>
-                      </a:r>
-                    </a:p>
-                  </a:txBody>
-                  <a:tcPr>
-                    <a:solidFill>
-                      <a:srgbClr val="D5F5E3"/>
-                    </a:solidFill>
-                  </a:tcPr>
-                </a:tc>
-                <a:tc>
-                  <a:txBody>
-                    <a:bodyPr/>
-                    <a:lstStyle/>
-                    <a:p>
-                      <a:pPr algn="ctr"/>
-                      <a:r>
-                        <a:rPr sz="1400" b="0">
-                          <a:solidFill>
-                            <a:srgbClr val="2C3E50"/>
-                          </a:solidFill>
-                          <a:latin typeface="맑은 고딕"/>
-                        </a:rPr>
-                        <a:t>99.0</a:t>
-                      </a:r>
-                    </a:p>
-                  </a:txBody>
-                  <a:tcPr>
-                    <a:solidFill>
-                      <a:srgbClr val="D5F5E3"/>
-                    </a:solidFill>
-                  </a:tcPr>
-                </a:tc>
-              </a:tr>
-              <a:tr h="441960">
-                <a:tc>
-                  <a:txBody>
-                    <a:bodyPr/>
-                    <a:lstStyle/>
-                    <a:p>
-                      <a:pPr algn="ctr"/>
-                      <a:r>
-                        <a:rPr sz="1400" b="0">
-                          <a:solidFill>
-                            <a:srgbClr val="2C3E50"/>
-                          </a:solidFill>
-                          <a:latin typeface="맑은 고딕"/>
-                        </a:rPr>
-                        <a:t>HBP</a:t>
-                      </a:r>
-                    </a:p>
-                  </a:txBody>
-                  <a:tcPr>
-                    <a:solidFill>
-                      <a:srgbClr val="FFFFFF"/>
-                    </a:solidFill>
-                  </a:tcPr>
-                </a:tc>
-                <a:tc>
-                  <a:txBody>
-                    <a:bodyPr/>
-                    <a:lstStyle/>
-                    <a:p>
-                      <a:pPr algn="ctr"/>
-                      <a:r>
-                        <a:rPr sz="1400" b="0">
-                          <a:solidFill>
-                            <a:srgbClr val="2C3E50"/>
-                          </a:solidFill>
-                          <a:latin typeface="맑은 고딕"/>
-                        </a:rPr>
-                        <a:t>0.28%</a:t>
-                      </a:r>
-                    </a:p>
-                  </a:txBody>
-                  <a:tcPr>
-                    <a:solidFill>
-                      <a:srgbClr val="FFFFFF"/>
-                    </a:solidFill>
-                  </a:tcPr>
-                </a:tc>
-                <a:tc>
-                  <a:txBody>
-                    <a:bodyPr/>
-                    <a:lstStyle/>
-                    <a:p>
-                      <a:pPr algn="ctr"/>
-                      <a:r>
-                        <a:rPr sz="1400" b="0">
-                          <a:solidFill>
-                            <a:srgbClr val="2C3E50"/>
-                          </a:solidFill>
-                          <a:latin typeface="맑은 고딕"/>
-                        </a:rPr>
-                        <a:t>0.0</a:t>
-                      </a:r>
-                    </a:p>
-                  </a:txBody>
-                  <a:tcPr>
-                    <a:solidFill>
-                      <a:srgbClr val="FDEDED"/>
-                    </a:solidFill>
-                  </a:tcPr>
-                </a:tc>
-                <a:tc>
-                  <a:txBody>
-                    <a:bodyPr/>
-                    <a:lstStyle/>
-                    <a:p>
-                      <a:pPr algn="ctr"/>
-                      <a:r>
-                        <a:rPr sz="1400" b="0">
-                          <a:solidFill>
-                            <a:srgbClr val="2C3E50"/>
-                          </a:solidFill>
-                          <a:latin typeface="맑은 고딕"/>
-                        </a:rPr>
-                        <a:t>5.7</a:t>
-                      </a:r>
-                    </a:p>
-                  </a:txBody>
-                  <a:tcPr>
-                    <a:solidFill>
-                      <a:srgbClr val="FFFFFF"/>
-                    </a:solidFill>
-                  </a:tcPr>
-                </a:tc>
-                <a:tc>
-                  <a:txBody>
-                    <a:bodyPr/>
-                    <a:lstStyle/>
-                    <a:p>
-                      <a:pPr algn="ctr"/>
-                      <a:r>
-                        <a:rPr sz="1400" b="0">
-                          <a:solidFill>
-                            <a:srgbClr val="2C3E50"/>
-                          </a:solidFill>
-                          <a:latin typeface="맑은 고딕"/>
-                        </a:rPr>
-                        <a:t>0.0</a:t>
-                      </a:r>
-                    </a:p>
-                  </a:txBody>
-                  <a:tcPr>
-                    <a:solidFill>
-                      <a:srgbClr val="FDEDED"/>
-                    </a:solidFill>
-                  </a:tcPr>
-                </a:tc>
-                <a:tc>
-                  <a:txBody>
-                    <a:bodyPr/>
-                    <a:lstStyle/>
-                    <a:p>
-                      <a:pPr algn="ctr"/>
-                      <a:r>
-                        <a:rPr sz="1400" b="0">
-                          <a:solidFill>
-                            <a:srgbClr val="2C3E50"/>
-                          </a:solidFill>
-                          <a:latin typeface="맑은 고딕"/>
-                        </a:rPr>
-                        <a:t>95.3</a:t>
-                      </a:r>
-                    </a:p>
-                  </a:txBody>
-                  <a:tcPr>
-                    <a:solidFill>
-                      <a:srgbClr val="D5F5E3"/>
-                    </a:solidFill>
-                  </a:tcPr>
-                </a:tc>
-                <a:tc>
-                  <a:txBody>
-                    <a:bodyPr/>
-                    <a:lstStyle/>
-                    <a:p>
-                      <a:pPr algn="ctr"/>
-                      <a:r>
-                        <a:rPr sz="1400" b="0">
-                          <a:solidFill>
-                            <a:srgbClr val="2C3E50"/>
-                          </a:solidFill>
-                          <a:latin typeface="맑은 고딕"/>
-                        </a:rPr>
-                        <a:t>92.2</a:t>
-                      </a:r>
-                    </a:p>
-                  </a:txBody>
-                  <a:tcPr>
-                    <a:solidFill>
-                      <a:srgbClr val="D5F5E3"/>
-                    </a:solidFill>
-                  </a:tcPr>
-                </a:tc>
-                <a:tc>
-                  <a:txBody>
-                    <a:bodyPr/>
-                    <a:lstStyle/>
-                    <a:p>
-                      <a:pPr algn="ctr"/>
-                      <a:r>
-                        <a:rPr sz="1400" b="0">
-                          <a:solidFill>
-                            <a:srgbClr val="2C3E50"/>
-                          </a:solidFill>
-                          <a:latin typeface="맑은 고딕"/>
-                        </a:rPr>
-                        <a:t>92.2</a:t>
-                      </a:r>
-                    </a:p>
-                  </a:txBody>
-                  <a:tcPr>
-                    <a:solidFill>
-                      <a:srgbClr val="D5F5E3"/>
-                    </a:solidFill>
-                  </a:tcPr>
-                </a:tc>
-              </a:tr>
-              <a:tr h="441960">
-                <a:tc>
-                  <a:txBody>
-                    <a:bodyPr/>
-                    <a:lstStyle/>
-                    <a:p>
-                      <a:pPr algn="ctr"/>
-                      <a:r>
-                        <a:rPr sz="1400" b="1">
-                          <a:solidFill>
-                            <a:srgbClr val="FFFFFF"/>
-                          </a:solidFill>
-                          <a:latin typeface="맑은 고딕"/>
-                        </a:rPr>
-                        <a:t>Overall</a:t>
-                      </a:r>
-                    </a:p>
-                  </a:txBody>
-                  <a:tcPr>
-                    <a:solidFill>
-                      <a:srgbClr val="2C3E50"/>
-                    </a:solidFill>
-                  </a:tcPr>
-                </a:tc>
-                <a:tc>
-                  <a:txBody>
-                    <a:bodyPr/>
-                    <a:lstStyle/>
-                    <a:p>
-                      <a:pPr algn="ctr"/>
-                      <a:r>
-                        <a:rPr sz="1400" b="1">
-                          <a:solidFill>
-                            <a:srgbClr val="FFFFFF"/>
-                          </a:solidFill>
-                          <a:latin typeface="맑은 고딕"/>
-                        </a:rPr>
-                        <a:t>—</a:t>
-                      </a:r>
-                    </a:p>
-                  </a:txBody>
-                  <a:tcPr>
-                    <a:solidFill>
-                      <a:srgbClr val="2C3E50"/>
-                    </a:solidFill>
-                  </a:tcPr>
-                </a:tc>
-                <a:tc>
-                  <a:txBody>
-                    <a:bodyPr/>
-                    <a:lstStyle/>
-                    <a:p>
-                      <a:pPr algn="ctr"/>
-                      <a:r>
-                        <a:rPr sz="1400" b="1">
-                          <a:solidFill>
-                            <a:srgbClr val="FFFFFF"/>
-                          </a:solidFill>
-                          <a:latin typeface="맑은 고딕"/>
-                        </a:rPr>
-                        <a:t>92.1</a:t>
-                      </a:r>
-                    </a:p>
-                  </a:txBody>
-                  <a:tcPr>
-                    <a:solidFill>
-                      <a:srgbClr val="2C3E50"/>
-                    </a:solidFill>
-                  </a:tcPr>
-                </a:tc>
-                <a:tc>
-                  <a:txBody>
-                    <a:bodyPr/>
-                    <a:lstStyle/>
-                    <a:p>
-                      <a:pPr algn="ctr"/>
-                      <a:r>
-                        <a:rPr sz="1400" b="1">
-                          <a:solidFill>
-                            <a:srgbClr val="FFFFFF"/>
-                          </a:solidFill>
-                          <a:latin typeface="맑은 고딕"/>
-                        </a:rPr>
-                        <a:t>66.0</a:t>
-                      </a:r>
-                    </a:p>
-                  </a:txBody>
-                  <a:tcPr>
-                    <a:solidFill>
-                      <a:srgbClr val="2C3E50"/>
-                    </a:solidFill>
-                  </a:tcPr>
-                </a:tc>
-                <a:tc>
-                  <a:txBody>
-                    <a:bodyPr/>
-                    <a:lstStyle/>
-                    <a:p>
-                      <a:pPr algn="ctr"/>
-                      <a:r>
-                        <a:rPr sz="1400" b="1">
-                          <a:solidFill>
-                            <a:srgbClr val="FFFFFF"/>
-                          </a:solidFill>
-                          <a:latin typeface="맑은 고딕"/>
-                        </a:rPr>
-                        <a:t>92.1</a:t>
-                      </a:r>
-                    </a:p>
-                  </a:txBody>
-                  <a:tcPr>
-                    <a:solidFill>
-                      <a:srgbClr val="2C3E50"/>
-                    </a:solidFill>
-                  </a:tcPr>
-                </a:tc>
-                <a:tc>
-                  <a:txBody>
-                    <a:bodyPr/>
-                    <a:lstStyle/>
-                    <a:p>
-                      <a:pPr algn="ctr"/>
-                      <a:r>
-                        <a:rPr sz="1400" b="1">
-                          <a:solidFill>
-                            <a:srgbClr val="FFFFFF"/>
-                          </a:solidFill>
-                          <a:latin typeface="맑은 고딕"/>
-                        </a:rPr>
-                        <a:t>98.0</a:t>
-                      </a:r>
-                    </a:p>
-                  </a:txBody>
-                  <a:tcPr>
-                    <a:solidFill>
-                      <a:srgbClr val="2C3E50"/>
-                    </a:solidFill>
-                  </a:tcPr>
-                </a:tc>
-                <a:tc>
-                  <a:txBody>
-                    <a:bodyPr/>
-                    <a:lstStyle/>
-                    <a:p>
-                      <a:pPr algn="ctr"/>
-                      <a:r>
-                        <a:rPr sz="1400" b="1">
-                          <a:solidFill>
-                            <a:srgbClr val="FFFFFF"/>
-                          </a:solidFill>
-                          <a:latin typeface="맑은 고딕"/>
-                        </a:rPr>
-                        <a:t>98.0</a:t>
-                      </a:r>
-                    </a:p>
-                  </a:txBody>
-                  <a:tcPr>
-                    <a:solidFill>
-                      <a:srgbClr val="2C3E50"/>
-                    </a:solidFill>
-                  </a:tcPr>
-                </a:tc>
-                <a:tc>
-                  <a:txBody>
-                    <a:bodyPr/>
-                    <a:lstStyle/>
-                    <a:p>
-                      <a:pPr algn="ctr"/>
-                      <a:r>
-                        <a:rPr sz="1400" b="1">
-                          <a:solidFill>
-                            <a:srgbClr val="FFFFFF"/>
-                          </a:solidFill>
-                          <a:latin typeface="맑은 고딕"/>
-                        </a:rPr>
-                        <a:t>98.0</a:t>
-                      </a:r>
-                    </a:p>
-                  </a:txBody>
-                  <a:tcPr>
-                    <a:solidFill>
-                      <a:srgbClr val="2C3E50"/>
                     </a:solidFill>
                   </a:tcPr>
                 </a:tc>
@@ -9835,7 +8127,7 @@
                 </a:solidFill>
                 <a:latin typeface="맑은 고딕"/>
               </a:rPr>
-              <a:t>Top-4: 예측 확률 상위 4개 안에 정답 포함 비율  |  LR/MLP 77d Overall 92% = 고빈도 4클래스에 의한 착시</a:t>
+              <a:t>빨강 = 0%  |  주황 = 유의미  |  초록 = 80%+  |  Triple/Double/HR은 세 모델 모두 0%</a:t>
             </a:r>
           </a:p>
         </p:txBody>
@@ -9931,6 +8223,3134 @@
                 </a:solidFill>
                 <a:latin typeface="맑은 고딕"/>
               </a:rPr>
+              <a:t>Per-class Top-4 Accuracy - i.i.d. 모델 (LR / LGB / MLP 77d)</a:t>
+            </a:r>
+          </a:p>
+        </p:txBody>
+      </p:sp>
+      <p:graphicFrame>
+        <p:nvGraphicFramePr>
+          <p:cNvPr id="4" name="Table 3"/>
+          <p:cNvGraphicFramePr>
+            <a:graphicFrameLocks noGrp="1"/>
+          </p:cNvGraphicFramePr>
+          <p:nvPr/>
+        </p:nvGraphicFramePr>
+        <p:xfrm>
+          <a:off x="883767.5" y="1005840"/>
+          <a:ext cx="10424160" cy="5303520"/>
+        </p:xfrm>
+        <a:graphic>
+          <a:graphicData uri="http://schemas.openxmlformats.org/drawingml/2006/table">
+            <a:tbl>
+              <a:tblPr firstRow="1" bandRow="1">
+                <a:tableStyleId>{5C22544A-7EE6-4342-B048-85BDC9FD1C3A}</a:tableStyleId>
+              </a:tblPr>
+              <a:tblGrid>
+                <a:gridCol w="1645920"/>
+                <a:gridCol w="1005840"/>
+                <a:gridCol w="2587752"/>
+                <a:gridCol w="2587752"/>
+                <a:gridCol w="2596896"/>
+              </a:tblGrid>
+              <a:tr h="441960">
+                <a:tc>
+                  <a:txBody>
+                    <a:bodyPr/>
+                    <a:lstStyle/>
+                    <a:p>
+                      <a:pPr algn="ctr"/>
+                      <a:r>
+                        <a:rPr sz="1500" b="1">
+                          <a:solidFill>
+                            <a:srgbClr val="FFFFFF"/>
+                          </a:solidFill>
+                          <a:latin typeface="맑은 고딕"/>
+                        </a:rPr>
+                        <a:t>클래스</a:t>
+                      </a:r>
+                    </a:p>
+                  </a:txBody>
+                  <a:tcPr>
+                    <a:solidFill>
+                      <a:srgbClr val="2980B9"/>
+                    </a:solidFill>
+                  </a:tcPr>
+                </a:tc>
+                <a:tc>
+                  <a:txBody>
+                    <a:bodyPr/>
+                    <a:lstStyle/>
+                    <a:p>
+                      <a:pPr algn="ctr"/>
+                      <a:r>
+                        <a:rPr sz="1500" b="1">
+                          <a:solidFill>
+                            <a:srgbClr val="FFFFFF"/>
+                          </a:solidFill>
+                          <a:latin typeface="맑은 고딕"/>
+                        </a:rPr>
+                        <a:t>비율</a:t>
+                      </a:r>
+                    </a:p>
+                  </a:txBody>
+                  <a:tcPr>
+                    <a:solidFill>
+                      <a:srgbClr val="2980B9"/>
+                    </a:solidFill>
+                  </a:tcPr>
+                </a:tc>
+                <a:tc>
+                  <a:txBody>
+                    <a:bodyPr/>
+                    <a:lstStyle/>
+                    <a:p>
+                      <a:pPr algn="ctr"/>
+                      <a:r>
+                        <a:rPr sz="1500" b="1">
+                          <a:solidFill>
+                            <a:srgbClr val="FFFFFF"/>
+                          </a:solidFill>
+                          <a:latin typeface="맑은 고딕"/>
+                        </a:rPr>
+                        <a:t>LR</a:t>
+                      </a:r>
+                    </a:p>
+                  </a:txBody>
+                  <a:tcPr>
+                    <a:solidFill>
+                      <a:srgbClr val="2980B9"/>
+                    </a:solidFill>
+                  </a:tcPr>
+                </a:tc>
+                <a:tc>
+                  <a:txBody>
+                    <a:bodyPr/>
+                    <a:lstStyle/>
+                    <a:p>
+                      <a:pPr algn="ctr"/>
+                      <a:r>
+                        <a:rPr sz="1500" b="1">
+                          <a:solidFill>
+                            <a:srgbClr val="FFFFFF"/>
+                          </a:solidFill>
+                          <a:latin typeface="맑은 고딕"/>
+                        </a:rPr>
+                        <a:t>LGB</a:t>
+                      </a:r>
+                    </a:p>
+                  </a:txBody>
+                  <a:tcPr>
+                    <a:solidFill>
+                      <a:srgbClr val="2980B9"/>
+                    </a:solidFill>
+                  </a:tcPr>
+                </a:tc>
+                <a:tc>
+                  <a:txBody>
+                    <a:bodyPr/>
+                    <a:lstStyle/>
+                    <a:p>
+                      <a:pPr algn="ctr"/>
+                      <a:r>
+                        <a:rPr sz="1500" b="1">
+                          <a:solidFill>
+                            <a:srgbClr val="FFFFFF"/>
+                          </a:solidFill>
+                          <a:latin typeface="맑은 고딕"/>
+                        </a:rPr>
+                        <a:t>MLP 77d</a:t>
+                      </a:r>
+                    </a:p>
+                  </a:txBody>
+                  <a:tcPr>
+                    <a:solidFill>
+                      <a:srgbClr val="2980B9"/>
+                    </a:solidFill>
+                  </a:tcPr>
+                </a:tc>
+              </a:tr>
+              <a:tr h="441960">
+                <a:tc>
+                  <a:txBody>
+                    <a:bodyPr/>
+                    <a:lstStyle/>
+                    <a:p>
+                      <a:pPr algn="ctr"/>
+                      <a:r>
+                        <a:rPr sz="1500" b="0">
+                          <a:solidFill>
+                            <a:srgbClr val="2C3E50"/>
+                          </a:solidFill>
+                          <a:latin typeface="맑은 고딕"/>
+                        </a:rPr>
+                        <a:t>Ball</a:t>
+                      </a:r>
+                    </a:p>
+                  </a:txBody>
+                  <a:tcPr>
+                    <a:solidFill>
+                      <a:srgbClr val="FFFFFF"/>
+                    </a:solidFill>
+                  </a:tcPr>
+                </a:tc>
+                <a:tc>
+                  <a:txBody>
+                    <a:bodyPr/>
+                    <a:lstStyle/>
+                    <a:p>
+                      <a:pPr algn="ctr"/>
+                      <a:r>
+                        <a:rPr sz="1500" b="0">
+                          <a:solidFill>
+                            <a:srgbClr val="2C3E50"/>
+                          </a:solidFill>
+                          <a:latin typeface="맑은 고딕"/>
+                        </a:rPr>
+                        <a:t>33.31%</a:t>
+                      </a:r>
+                    </a:p>
+                  </a:txBody>
+                  <a:tcPr>
+                    <a:solidFill>
+                      <a:srgbClr val="FFFFFF"/>
+                    </a:solidFill>
+                  </a:tcPr>
+                </a:tc>
+                <a:tc>
+                  <a:txBody>
+                    <a:bodyPr/>
+                    <a:lstStyle/>
+                    <a:p>
+                      <a:pPr algn="ctr"/>
+                      <a:r>
+                        <a:rPr sz="1500" b="0">
+                          <a:solidFill>
+                            <a:srgbClr val="2C3E50"/>
+                          </a:solidFill>
+                          <a:latin typeface="맑은 고딕"/>
+                        </a:rPr>
+                        <a:t>100.0</a:t>
+                      </a:r>
+                    </a:p>
+                  </a:txBody>
+                  <a:tcPr>
+                    <a:solidFill>
+                      <a:srgbClr val="FFFFFF"/>
+                    </a:solidFill>
+                  </a:tcPr>
+                </a:tc>
+                <a:tc>
+                  <a:txBody>
+                    <a:bodyPr/>
+                    <a:lstStyle/>
+                    <a:p>
+                      <a:pPr algn="ctr"/>
+                      <a:r>
+                        <a:rPr sz="1500" b="0">
+                          <a:solidFill>
+                            <a:srgbClr val="2C3E50"/>
+                          </a:solidFill>
+                          <a:latin typeface="맑은 고딕"/>
+                        </a:rPr>
+                        <a:t>70.6</a:t>
+                      </a:r>
+                    </a:p>
+                  </a:txBody>
+                  <a:tcPr>
+                    <a:solidFill>
+                      <a:srgbClr val="FFFFFF"/>
+                    </a:solidFill>
+                  </a:tcPr>
+                </a:tc>
+                <a:tc>
+                  <a:txBody>
+                    <a:bodyPr/>
+                    <a:lstStyle/>
+                    <a:p>
+                      <a:pPr algn="ctr"/>
+                      <a:r>
+                        <a:rPr sz="1500" b="0">
+                          <a:solidFill>
+                            <a:srgbClr val="2C3E50"/>
+                          </a:solidFill>
+                          <a:latin typeface="맑은 고딕"/>
+                        </a:rPr>
+                        <a:t>100.0</a:t>
+                      </a:r>
+                    </a:p>
+                  </a:txBody>
+                  <a:tcPr>
+                    <a:solidFill>
+                      <a:srgbClr val="FFFFFF"/>
+                    </a:solidFill>
+                  </a:tcPr>
+                </a:tc>
+              </a:tr>
+              <a:tr h="441960">
+                <a:tc>
+                  <a:txBody>
+                    <a:bodyPr/>
+                    <a:lstStyle/>
+                    <a:p>
+                      <a:pPr algn="ctr"/>
+                      <a:r>
+                        <a:rPr sz="1500" b="0">
+                          <a:solidFill>
+                            <a:srgbClr val="2C3E50"/>
+                          </a:solidFill>
+                          <a:latin typeface="맑은 고딕"/>
+                        </a:rPr>
+                        <a:t>Strike</a:t>
+                      </a:r>
+                    </a:p>
+                  </a:txBody>
+                  <a:tcPr>
+                    <a:solidFill>
+                      <a:srgbClr val="FFFFFF"/>
+                    </a:solidFill>
+                  </a:tcPr>
+                </a:tc>
+                <a:tc>
+                  <a:txBody>
+                    <a:bodyPr/>
+                    <a:lstStyle/>
+                    <a:p>
+                      <a:pPr algn="ctr"/>
+                      <a:r>
+                        <a:rPr sz="1500" b="0">
+                          <a:solidFill>
+                            <a:srgbClr val="2C3E50"/>
+                          </a:solidFill>
+                          <a:latin typeface="맑은 고딕"/>
+                        </a:rPr>
+                        <a:t>41.11%</a:t>
+                      </a:r>
+                    </a:p>
+                  </a:txBody>
+                  <a:tcPr>
+                    <a:solidFill>
+                      <a:srgbClr val="FFFFFF"/>
+                    </a:solidFill>
+                  </a:tcPr>
+                </a:tc>
+                <a:tc>
+                  <a:txBody>
+                    <a:bodyPr/>
+                    <a:lstStyle/>
+                    <a:p>
+                      <a:pPr algn="ctr"/>
+                      <a:r>
+                        <a:rPr sz="1500" b="0">
+                          <a:solidFill>
+                            <a:srgbClr val="2C3E50"/>
+                          </a:solidFill>
+                          <a:latin typeface="맑은 고딕"/>
+                        </a:rPr>
+                        <a:t>100.0</a:t>
+                      </a:r>
+                    </a:p>
+                  </a:txBody>
+                  <a:tcPr>
+                    <a:solidFill>
+                      <a:srgbClr val="FFFFFF"/>
+                    </a:solidFill>
+                  </a:tcPr>
+                </a:tc>
+                <a:tc>
+                  <a:txBody>
+                    <a:bodyPr/>
+                    <a:lstStyle/>
+                    <a:p>
+                      <a:pPr algn="ctr"/>
+                      <a:r>
+                        <a:rPr sz="1500" b="0">
+                          <a:solidFill>
+                            <a:srgbClr val="2C3E50"/>
+                          </a:solidFill>
+                          <a:latin typeface="맑은 고딕"/>
+                        </a:rPr>
+                        <a:t>70.4</a:t>
+                      </a:r>
+                    </a:p>
+                  </a:txBody>
+                  <a:tcPr>
+                    <a:solidFill>
+                      <a:srgbClr val="FFFFFF"/>
+                    </a:solidFill>
+                  </a:tcPr>
+                </a:tc>
+                <a:tc>
+                  <a:txBody>
+                    <a:bodyPr/>
+                    <a:lstStyle/>
+                    <a:p>
+                      <a:pPr algn="ctr"/>
+                      <a:r>
+                        <a:rPr sz="1500" b="0">
+                          <a:solidFill>
+                            <a:srgbClr val="2C3E50"/>
+                          </a:solidFill>
+                          <a:latin typeface="맑은 고딕"/>
+                        </a:rPr>
+                        <a:t>100.0</a:t>
+                      </a:r>
+                    </a:p>
+                  </a:txBody>
+                  <a:tcPr>
+                    <a:solidFill>
+                      <a:srgbClr val="FFFFFF"/>
+                    </a:solidFill>
+                  </a:tcPr>
+                </a:tc>
+              </a:tr>
+              <a:tr h="441960">
+                <a:tc>
+                  <a:txBody>
+                    <a:bodyPr/>
+                    <a:lstStyle/>
+                    <a:p>
+                      <a:pPr algn="ctr"/>
+                      <a:r>
+                        <a:rPr sz="1500" b="0">
+                          <a:solidFill>
+                            <a:srgbClr val="2C3E50"/>
+                          </a:solidFill>
+                          <a:latin typeface="맑은 고딕"/>
+                        </a:rPr>
+                        <a:t>Single</a:t>
+                      </a:r>
+                    </a:p>
+                  </a:txBody>
+                  <a:tcPr>
+                    <a:solidFill>
+                      <a:srgbClr val="FFFFFF"/>
+                    </a:solidFill>
+                  </a:tcPr>
+                </a:tc>
+                <a:tc>
+                  <a:txBody>
+                    <a:bodyPr/>
+                    <a:lstStyle/>
+                    <a:p>
+                      <a:pPr algn="ctr"/>
+                      <a:r>
+                        <a:rPr sz="1500" b="0">
+                          <a:solidFill>
+                            <a:srgbClr val="2C3E50"/>
+                          </a:solidFill>
+                          <a:latin typeface="맑은 고딕"/>
+                        </a:rPr>
+                        <a:t>3.64%</a:t>
+                      </a:r>
+                    </a:p>
+                  </a:txBody>
+                  <a:tcPr>
+                    <a:solidFill>
+                      <a:srgbClr val="FFFFFF"/>
+                    </a:solidFill>
+                  </a:tcPr>
+                </a:tc>
+                <a:tc>
+                  <a:txBody>
+                    <a:bodyPr/>
+                    <a:lstStyle/>
+                    <a:p>
+                      <a:pPr algn="ctr"/>
+                      <a:r>
+                        <a:rPr sz="1500" b="0">
+                          <a:solidFill>
+                            <a:srgbClr val="2C3E50"/>
+                          </a:solidFill>
+                          <a:latin typeface="맑은 고딕"/>
+                        </a:rPr>
+                        <a:t>0.2</a:t>
+                      </a:r>
+                    </a:p>
+                  </a:txBody>
+                  <a:tcPr>
+                    <a:solidFill>
+                      <a:srgbClr val="FFFFFF"/>
+                    </a:solidFill>
+                  </a:tcPr>
+                </a:tc>
+                <a:tc>
+                  <a:txBody>
+                    <a:bodyPr/>
+                    <a:lstStyle/>
+                    <a:p>
+                      <a:pPr algn="ctr"/>
+                      <a:r>
+                        <a:rPr sz="1500" b="0">
+                          <a:solidFill>
+                            <a:srgbClr val="2C3E50"/>
+                          </a:solidFill>
+                          <a:latin typeface="맑은 고딕"/>
+                        </a:rPr>
+                        <a:t>47.8</a:t>
+                      </a:r>
+                    </a:p>
+                  </a:txBody>
+                  <a:tcPr>
+                    <a:solidFill>
+                      <a:srgbClr val="FFFFFF"/>
+                    </a:solidFill>
+                  </a:tcPr>
+                </a:tc>
+                <a:tc>
+                  <a:txBody>
+                    <a:bodyPr/>
+                    <a:lstStyle/>
+                    <a:p>
+                      <a:pPr algn="ctr"/>
+                      <a:r>
+                        <a:rPr sz="1500" b="0">
+                          <a:solidFill>
+                            <a:srgbClr val="2C3E50"/>
+                          </a:solidFill>
+                          <a:latin typeface="맑은 고딕"/>
+                        </a:rPr>
+                        <a:t>0.0</a:t>
+                      </a:r>
+                    </a:p>
+                  </a:txBody>
+                  <a:tcPr>
+                    <a:solidFill>
+                      <a:srgbClr val="FDEDED"/>
+                    </a:solidFill>
+                  </a:tcPr>
+                </a:tc>
+              </a:tr>
+              <a:tr h="441960">
+                <a:tc>
+                  <a:txBody>
+                    <a:bodyPr/>
+                    <a:lstStyle/>
+                    <a:p>
+                      <a:pPr algn="ctr"/>
+                      <a:r>
+                        <a:rPr sz="1500" b="0">
+                          <a:solidFill>
+                            <a:srgbClr val="2C3E50"/>
+                          </a:solidFill>
+                          <a:latin typeface="맑은 고딕"/>
+                        </a:rPr>
+                        <a:t>Double</a:t>
+                      </a:r>
+                    </a:p>
+                  </a:txBody>
+                  <a:tcPr>
+                    <a:solidFill>
+                      <a:srgbClr val="FFFFFF"/>
+                    </a:solidFill>
+                  </a:tcPr>
+                </a:tc>
+                <a:tc>
+                  <a:txBody>
+                    <a:bodyPr/>
+                    <a:lstStyle/>
+                    <a:p>
+                      <a:pPr algn="ctr"/>
+                      <a:r>
+                        <a:rPr sz="1500" b="0">
+                          <a:solidFill>
+                            <a:srgbClr val="2C3E50"/>
+                          </a:solidFill>
+                          <a:latin typeface="맑은 고딕"/>
+                        </a:rPr>
+                        <a:t>1.09%</a:t>
+                      </a:r>
+                    </a:p>
+                  </a:txBody>
+                  <a:tcPr>
+                    <a:solidFill>
+                      <a:srgbClr val="FFFFFF"/>
+                    </a:solidFill>
+                  </a:tcPr>
+                </a:tc>
+                <a:tc>
+                  <a:txBody>
+                    <a:bodyPr/>
+                    <a:lstStyle/>
+                    <a:p>
+                      <a:pPr algn="ctr"/>
+                      <a:r>
+                        <a:rPr sz="1500" b="0">
+                          <a:solidFill>
+                            <a:srgbClr val="2C3E50"/>
+                          </a:solidFill>
+                          <a:latin typeface="맑은 고딕"/>
+                        </a:rPr>
+                        <a:t>0.0</a:t>
+                      </a:r>
+                    </a:p>
+                  </a:txBody>
+                  <a:tcPr>
+                    <a:solidFill>
+                      <a:srgbClr val="FDEDED"/>
+                    </a:solidFill>
+                  </a:tcPr>
+                </a:tc>
+                <a:tc>
+                  <a:txBody>
+                    <a:bodyPr/>
+                    <a:lstStyle/>
+                    <a:p>
+                      <a:pPr algn="ctr"/>
+                      <a:r>
+                        <a:rPr sz="1500" b="0">
+                          <a:solidFill>
+                            <a:srgbClr val="2C3E50"/>
+                          </a:solidFill>
+                          <a:latin typeface="맑은 고딕"/>
+                        </a:rPr>
+                        <a:t>28.5</a:t>
+                      </a:r>
+                    </a:p>
+                  </a:txBody>
+                  <a:tcPr>
+                    <a:solidFill>
+                      <a:srgbClr val="FFFFFF"/>
+                    </a:solidFill>
+                  </a:tcPr>
+                </a:tc>
+                <a:tc>
+                  <a:txBody>
+                    <a:bodyPr/>
+                    <a:lstStyle/>
+                    <a:p>
+                      <a:pPr algn="ctr"/>
+                      <a:r>
+                        <a:rPr sz="1500" b="0">
+                          <a:solidFill>
+                            <a:srgbClr val="2C3E50"/>
+                          </a:solidFill>
+                          <a:latin typeface="맑은 고딕"/>
+                        </a:rPr>
+                        <a:t>0.0</a:t>
+                      </a:r>
+                    </a:p>
+                  </a:txBody>
+                  <a:tcPr>
+                    <a:solidFill>
+                      <a:srgbClr val="FDEDED"/>
+                    </a:solidFill>
+                  </a:tcPr>
+                </a:tc>
+              </a:tr>
+              <a:tr h="441960">
+                <a:tc>
+                  <a:txBody>
+                    <a:bodyPr/>
+                    <a:lstStyle/>
+                    <a:p>
+                      <a:pPr algn="ctr"/>
+                      <a:r>
+                        <a:rPr sz="1500" b="0">
+                          <a:solidFill>
+                            <a:srgbClr val="2C3E50"/>
+                          </a:solidFill>
+                          <a:latin typeface="맑은 고딕"/>
+                        </a:rPr>
+                        <a:t>Triple</a:t>
+                      </a:r>
+                    </a:p>
+                  </a:txBody>
+                  <a:tcPr>
+                    <a:solidFill>
+                      <a:srgbClr val="FFFFFF"/>
+                    </a:solidFill>
+                  </a:tcPr>
+                </a:tc>
+                <a:tc>
+                  <a:txBody>
+                    <a:bodyPr/>
+                    <a:lstStyle/>
+                    <a:p>
+                      <a:pPr algn="ctr"/>
+                      <a:r>
+                        <a:rPr sz="1500" b="0">
+                          <a:solidFill>
+                            <a:srgbClr val="2C3E50"/>
+                          </a:solidFill>
+                          <a:latin typeface="맑은 고딕"/>
+                        </a:rPr>
+                        <a:t>0.09%</a:t>
+                      </a:r>
+                    </a:p>
+                  </a:txBody>
+                  <a:tcPr>
+                    <a:solidFill>
+                      <a:srgbClr val="FFFFFF"/>
+                    </a:solidFill>
+                  </a:tcPr>
+                </a:tc>
+                <a:tc>
+                  <a:txBody>
+                    <a:bodyPr/>
+                    <a:lstStyle/>
+                    <a:p>
+                      <a:pPr algn="ctr"/>
+                      <a:r>
+                        <a:rPr sz="1500" b="0">
+                          <a:solidFill>
+                            <a:srgbClr val="2C3E50"/>
+                          </a:solidFill>
+                          <a:latin typeface="맑은 고딕"/>
+                        </a:rPr>
+                        <a:t>0.0</a:t>
+                      </a:r>
+                    </a:p>
+                  </a:txBody>
+                  <a:tcPr>
+                    <a:solidFill>
+                      <a:srgbClr val="FDEDED"/>
+                    </a:solidFill>
+                  </a:tcPr>
+                </a:tc>
+                <a:tc>
+                  <a:txBody>
+                    <a:bodyPr/>
+                    <a:lstStyle/>
+                    <a:p>
+                      <a:pPr algn="ctr"/>
+                      <a:r>
+                        <a:rPr sz="1500" b="0">
+                          <a:solidFill>
+                            <a:srgbClr val="2C3E50"/>
+                          </a:solidFill>
+                          <a:latin typeface="맑은 고딕"/>
+                        </a:rPr>
+                        <a:t>0.0</a:t>
+                      </a:r>
+                    </a:p>
+                  </a:txBody>
+                  <a:tcPr>
+                    <a:solidFill>
+                      <a:srgbClr val="FDEDED"/>
+                    </a:solidFill>
+                  </a:tcPr>
+                </a:tc>
+                <a:tc>
+                  <a:txBody>
+                    <a:bodyPr/>
+                    <a:lstStyle/>
+                    <a:p>
+                      <a:pPr algn="ctr"/>
+                      <a:r>
+                        <a:rPr sz="1500" b="0">
+                          <a:solidFill>
+                            <a:srgbClr val="2C3E50"/>
+                          </a:solidFill>
+                          <a:latin typeface="맑은 고딕"/>
+                        </a:rPr>
+                        <a:t>0.0</a:t>
+                      </a:r>
+                    </a:p>
+                  </a:txBody>
+                  <a:tcPr>
+                    <a:solidFill>
+                      <a:srgbClr val="FDEDED"/>
+                    </a:solidFill>
+                  </a:tcPr>
+                </a:tc>
+              </a:tr>
+              <a:tr h="441960">
+                <a:tc>
+                  <a:txBody>
+                    <a:bodyPr/>
+                    <a:lstStyle/>
+                    <a:p>
+                      <a:pPr algn="ctr"/>
+                      <a:r>
+                        <a:rPr sz="1500" b="0">
+                          <a:solidFill>
+                            <a:srgbClr val="2C3E50"/>
+                          </a:solidFill>
+                          <a:latin typeface="맑은 고딕"/>
+                        </a:rPr>
+                        <a:t>HomeRun</a:t>
+                      </a:r>
+                    </a:p>
+                  </a:txBody>
+                  <a:tcPr>
+                    <a:solidFill>
+                      <a:srgbClr val="FFFFFF"/>
+                    </a:solidFill>
+                  </a:tcPr>
+                </a:tc>
+                <a:tc>
+                  <a:txBody>
+                    <a:bodyPr/>
+                    <a:lstStyle/>
+                    <a:p>
+                      <a:pPr algn="ctr"/>
+                      <a:r>
+                        <a:rPr sz="1500" b="0">
+                          <a:solidFill>
+                            <a:srgbClr val="2C3E50"/>
+                          </a:solidFill>
+                          <a:latin typeface="맑은 고딕"/>
+                        </a:rPr>
+                        <a:t>0.81%</a:t>
+                      </a:r>
+                    </a:p>
+                  </a:txBody>
+                  <a:tcPr>
+                    <a:solidFill>
+                      <a:srgbClr val="FFFFFF"/>
+                    </a:solidFill>
+                  </a:tcPr>
+                </a:tc>
+                <a:tc>
+                  <a:txBody>
+                    <a:bodyPr/>
+                    <a:lstStyle/>
+                    <a:p>
+                      <a:pPr algn="ctr"/>
+                      <a:r>
+                        <a:rPr sz="1500" b="0">
+                          <a:solidFill>
+                            <a:srgbClr val="2C3E50"/>
+                          </a:solidFill>
+                          <a:latin typeface="맑은 고딕"/>
+                        </a:rPr>
+                        <a:t>0.0</a:t>
+                      </a:r>
+                    </a:p>
+                  </a:txBody>
+                  <a:tcPr>
+                    <a:solidFill>
+                      <a:srgbClr val="FDEDED"/>
+                    </a:solidFill>
+                  </a:tcPr>
+                </a:tc>
+                <a:tc>
+                  <a:txBody>
+                    <a:bodyPr/>
+                    <a:lstStyle/>
+                    <a:p>
+                      <a:pPr algn="ctr"/>
+                      <a:r>
+                        <a:rPr sz="1500" b="0">
+                          <a:solidFill>
+                            <a:srgbClr val="2C3E50"/>
+                          </a:solidFill>
+                          <a:latin typeface="맑은 고딕"/>
+                        </a:rPr>
+                        <a:t>20.5</a:t>
+                      </a:r>
+                    </a:p>
+                  </a:txBody>
+                  <a:tcPr>
+                    <a:solidFill>
+                      <a:srgbClr val="FFFFFF"/>
+                    </a:solidFill>
+                  </a:tcPr>
+                </a:tc>
+                <a:tc>
+                  <a:txBody>
+                    <a:bodyPr/>
+                    <a:lstStyle/>
+                    <a:p>
+                      <a:pPr algn="ctr"/>
+                      <a:r>
+                        <a:rPr sz="1500" b="0">
+                          <a:solidFill>
+                            <a:srgbClr val="2C3E50"/>
+                          </a:solidFill>
+                          <a:latin typeface="맑은 고딕"/>
+                        </a:rPr>
+                        <a:t>0.0</a:t>
+                      </a:r>
+                    </a:p>
+                  </a:txBody>
+                  <a:tcPr>
+                    <a:solidFill>
+                      <a:srgbClr val="FDEDED"/>
+                    </a:solidFill>
+                  </a:tcPr>
+                </a:tc>
+              </a:tr>
+              <a:tr h="441960">
+                <a:tc>
+                  <a:txBody>
+                    <a:bodyPr/>
+                    <a:lstStyle/>
+                    <a:p>
+                      <a:pPr algn="ctr"/>
+                      <a:r>
+                        <a:rPr sz="1500" b="0">
+                          <a:solidFill>
+                            <a:srgbClr val="2C3E50"/>
+                          </a:solidFill>
+                          <a:latin typeface="맑은 고딕"/>
+                        </a:rPr>
+                        <a:t>FieldOut</a:t>
+                      </a:r>
+                    </a:p>
+                  </a:txBody>
+                  <a:tcPr>
+                    <a:solidFill>
+                      <a:srgbClr val="FFFFFF"/>
+                    </a:solidFill>
+                  </a:tcPr>
+                </a:tc>
+                <a:tc>
+                  <a:txBody>
+                    <a:bodyPr/>
+                    <a:lstStyle/>
+                    <a:p>
+                      <a:pPr algn="ctr"/>
+                      <a:r>
+                        <a:rPr sz="1500" b="0">
+                          <a:solidFill>
+                            <a:srgbClr val="2C3E50"/>
+                          </a:solidFill>
+                          <a:latin typeface="맑은 고딕"/>
+                        </a:rPr>
+                        <a:t>11.75%</a:t>
+                      </a:r>
+                    </a:p>
+                  </a:txBody>
+                  <a:tcPr>
+                    <a:solidFill>
+                      <a:srgbClr val="FFFFFF"/>
+                    </a:solidFill>
+                  </a:tcPr>
+                </a:tc>
+                <a:tc>
+                  <a:txBody>
+                    <a:bodyPr/>
+                    <a:lstStyle/>
+                    <a:p>
+                      <a:pPr algn="ctr"/>
+                      <a:r>
+                        <a:rPr sz="1500" b="0">
+                          <a:solidFill>
+                            <a:srgbClr val="2C3E50"/>
+                          </a:solidFill>
+                          <a:latin typeface="맑은 고딕"/>
+                        </a:rPr>
+                        <a:t>100.0</a:t>
+                      </a:r>
+                    </a:p>
+                  </a:txBody>
+                  <a:tcPr>
+                    <a:solidFill>
+                      <a:srgbClr val="FFFFFF"/>
+                    </a:solidFill>
+                  </a:tcPr>
+                </a:tc>
+                <a:tc>
+                  <a:txBody>
+                    <a:bodyPr/>
+                    <a:lstStyle/>
+                    <a:p>
+                      <a:pPr algn="ctr"/>
+                      <a:r>
+                        <a:rPr sz="1500" b="0">
+                          <a:solidFill>
+                            <a:srgbClr val="2C3E50"/>
+                          </a:solidFill>
+                          <a:latin typeface="맑은 고딕"/>
+                        </a:rPr>
+                        <a:t>62.2</a:t>
+                      </a:r>
+                    </a:p>
+                  </a:txBody>
+                  <a:tcPr>
+                    <a:solidFill>
+                      <a:srgbClr val="FFFFFF"/>
+                    </a:solidFill>
+                  </a:tcPr>
+                </a:tc>
+                <a:tc>
+                  <a:txBody>
+                    <a:bodyPr/>
+                    <a:lstStyle/>
+                    <a:p>
+                      <a:pPr algn="ctr"/>
+                      <a:r>
+                        <a:rPr sz="1500" b="0">
+                          <a:solidFill>
+                            <a:srgbClr val="2C3E50"/>
+                          </a:solidFill>
+                          <a:latin typeface="맑은 고딕"/>
+                        </a:rPr>
+                        <a:t>100.0</a:t>
+                      </a:r>
+                    </a:p>
+                  </a:txBody>
+                  <a:tcPr>
+                    <a:solidFill>
+                      <a:srgbClr val="FFFFFF"/>
+                    </a:solidFill>
+                  </a:tcPr>
+                </a:tc>
+              </a:tr>
+              <a:tr h="441960">
+                <a:tc>
+                  <a:txBody>
+                    <a:bodyPr/>
+                    <a:lstStyle/>
+                    <a:p>
+                      <a:pPr algn="ctr"/>
+                      <a:r>
+                        <a:rPr sz="1500" b="0">
+                          <a:solidFill>
+                            <a:srgbClr val="2C3E50"/>
+                          </a:solidFill>
+                          <a:latin typeface="맑은 고딕"/>
+                        </a:rPr>
+                        <a:t>Strikeout</a:t>
+                      </a:r>
+                    </a:p>
+                  </a:txBody>
+                  <a:tcPr>
+                    <a:solidFill>
+                      <a:srgbClr val="FFFFFF"/>
+                    </a:solidFill>
+                  </a:tcPr>
+                </a:tc>
+                <a:tc>
+                  <a:txBody>
+                    <a:bodyPr/>
+                    <a:lstStyle/>
+                    <a:p>
+                      <a:pPr algn="ctr"/>
+                      <a:r>
+                        <a:rPr sz="1500" b="0">
+                          <a:solidFill>
+                            <a:srgbClr val="2C3E50"/>
+                          </a:solidFill>
+                          <a:latin typeface="맑은 고딕"/>
+                        </a:rPr>
+                        <a:t>5.89%</a:t>
+                      </a:r>
+                    </a:p>
+                  </a:txBody>
+                  <a:tcPr>
+                    <a:solidFill>
+                      <a:srgbClr val="FFFFFF"/>
+                    </a:solidFill>
+                  </a:tcPr>
+                </a:tc>
+                <a:tc>
+                  <a:txBody>
+                    <a:bodyPr/>
+                    <a:lstStyle/>
+                    <a:p>
+                      <a:pPr algn="ctr"/>
+                      <a:r>
+                        <a:rPr sz="1500" b="0">
+                          <a:solidFill>
+                            <a:srgbClr val="2C3E50"/>
+                          </a:solidFill>
+                          <a:latin typeface="맑은 고딕"/>
+                        </a:rPr>
+                        <a:t>99.8</a:t>
+                      </a:r>
+                    </a:p>
+                  </a:txBody>
+                  <a:tcPr>
+                    <a:solidFill>
+                      <a:srgbClr val="FFFFFF"/>
+                    </a:solidFill>
+                  </a:tcPr>
+                </a:tc>
+                <a:tc>
+                  <a:txBody>
+                    <a:bodyPr/>
+                    <a:lstStyle/>
+                    <a:p>
+                      <a:pPr algn="ctr"/>
+                      <a:r>
+                        <a:rPr sz="1500" b="0">
+                          <a:solidFill>
+                            <a:srgbClr val="2C3E50"/>
+                          </a:solidFill>
+                          <a:latin typeface="맑은 고딕"/>
+                        </a:rPr>
+                        <a:t>54.3</a:t>
+                      </a:r>
+                    </a:p>
+                  </a:txBody>
+                  <a:tcPr>
+                    <a:solidFill>
+                      <a:srgbClr val="FFFFFF"/>
+                    </a:solidFill>
+                  </a:tcPr>
+                </a:tc>
+                <a:tc>
+                  <a:txBody>
+                    <a:bodyPr/>
+                    <a:lstStyle/>
+                    <a:p>
+                      <a:pPr algn="ctr"/>
+                      <a:r>
+                        <a:rPr sz="1500" b="0">
+                          <a:solidFill>
+                            <a:srgbClr val="2C3E50"/>
+                          </a:solidFill>
+                          <a:latin typeface="맑은 고딕"/>
+                        </a:rPr>
+                        <a:t>100.0</a:t>
+                      </a:r>
+                    </a:p>
+                  </a:txBody>
+                  <a:tcPr>
+                    <a:solidFill>
+                      <a:srgbClr val="FFFFFF"/>
+                    </a:solidFill>
+                  </a:tcPr>
+                </a:tc>
+              </a:tr>
+              <a:tr h="441960">
+                <a:tc>
+                  <a:txBody>
+                    <a:bodyPr/>
+                    <a:lstStyle/>
+                    <a:p>
+                      <a:pPr algn="ctr"/>
+                      <a:r>
+                        <a:rPr sz="1500" b="0">
+                          <a:solidFill>
+                            <a:srgbClr val="2C3E50"/>
+                          </a:solidFill>
+                          <a:latin typeface="맑은 고딕"/>
+                        </a:rPr>
+                        <a:t>Walk</a:t>
+                      </a:r>
+                    </a:p>
+                  </a:txBody>
+                  <a:tcPr>
+                    <a:solidFill>
+                      <a:srgbClr val="FFFFFF"/>
+                    </a:solidFill>
+                  </a:tcPr>
+                </a:tc>
+                <a:tc>
+                  <a:txBody>
+                    <a:bodyPr/>
+                    <a:lstStyle/>
+                    <a:p>
+                      <a:pPr algn="ctr"/>
+                      <a:r>
+                        <a:rPr sz="1500" b="0">
+                          <a:solidFill>
+                            <a:srgbClr val="2C3E50"/>
+                          </a:solidFill>
+                          <a:latin typeface="맑은 고딕"/>
+                        </a:rPr>
+                        <a:t>2.04%</a:t>
+                      </a:r>
+                    </a:p>
+                  </a:txBody>
+                  <a:tcPr>
+                    <a:solidFill>
+                      <a:srgbClr val="FFFFFF"/>
+                    </a:solidFill>
+                  </a:tcPr>
+                </a:tc>
+                <a:tc>
+                  <a:txBody>
+                    <a:bodyPr/>
+                    <a:lstStyle/>
+                    <a:p>
+                      <a:pPr algn="ctr"/>
+                      <a:r>
+                        <a:rPr sz="1500" b="0">
+                          <a:solidFill>
+                            <a:srgbClr val="2C3E50"/>
+                          </a:solidFill>
+                          <a:latin typeface="맑은 고딕"/>
+                        </a:rPr>
+                        <a:t>0.0</a:t>
+                      </a:r>
+                    </a:p>
+                  </a:txBody>
+                  <a:tcPr>
+                    <a:solidFill>
+                      <a:srgbClr val="FDEDED"/>
+                    </a:solidFill>
+                  </a:tcPr>
+                </a:tc>
+                <a:tc>
+                  <a:txBody>
+                    <a:bodyPr/>
+                    <a:lstStyle/>
+                    <a:p>
+                      <a:pPr algn="ctr"/>
+                      <a:r>
+                        <a:rPr sz="1500" b="0">
+                          <a:solidFill>
+                            <a:srgbClr val="2C3E50"/>
+                          </a:solidFill>
+                          <a:latin typeface="맑은 고딕"/>
+                        </a:rPr>
+                        <a:t>38.3</a:t>
+                      </a:r>
+                    </a:p>
+                  </a:txBody>
+                  <a:tcPr>
+                    <a:solidFill>
+                      <a:srgbClr val="FFFFFF"/>
+                    </a:solidFill>
+                  </a:tcPr>
+                </a:tc>
+                <a:tc>
+                  <a:txBody>
+                    <a:bodyPr/>
+                    <a:lstStyle/>
+                    <a:p>
+                      <a:pPr algn="ctr"/>
+                      <a:r>
+                        <a:rPr sz="1500" b="0">
+                          <a:solidFill>
+                            <a:srgbClr val="2C3E50"/>
+                          </a:solidFill>
+                          <a:latin typeface="맑은 고딕"/>
+                        </a:rPr>
+                        <a:t>0.0</a:t>
+                      </a:r>
+                    </a:p>
+                  </a:txBody>
+                  <a:tcPr>
+                    <a:solidFill>
+                      <a:srgbClr val="FDEDED"/>
+                    </a:solidFill>
+                  </a:tcPr>
+                </a:tc>
+              </a:tr>
+              <a:tr h="441960">
+                <a:tc>
+                  <a:txBody>
+                    <a:bodyPr/>
+                    <a:lstStyle/>
+                    <a:p>
+                      <a:pPr algn="ctr"/>
+                      <a:r>
+                        <a:rPr sz="1500" b="0">
+                          <a:solidFill>
+                            <a:srgbClr val="2C3E50"/>
+                          </a:solidFill>
+                          <a:latin typeface="맑은 고딕"/>
+                        </a:rPr>
+                        <a:t>HBP</a:t>
+                      </a:r>
+                    </a:p>
+                  </a:txBody>
+                  <a:tcPr>
+                    <a:solidFill>
+                      <a:srgbClr val="FFFFFF"/>
+                    </a:solidFill>
+                  </a:tcPr>
+                </a:tc>
+                <a:tc>
+                  <a:txBody>
+                    <a:bodyPr/>
+                    <a:lstStyle/>
+                    <a:p>
+                      <a:pPr algn="ctr"/>
+                      <a:r>
+                        <a:rPr sz="1500" b="0">
+                          <a:solidFill>
+                            <a:srgbClr val="2C3E50"/>
+                          </a:solidFill>
+                          <a:latin typeface="맑은 고딕"/>
+                        </a:rPr>
+                        <a:t>0.28%</a:t>
+                      </a:r>
+                    </a:p>
+                  </a:txBody>
+                  <a:tcPr>
+                    <a:solidFill>
+                      <a:srgbClr val="FFFFFF"/>
+                    </a:solidFill>
+                  </a:tcPr>
+                </a:tc>
+                <a:tc>
+                  <a:txBody>
+                    <a:bodyPr/>
+                    <a:lstStyle/>
+                    <a:p>
+                      <a:pPr algn="ctr"/>
+                      <a:r>
+                        <a:rPr sz="1500" b="0">
+                          <a:solidFill>
+                            <a:srgbClr val="2C3E50"/>
+                          </a:solidFill>
+                          <a:latin typeface="맑은 고딕"/>
+                        </a:rPr>
+                        <a:t>0.0</a:t>
+                      </a:r>
+                    </a:p>
+                  </a:txBody>
+                  <a:tcPr>
+                    <a:solidFill>
+                      <a:srgbClr val="FDEDED"/>
+                    </a:solidFill>
+                  </a:tcPr>
+                </a:tc>
+                <a:tc>
+                  <a:txBody>
+                    <a:bodyPr/>
+                    <a:lstStyle/>
+                    <a:p>
+                      <a:pPr algn="ctr"/>
+                      <a:r>
+                        <a:rPr sz="1500" b="0">
+                          <a:solidFill>
+                            <a:srgbClr val="2C3E50"/>
+                          </a:solidFill>
+                          <a:latin typeface="맑은 고딕"/>
+                        </a:rPr>
+                        <a:t>5.7</a:t>
+                      </a:r>
+                    </a:p>
+                  </a:txBody>
+                  <a:tcPr>
+                    <a:solidFill>
+                      <a:srgbClr val="FFFFFF"/>
+                    </a:solidFill>
+                  </a:tcPr>
+                </a:tc>
+                <a:tc>
+                  <a:txBody>
+                    <a:bodyPr/>
+                    <a:lstStyle/>
+                    <a:p>
+                      <a:pPr algn="ctr"/>
+                      <a:r>
+                        <a:rPr sz="1500" b="0">
+                          <a:solidFill>
+                            <a:srgbClr val="2C3E50"/>
+                          </a:solidFill>
+                          <a:latin typeface="맑은 고딕"/>
+                        </a:rPr>
+                        <a:t>0.0</a:t>
+                      </a:r>
+                    </a:p>
+                  </a:txBody>
+                  <a:tcPr>
+                    <a:solidFill>
+                      <a:srgbClr val="FDEDED"/>
+                    </a:solidFill>
+                  </a:tcPr>
+                </a:tc>
+              </a:tr>
+              <a:tr h="441960">
+                <a:tc>
+                  <a:txBody>
+                    <a:bodyPr/>
+                    <a:lstStyle/>
+                    <a:p>
+                      <a:pPr algn="ctr"/>
+                      <a:r>
+                        <a:rPr sz="1500" b="1">
+                          <a:solidFill>
+                            <a:srgbClr val="FFFFFF"/>
+                          </a:solidFill>
+                          <a:latin typeface="맑은 고딕"/>
+                        </a:rPr>
+                        <a:t>Overall</a:t>
+                      </a:r>
+                    </a:p>
+                  </a:txBody>
+                  <a:tcPr>
+                    <a:solidFill>
+                      <a:srgbClr val="2C3E50"/>
+                    </a:solidFill>
+                  </a:tcPr>
+                </a:tc>
+                <a:tc>
+                  <a:txBody>
+                    <a:bodyPr/>
+                    <a:lstStyle/>
+                    <a:p>
+                      <a:pPr algn="ctr"/>
+                      <a:r>
+                        <a:rPr sz="1500" b="1">
+                          <a:solidFill>
+                            <a:srgbClr val="FFFFFF"/>
+                          </a:solidFill>
+                          <a:latin typeface="맑은 고딕"/>
+                        </a:rPr>
+                        <a:t>—</a:t>
+                      </a:r>
+                    </a:p>
+                  </a:txBody>
+                  <a:tcPr>
+                    <a:solidFill>
+                      <a:srgbClr val="2C3E50"/>
+                    </a:solidFill>
+                  </a:tcPr>
+                </a:tc>
+                <a:tc>
+                  <a:txBody>
+                    <a:bodyPr/>
+                    <a:lstStyle/>
+                    <a:p>
+                      <a:pPr algn="ctr"/>
+                      <a:r>
+                        <a:rPr sz="1500" b="1">
+                          <a:solidFill>
+                            <a:srgbClr val="FFFFFF"/>
+                          </a:solidFill>
+                          <a:latin typeface="맑은 고딕"/>
+                        </a:rPr>
+                        <a:t>92.1</a:t>
+                      </a:r>
+                    </a:p>
+                  </a:txBody>
+                  <a:tcPr>
+                    <a:solidFill>
+                      <a:srgbClr val="2C3E50"/>
+                    </a:solidFill>
+                  </a:tcPr>
+                </a:tc>
+                <a:tc>
+                  <a:txBody>
+                    <a:bodyPr/>
+                    <a:lstStyle/>
+                    <a:p>
+                      <a:pPr algn="ctr"/>
+                      <a:r>
+                        <a:rPr sz="1500" b="1">
+                          <a:solidFill>
+                            <a:srgbClr val="FFFFFF"/>
+                          </a:solidFill>
+                          <a:latin typeface="맑은 고딕"/>
+                        </a:rPr>
+                        <a:t>66.0</a:t>
+                      </a:r>
+                    </a:p>
+                  </a:txBody>
+                  <a:tcPr>
+                    <a:solidFill>
+                      <a:srgbClr val="2C3E50"/>
+                    </a:solidFill>
+                  </a:tcPr>
+                </a:tc>
+                <a:tc>
+                  <a:txBody>
+                    <a:bodyPr/>
+                    <a:lstStyle/>
+                    <a:p>
+                      <a:pPr algn="ctr"/>
+                      <a:r>
+                        <a:rPr sz="1500" b="1">
+                          <a:solidFill>
+                            <a:srgbClr val="FFFFFF"/>
+                          </a:solidFill>
+                          <a:latin typeface="맑은 고딕"/>
+                        </a:rPr>
+                        <a:t>92.1</a:t>
+                      </a:r>
+                    </a:p>
+                  </a:txBody>
+                  <a:tcPr>
+                    <a:solidFill>
+                      <a:srgbClr val="2C3E50"/>
+                    </a:solidFill>
+                  </a:tcPr>
+                </a:tc>
+              </a:tr>
+            </a:tbl>
+          </a:graphicData>
+        </a:graphic>
+      </p:graphicFrame>
+      <p:sp>
+        <p:nvSpPr>
+          <p:cNvPr id="5" name="TextBox 4"/>
+          <p:cNvSpPr txBox="1"/>
+          <p:nvPr/>
+        </p:nvSpPr>
+        <p:spPr>
+          <a:xfrm>
+            <a:off x="457200" y="6400800"/>
+            <a:ext cx="11277295" cy="457200"/>
+          </a:xfrm>
+          <a:prstGeom prst="rect">
+            <a:avLst/>
+          </a:prstGeom>
+          <a:noFill/>
+        </p:spPr>
+        <p:txBody>
+          <a:bodyPr wrap="square">
+            <a:spAutoFit/>
+          </a:bodyPr>
+          <a:lstStyle/>
+          <a:p>
+            <a:pPr algn="ctr"/>
+            <a:r>
+              <a:rPr sz="1300" b="0" i="1">
+                <a:solidFill>
+                  <a:srgbClr val="2C3E50"/>
+                </a:solidFill>
+                <a:latin typeface="맑은 고딕"/>
+              </a:rPr>
+              <a:t>LR/MLP 77d Overall 92% = Ball·Strike·FieldOut·Strikeout 4클래스 착시  |  LGB Overall 66%</a:t>
+            </a:r>
+          </a:p>
+        </p:txBody>
+      </p:sp>
+    </p:spTree>
+  </p:cSld>
+  <p:clrMapOvr>
+    <a:masterClrMapping/>
+  </p:clrMapOvr>
+</p:sld>
+</file>
+
+<file path=ppt/slides/slide7.xml><?xml version="1.0" encoding="utf-8"?>
+<p:sld xmlns:a="http://schemas.openxmlformats.org/drawingml/2006/main" xmlns:p="http://schemas.openxmlformats.org/presentationml/2006/main" xmlns:r="http://schemas.openxmlformats.org/officeDocument/2006/relationships">
+  <p:cSld>
+    <p:spTree>
+      <p:nvGrpSpPr>
+        <p:cNvPr id="1" name=""/>
+        <p:cNvGrpSpPr/>
+        <p:nvPr/>
+      </p:nvGrpSpPr>
+      <p:grpSpPr/>
+      <p:sp>
+        <p:nvSpPr>
+          <p:cNvPr id="2" name="Rectangle 1"/>
+          <p:cNvSpPr/>
+          <p:nvPr/>
+        </p:nvSpPr>
+        <p:spPr>
+          <a:xfrm>
+            <a:off x="0" y="0"/>
+            <a:ext cx="12191695" cy="914400"/>
+          </a:xfrm>
+          <a:prstGeom prst="rect">
+            <a:avLst/>
+          </a:prstGeom>
+          <a:solidFill>
+            <a:srgbClr val="2C3E50"/>
+          </a:solidFill>
+          <a:ln>
+            <a:noFill/>
+          </a:ln>
+        </p:spPr>
+        <p:style>
+          <a:lnRef idx="1">
+            <a:schemeClr val="accent1"/>
+          </a:lnRef>
+          <a:fillRef idx="3">
+            <a:schemeClr val="accent1"/>
+          </a:fillRef>
+          <a:effectRef idx="2">
+            <a:schemeClr val="accent1"/>
+          </a:effectRef>
+          <a:fontRef idx="minor">
+            <a:schemeClr val="lt1"/>
+          </a:fontRef>
+        </p:style>
+        <p:txBody>
+          <a:bodyPr rtlCol="0" anchor="ctr"/>
+          <a:lstStyle/>
+          <a:p>
+            <a:pPr algn="ctr"/>
+          </a:p>
+        </p:txBody>
+      </p:sp>
+      <p:sp>
+        <p:nvSpPr>
+          <p:cNvPr id="3" name="TextBox 2"/>
+          <p:cNvSpPr txBox="1"/>
+          <p:nvPr/>
+        </p:nvSpPr>
+        <p:spPr>
+          <a:xfrm>
+            <a:off x="457200" y="91440"/>
+            <a:ext cx="11277295" cy="731520"/>
+          </a:xfrm>
+          <a:prstGeom prst="rect">
+            <a:avLst/>
+          </a:prstGeom>
+          <a:noFill/>
+        </p:spPr>
+        <p:txBody>
+          <a:bodyPr wrap="square">
+            <a:spAutoFit/>
+          </a:bodyPr>
+          <a:lstStyle/>
+          <a:p>
+            <a:pPr algn="l"/>
+            <a:r>
+              <a:rPr sz="2800" b="1">
+                <a:solidFill>
+                  <a:srgbClr val="FFFFFF"/>
+                </a:solidFill>
+                <a:latin typeface="맑은 고딕"/>
+              </a:rPr>
+              <a:t>Per-class Top-4 Accuracy — Context &amp; Sequence 모델</a:t>
+            </a:r>
+          </a:p>
+        </p:txBody>
+      </p:sp>
+      <p:graphicFrame>
+        <p:nvGraphicFramePr>
+          <p:cNvPr id="4" name="Table 3"/>
+          <p:cNvGraphicFramePr>
+            <a:graphicFrameLocks noGrp="1"/>
+          </p:cNvGraphicFramePr>
+          <p:nvPr/>
+        </p:nvGraphicFramePr>
+        <p:xfrm>
+          <a:off x="883767.5" y="1005840"/>
+          <a:ext cx="10424160" cy="5303520"/>
+        </p:xfrm>
+        <a:graphic>
+          <a:graphicData uri="http://schemas.openxmlformats.org/drawingml/2006/table">
+            <a:tbl>
+              <a:tblPr firstRow="1" bandRow="1">
+                <a:tableStyleId>{5C22544A-7EE6-4342-B048-85BDC9FD1C3A}</a:tableStyleId>
+              </a:tblPr>
+              <a:tblGrid>
+                <a:gridCol w="1645920"/>
+                <a:gridCol w="1005840"/>
+                <a:gridCol w="2587752"/>
+                <a:gridCol w="2587752"/>
+                <a:gridCol w="2596896"/>
+              </a:tblGrid>
+              <a:tr h="441960">
+                <a:tc>
+                  <a:txBody>
+                    <a:bodyPr/>
+                    <a:lstStyle/>
+                    <a:p>
+                      <a:pPr algn="ctr"/>
+                      <a:r>
+                        <a:rPr sz="1500" b="1">
+                          <a:solidFill>
+                            <a:srgbClr val="FFFFFF"/>
+                          </a:solidFill>
+                          <a:latin typeface="맑은 고딕"/>
+                        </a:rPr>
+                        <a:t>클래스</a:t>
+                      </a:r>
+                    </a:p>
+                  </a:txBody>
+                  <a:tcPr>
+                    <a:solidFill>
+                      <a:srgbClr val="2980B9"/>
+                    </a:solidFill>
+                  </a:tcPr>
+                </a:tc>
+                <a:tc>
+                  <a:txBody>
+                    <a:bodyPr/>
+                    <a:lstStyle/>
+                    <a:p>
+                      <a:pPr algn="ctr"/>
+                      <a:r>
+                        <a:rPr sz="1500" b="1">
+                          <a:solidFill>
+                            <a:srgbClr val="FFFFFF"/>
+                          </a:solidFill>
+                          <a:latin typeface="맑은 고딕"/>
+                        </a:rPr>
+                        <a:t>비율</a:t>
+                      </a:r>
+                    </a:p>
+                  </a:txBody>
+                  <a:tcPr>
+                    <a:solidFill>
+                      <a:srgbClr val="2980B9"/>
+                    </a:solidFill>
+                  </a:tcPr>
+                </a:tc>
+                <a:tc>
+                  <a:txBody>
+                    <a:bodyPr/>
+                    <a:lstStyle/>
+                    <a:p>
+                      <a:pPr algn="ctr"/>
+                      <a:r>
+                        <a:rPr sz="1500" b="1">
+                          <a:solidFill>
+                            <a:srgbClr val="FFFFFF"/>
+                          </a:solidFill>
+                          <a:latin typeface="맑은 고딕"/>
+                        </a:rPr>
+                        <a:t>MLP 135d</a:t>
+                      </a:r>
+                    </a:p>
+                  </a:txBody>
+                  <a:tcPr>
+                    <a:solidFill>
+                      <a:srgbClr val="2980B9"/>
+                    </a:solidFill>
+                  </a:tcPr>
+                </a:tc>
+                <a:tc>
+                  <a:txBody>
+                    <a:bodyPr/>
+                    <a:lstStyle/>
+                    <a:p>
+                      <a:pPr algn="ctr"/>
+                      <a:r>
+                        <a:rPr sz="1500" b="1">
+                          <a:solidFill>
+                            <a:srgbClr val="FFFFFF"/>
+                          </a:solidFill>
+                          <a:latin typeface="맑은 고딕"/>
+                        </a:rPr>
+                        <a:t>RNN</a:t>
+                      </a:r>
+                    </a:p>
+                  </a:txBody>
+                  <a:tcPr>
+                    <a:solidFill>
+                      <a:srgbClr val="2980B9"/>
+                    </a:solidFill>
+                  </a:tcPr>
+                </a:tc>
+                <a:tc>
+                  <a:txBody>
+                    <a:bodyPr/>
+                    <a:lstStyle/>
+                    <a:p>
+                      <a:pPr algn="ctr"/>
+                      <a:r>
+                        <a:rPr sz="1500" b="1">
+                          <a:solidFill>
+                            <a:srgbClr val="FFFFFF"/>
+                          </a:solidFill>
+                          <a:latin typeface="맑은 고딕"/>
+                        </a:rPr>
+                        <a:t>Transformer</a:t>
+                      </a:r>
+                    </a:p>
+                  </a:txBody>
+                  <a:tcPr>
+                    <a:solidFill>
+                      <a:srgbClr val="2980B9"/>
+                    </a:solidFill>
+                  </a:tcPr>
+                </a:tc>
+              </a:tr>
+              <a:tr h="441960">
+                <a:tc>
+                  <a:txBody>
+                    <a:bodyPr/>
+                    <a:lstStyle/>
+                    <a:p>
+                      <a:pPr algn="ctr"/>
+                      <a:r>
+                        <a:rPr sz="1500" b="0">
+                          <a:solidFill>
+                            <a:srgbClr val="2C3E50"/>
+                          </a:solidFill>
+                          <a:latin typeface="맑은 고딕"/>
+                        </a:rPr>
+                        <a:t>Ball</a:t>
+                      </a:r>
+                    </a:p>
+                  </a:txBody>
+                  <a:tcPr>
+                    <a:solidFill>
+                      <a:srgbClr val="FFFFFF"/>
+                    </a:solidFill>
+                  </a:tcPr>
+                </a:tc>
+                <a:tc>
+                  <a:txBody>
+                    <a:bodyPr/>
+                    <a:lstStyle/>
+                    <a:p>
+                      <a:pPr algn="ctr"/>
+                      <a:r>
+                        <a:rPr sz="1500" b="0">
+                          <a:solidFill>
+                            <a:srgbClr val="2C3E50"/>
+                          </a:solidFill>
+                          <a:latin typeface="맑은 고딕"/>
+                        </a:rPr>
+                        <a:t>33.31%</a:t>
+                      </a:r>
+                    </a:p>
+                  </a:txBody>
+                  <a:tcPr>
+                    <a:solidFill>
+                      <a:srgbClr val="FFFFFF"/>
+                    </a:solidFill>
+                  </a:tcPr>
+                </a:tc>
+                <a:tc>
+                  <a:txBody>
+                    <a:bodyPr/>
+                    <a:lstStyle/>
+                    <a:p>
+                      <a:pPr algn="ctr"/>
+                      <a:r>
+                        <a:rPr sz="1500" b="0">
+                          <a:solidFill>
+                            <a:srgbClr val="2C3E50"/>
+                          </a:solidFill>
+                          <a:latin typeface="맑은 고딕"/>
+                        </a:rPr>
+                        <a:t>99.6</a:t>
+                      </a:r>
+                    </a:p>
+                  </a:txBody>
+                  <a:tcPr>
+                    <a:solidFill>
+                      <a:srgbClr val="D5F5E3"/>
+                    </a:solidFill>
+                  </a:tcPr>
+                </a:tc>
+                <a:tc>
+                  <a:txBody>
+                    <a:bodyPr/>
+                    <a:lstStyle/>
+                    <a:p>
+                      <a:pPr algn="ctr"/>
+                      <a:r>
+                        <a:rPr sz="1500" b="0">
+                          <a:solidFill>
+                            <a:srgbClr val="2C3E50"/>
+                          </a:solidFill>
+                          <a:latin typeface="맑은 고딕"/>
+                        </a:rPr>
+                        <a:t>99.4</a:t>
+                      </a:r>
+                    </a:p>
+                  </a:txBody>
+                  <a:tcPr>
+                    <a:solidFill>
+                      <a:srgbClr val="D5F5E3"/>
+                    </a:solidFill>
+                  </a:tcPr>
+                </a:tc>
+                <a:tc>
+                  <a:txBody>
+                    <a:bodyPr/>
+                    <a:lstStyle/>
+                    <a:p>
+                      <a:pPr algn="ctr"/>
+                      <a:r>
+                        <a:rPr sz="1500" b="0">
+                          <a:solidFill>
+                            <a:srgbClr val="2C3E50"/>
+                          </a:solidFill>
+                          <a:latin typeface="맑은 고딕"/>
+                        </a:rPr>
+                        <a:t>99.6</a:t>
+                      </a:r>
+                    </a:p>
+                  </a:txBody>
+                  <a:tcPr>
+                    <a:solidFill>
+                      <a:srgbClr val="D5F5E3"/>
+                    </a:solidFill>
+                  </a:tcPr>
+                </a:tc>
+              </a:tr>
+              <a:tr h="441960">
+                <a:tc>
+                  <a:txBody>
+                    <a:bodyPr/>
+                    <a:lstStyle/>
+                    <a:p>
+                      <a:pPr algn="ctr"/>
+                      <a:r>
+                        <a:rPr sz="1500" b="0">
+                          <a:solidFill>
+                            <a:srgbClr val="2C3E50"/>
+                          </a:solidFill>
+                          <a:latin typeface="맑은 고딕"/>
+                        </a:rPr>
+                        <a:t>Strike</a:t>
+                      </a:r>
+                    </a:p>
+                  </a:txBody>
+                  <a:tcPr>
+                    <a:solidFill>
+                      <a:srgbClr val="FFFFFF"/>
+                    </a:solidFill>
+                  </a:tcPr>
+                </a:tc>
+                <a:tc>
+                  <a:txBody>
+                    <a:bodyPr/>
+                    <a:lstStyle/>
+                    <a:p>
+                      <a:pPr algn="ctr"/>
+                      <a:r>
+                        <a:rPr sz="1500" b="0">
+                          <a:solidFill>
+                            <a:srgbClr val="2C3E50"/>
+                          </a:solidFill>
+                          <a:latin typeface="맑은 고딕"/>
+                        </a:rPr>
+                        <a:t>41.11%</a:t>
+                      </a:r>
+                    </a:p>
+                  </a:txBody>
+                  <a:tcPr>
+                    <a:solidFill>
+                      <a:srgbClr val="FFFFFF"/>
+                    </a:solidFill>
+                  </a:tcPr>
+                </a:tc>
+                <a:tc>
+                  <a:txBody>
+                    <a:bodyPr/>
+                    <a:lstStyle/>
+                    <a:p>
+                      <a:pPr algn="ctr"/>
+                      <a:r>
+                        <a:rPr sz="1500" b="0">
+                          <a:solidFill>
+                            <a:srgbClr val="2C3E50"/>
+                          </a:solidFill>
+                          <a:latin typeface="맑은 고딕"/>
+                        </a:rPr>
+                        <a:t>100.0</a:t>
+                      </a:r>
+                    </a:p>
+                  </a:txBody>
+                  <a:tcPr>
+                    <a:solidFill>
+                      <a:srgbClr val="D5F5E3"/>
+                    </a:solidFill>
+                  </a:tcPr>
+                </a:tc>
+                <a:tc>
+                  <a:txBody>
+                    <a:bodyPr/>
+                    <a:lstStyle/>
+                    <a:p>
+                      <a:pPr algn="ctr"/>
+                      <a:r>
+                        <a:rPr sz="1500" b="0">
+                          <a:solidFill>
+                            <a:srgbClr val="2C3E50"/>
+                          </a:solidFill>
+                          <a:latin typeface="맑은 고딕"/>
+                        </a:rPr>
+                        <a:t>100.0</a:t>
+                      </a:r>
+                    </a:p>
+                  </a:txBody>
+                  <a:tcPr>
+                    <a:solidFill>
+                      <a:srgbClr val="D5F5E3"/>
+                    </a:solidFill>
+                  </a:tcPr>
+                </a:tc>
+                <a:tc>
+                  <a:txBody>
+                    <a:bodyPr/>
+                    <a:lstStyle/>
+                    <a:p>
+                      <a:pPr algn="ctr"/>
+                      <a:r>
+                        <a:rPr sz="1500" b="0">
+                          <a:solidFill>
+                            <a:srgbClr val="2C3E50"/>
+                          </a:solidFill>
+                          <a:latin typeface="맑은 고딕"/>
+                        </a:rPr>
+                        <a:t>100.0</a:t>
+                      </a:r>
+                    </a:p>
+                  </a:txBody>
+                  <a:tcPr>
+                    <a:solidFill>
+                      <a:srgbClr val="D5F5E3"/>
+                    </a:solidFill>
+                  </a:tcPr>
+                </a:tc>
+              </a:tr>
+              <a:tr h="441960">
+                <a:tc>
+                  <a:txBody>
+                    <a:bodyPr/>
+                    <a:lstStyle/>
+                    <a:p>
+                      <a:pPr algn="ctr"/>
+                      <a:r>
+                        <a:rPr sz="1500" b="0">
+                          <a:solidFill>
+                            <a:srgbClr val="2C3E50"/>
+                          </a:solidFill>
+                          <a:latin typeface="맑은 고딕"/>
+                        </a:rPr>
+                        <a:t>Single</a:t>
+                      </a:r>
+                    </a:p>
+                  </a:txBody>
+                  <a:tcPr>
+                    <a:solidFill>
+                      <a:srgbClr val="FFFFFF"/>
+                    </a:solidFill>
+                  </a:tcPr>
+                </a:tc>
+                <a:tc>
+                  <a:txBody>
+                    <a:bodyPr/>
+                    <a:lstStyle/>
+                    <a:p>
+                      <a:pPr algn="ctr"/>
+                      <a:r>
+                        <a:rPr sz="1500" b="0">
+                          <a:solidFill>
+                            <a:srgbClr val="2C3E50"/>
+                          </a:solidFill>
+                          <a:latin typeface="맑은 고딕"/>
+                        </a:rPr>
+                        <a:t>3.64%</a:t>
+                      </a:r>
+                    </a:p>
+                  </a:txBody>
+                  <a:tcPr>
+                    <a:solidFill>
+                      <a:srgbClr val="FFFFFF"/>
+                    </a:solidFill>
+                  </a:tcPr>
+                </a:tc>
+                <a:tc>
+                  <a:txBody>
+                    <a:bodyPr/>
+                    <a:lstStyle/>
+                    <a:p>
+                      <a:pPr algn="ctr"/>
+                      <a:r>
+                        <a:rPr sz="1500" b="0">
+                          <a:solidFill>
+                            <a:srgbClr val="2C3E50"/>
+                          </a:solidFill>
+                          <a:latin typeface="맑은 고딕"/>
+                        </a:rPr>
+                        <a:t>88.9</a:t>
+                      </a:r>
+                    </a:p>
+                  </a:txBody>
+                  <a:tcPr>
+                    <a:solidFill>
+                      <a:srgbClr val="D5F5E3"/>
+                    </a:solidFill>
+                  </a:tcPr>
+                </a:tc>
+                <a:tc>
+                  <a:txBody>
+                    <a:bodyPr/>
+                    <a:lstStyle/>
+                    <a:p>
+                      <a:pPr algn="ctr"/>
+                      <a:r>
+                        <a:rPr sz="1500" b="0">
+                          <a:solidFill>
+                            <a:srgbClr val="2C3E50"/>
+                          </a:solidFill>
+                          <a:latin typeface="맑은 고딕"/>
+                        </a:rPr>
+                        <a:t>90.1</a:t>
+                      </a:r>
+                    </a:p>
+                  </a:txBody>
+                  <a:tcPr>
+                    <a:solidFill>
+                      <a:srgbClr val="D5F5E3"/>
+                    </a:solidFill>
+                  </a:tcPr>
+                </a:tc>
+                <a:tc>
+                  <a:txBody>
+                    <a:bodyPr/>
+                    <a:lstStyle/>
+                    <a:p>
+                      <a:pPr algn="ctr"/>
+                      <a:r>
+                        <a:rPr sz="1500" b="0">
+                          <a:solidFill>
+                            <a:srgbClr val="2C3E50"/>
+                          </a:solidFill>
+                          <a:latin typeface="맑은 고딕"/>
+                        </a:rPr>
+                        <a:t>89.6</a:t>
+                      </a:r>
+                    </a:p>
+                  </a:txBody>
+                  <a:tcPr>
+                    <a:solidFill>
+                      <a:srgbClr val="D5F5E3"/>
+                    </a:solidFill>
+                  </a:tcPr>
+                </a:tc>
+              </a:tr>
+              <a:tr h="441960">
+                <a:tc>
+                  <a:txBody>
+                    <a:bodyPr/>
+                    <a:lstStyle/>
+                    <a:p>
+                      <a:pPr algn="ctr"/>
+                      <a:r>
+                        <a:rPr sz="1500" b="0">
+                          <a:solidFill>
+                            <a:srgbClr val="2C3E50"/>
+                          </a:solidFill>
+                          <a:latin typeface="맑은 고딕"/>
+                        </a:rPr>
+                        <a:t>Double</a:t>
+                      </a:r>
+                    </a:p>
+                  </a:txBody>
+                  <a:tcPr>
+                    <a:solidFill>
+                      <a:srgbClr val="FFFFFF"/>
+                    </a:solidFill>
+                  </a:tcPr>
+                </a:tc>
+                <a:tc>
+                  <a:txBody>
+                    <a:bodyPr/>
+                    <a:lstStyle/>
+                    <a:p>
+                      <a:pPr algn="ctr"/>
+                      <a:r>
+                        <a:rPr sz="1500" b="0">
+                          <a:solidFill>
+                            <a:srgbClr val="2C3E50"/>
+                          </a:solidFill>
+                          <a:latin typeface="맑은 고딕"/>
+                        </a:rPr>
+                        <a:t>1.09%</a:t>
+                      </a:r>
+                    </a:p>
+                  </a:txBody>
+                  <a:tcPr>
+                    <a:solidFill>
+                      <a:srgbClr val="FFFFFF"/>
+                    </a:solidFill>
+                  </a:tcPr>
+                </a:tc>
+                <a:tc>
+                  <a:txBody>
+                    <a:bodyPr/>
+                    <a:lstStyle/>
+                    <a:p>
+                      <a:pPr algn="ctr"/>
+                      <a:r>
+                        <a:rPr sz="1500" b="0">
+                          <a:solidFill>
+                            <a:srgbClr val="2C3E50"/>
+                          </a:solidFill>
+                          <a:latin typeface="맑은 고딕"/>
+                        </a:rPr>
+                        <a:t>37.4</a:t>
+                      </a:r>
+                    </a:p>
+                  </a:txBody>
+                  <a:tcPr>
+                    <a:solidFill>
+                      <a:srgbClr val="FDF2E9"/>
+                    </a:solidFill>
+                  </a:tcPr>
+                </a:tc>
+                <a:tc>
+                  <a:txBody>
+                    <a:bodyPr/>
+                    <a:lstStyle/>
+                    <a:p>
+                      <a:pPr algn="ctr"/>
+                      <a:r>
+                        <a:rPr sz="1500" b="0">
+                          <a:solidFill>
+                            <a:srgbClr val="2C3E50"/>
+                          </a:solidFill>
+                          <a:latin typeface="맑은 고딕"/>
+                        </a:rPr>
+                        <a:t>36.5</a:t>
+                      </a:r>
+                    </a:p>
+                  </a:txBody>
+                  <a:tcPr>
+                    <a:solidFill>
+                      <a:srgbClr val="FDF2E9"/>
+                    </a:solidFill>
+                  </a:tcPr>
+                </a:tc>
+                <a:tc>
+                  <a:txBody>
+                    <a:bodyPr/>
+                    <a:lstStyle/>
+                    <a:p>
+                      <a:pPr algn="ctr"/>
+                      <a:r>
+                        <a:rPr sz="1500" b="0">
+                          <a:solidFill>
+                            <a:srgbClr val="2C3E50"/>
+                          </a:solidFill>
+                          <a:latin typeface="맑은 고딕"/>
+                        </a:rPr>
+                        <a:t>27.5</a:t>
+                      </a:r>
+                    </a:p>
+                  </a:txBody>
+                  <a:tcPr>
+                    <a:solidFill>
+                      <a:srgbClr val="FDF2E9"/>
+                    </a:solidFill>
+                  </a:tcPr>
+                </a:tc>
+              </a:tr>
+              <a:tr h="441960">
+                <a:tc>
+                  <a:txBody>
+                    <a:bodyPr/>
+                    <a:lstStyle/>
+                    <a:p>
+                      <a:pPr algn="ctr"/>
+                      <a:r>
+                        <a:rPr sz="1500" b="0">
+                          <a:solidFill>
+                            <a:srgbClr val="2C3E50"/>
+                          </a:solidFill>
+                          <a:latin typeface="맑은 고딕"/>
+                        </a:rPr>
+                        <a:t>Triple</a:t>
+                      </a:r>
+                    </a:p>
+                  </a:txBody>
+                  <a:tcPr>
+                    <a:solidFill>
+                      <a:srgbClr val="FFFFFF"/>
+                    </a:solidFill>
+                  </a:tcPr>
+                </a:tc>
+                <a:tc>
+                  <a:txBody>
+                    <a:bodyPr/>
+                    <a:lstStyle/>
+                    <a:p>
+                      <a:pPr algn="ctr"/>
+                      <a:r>
+                        <a:rPr sz="1500" b="0">
+                          <a:solidFill>
+                            <a:srgbClr val="2C3E50"/>
+                          </a:solidFill>
+                          <a:latin typeface="맑은 고딕"/>
+                        </a:rPr>
+                        <a:t>0.09%</a:t>
+                      </a:r>
+                    </a:p>
+                  </a:txBody>
+                  <a:tcPr>
+                    <a:solidFill>
+                      <a:srgbClr val="FFFFFF"/>
+                    </a:solidFill>
+                  </a:tcPr>
+                </a:tc>
+                <a:tc>
+                  <a:txBody>
+                    <a:bodyPr/>
+                    <a:lstStyle/>
+                    <a:p>
+                      <a:pPr algn="ctr"/>
+                      <a:r>
+                        <a:rPr sz="1500" b="0">
+                          <a:solidFill>
+                            <a:srgbClr val="2C3E50"/>
+                          </a:solidFill>
+                          <a:latin typeface="맑은 고딕"/>
+                        </a:rPr>
+                        <a:t>0.0</a:t>
+                      </a:r>
+                    </a:p>
+                  </a:txBody>
+                  <a:tcPr>
+                    <a:solidFill>
+                      <a:srgbClr val="FDEDED"/>
+                    </a:solidFill>
+                  </a:tcPr>
+                </a:tc>
+                <a:tc>
+                  <a:txBody>
+                    <a:bodyPr/>
+                    <a:lstStyle/>
+                    <a:p>
+                      <a:pPr algn="ctr"/>
+                      <a:r>
+                        <a:rPr sz="1500" b="0">
+                          <a:solidFill>
+                            <a:srgbClr val="2C3E50"/>
+                          </a:solidFill>
+                          <a:latin typeface="맑은 고딕"/>
+                        </a:rPr>
+                        <a:t>0.0</a:t>
+                      </a:r>
+                    </a:p>
+                  </a:txBody>
+                  <a:tcPr>
+                    <a:solidFill>
+                      <a:srgbClr val="FDEDED"/>
+                    </a:solidFill>
+                  </a:tcPr>
+                </a:tc>
+                <a:tc>
+                  <a:txBody>
+                    <a:bodyPr/>
+                    <a:lstStyle/>
+                    <a:p>
+                      <a:pPr algn="ctr"/>
+                      <a:r>
+                        <a:rPr sz="1500" b="0">
+                          <a:solidFill>
+                            <a:srgbClr val="2C3E50"/>
+                          </a:solidFill>
+                          <a:latin typeface="맑은 고딕"/>
+                        </a:rPr>
+                        <a:t>0.0</a:t>
+                      </a:r>
+                    </a:p>
+                  </a:txBody>
+                  <a:tcPr>
+                    <a:solidFill>
+                      <a:srgbClr val="FDEDED"/>
+                    </a:solidFill>
+                  </a:tcPr>
+                </a:tc>
+              </a:tr>
+              <a:tr h="441960">
+                <a:tc>
+                  <a:txBody>
+                    <a:bodyPr/>
+                    <a:lstStyle/>
+                    <a:p>
+                      <a:pPr algn="ctr"/>
+                      <a:r>
+                        <a:rPr sz="1500" b="0">
+                          <a:solidFill>
+                            <a:srgbClr val="2C3E50"/>
+                          </a:solidFill>
+                          <a:latin typeface="맑은 고딕"/>
+                        </a:rPr>
+                        <a:t>HomeRun</a:t>
+                      </a:r>
+                    </a:p>
+                  </a:txBody>
+                  <a:tcPr>
+                    <a:solidFill>
+                      <a:srgbClr val="FFFFFF"/>
+                    </a:solidFill>
+                  </a:tcPr>
+                </a:tc>
+                <a:tc>
+                  <a:txBody>
+                    <a:bodyPr/>
+                    <a:lstStyle/>
+                    <a:p>
+                      <a:pPr algn="ctr"/>
+                      <a:r>
+                        <a:rPr sz="1500" b="0">
+                          <a:solidFill>
+                            <a:srgbClr val="2C3E50"/>
+                          </a:solidFill>
+                          <a:latin typeface="맑은 고딕"/>
+                        </a:rPr>
+                        <a:t>0.81%</a:t>
+                      </a:r>
+                    </a:p>
+                  </a:txBody>
+                  <a:tcPr>
+                    <a:solidFill>
+                      <a:srgbClr val="FFFFFF"/>
+                    </a:solidFill>
+                  </a:tcPr>
+                </a:tc>
+                <a:tc>
+                  <a:txBody>
+                    <a:bodyPr/>
+                    <a:lstStyle/>
+                    <a:p>
+                      <a:pPr algn="ctr"/>
+                      <a:r>
+                        <a:rPr sz="1500" b="0">
+                          <a:solidFill>
+                            <a:srgbClr val="2C3E50"/>
+                          </a:solidFill>
+                          <a:latin typeface="맑은 고딕"/>
+                        </a:rPr>
+                        <a:t>18.1</a:t>
+                      </a:r>
+                    </a:p>
+                  </a:txBody>
+                  <a:tcPr>
+                    <a:solidFill>
+                      <a:srgbClr val="FDF2E9"/>
+                    </a:solidFill>
+                  </a:tcPr>
+                </a:tc>
+                <a:tc>
+                  <a:txBody>
+                    <a:bodyPr/>
+                    <a:lstStyle/>
+                    <a:p>
+                      <a:pPr algn="ctr"/>
+                      <a:r>
+                        <a:rPr sz="1500" b="0">
+                          <a:solidFill>
+                            <a:srgbClr val="2C3E50"/>
+                          </a:solidFill>
+                          <a:latin typeface="맑은 고딕"/>
+                        </a:rPr>
+                        <a:t>10.4</a:t>
+                      </a:r>
+                    </a:p>
+                  </a:txBody>
+                  <a:tcPr>
+                    <a:solidFill>
+                      <a:srgbClr val="FDF2E9"/>
+                    </a:solidFill>
+                  </a:tcPr>
+                </a:tc>
+                <a:tc>
+                  <a:txBody>
+                    <a:bodyPr/>
+                    <a:lstStyle/>
+                    <a:p>
+                      <a:pPr algn="ctr"/>
+                      <a:r>
+                        <a:rPr sz="1500" b="0">
+                          <a:solidFill>
+                            <a:srgbClr val="2C3E50"/>
+                          </a:solidFill>
+                          <a:latin typeface="맑은 고딕"/>
+                        </a:rPr>
+                        <a:t>15.6</a:t>
+                      </a:r>
+                    </a:p>
+                  </a:txBody>
+                  <a:tcPr>
+                    <a:solidFill>
+                      <a:srgbClr val="FDF2E9"/>
+                    </a:solidFill>
+                  </a:tcPr>
+                </a:tc>
+              </a:tr>
+              <a:tr h="441960">
+                <a:tc>
+                  <a:txBody>
+                    <a:bodyPr/>
+                    <a:lstStyle/>
+                    <a:p>
+                      <a:pPr algn="ctr"/>
+                      <a:r>
+                        <a:rPr sz="1500" b="0">
+                          <a:solidFill>
+                            <a:srgbClr val="2C3E50"/>
+                          </a:solidFill>
+                          <a:latin typeface="맑은 고딕"/>
+                        </a:rPr>
+                        <a:t>FieldOut</a:t>
+                      </a:r>
+                    </a:p>
+                  </a:txBody>
+                  <a:tcPr>
+                    <a:solidFill>
+                      <a:srgbClr val="FFFFFF"/>
+                    </a:solidFill>
+                  </a:tcPr>
+                </a:tc>
+                <a:tc>
+                  <a:txBody>
+                    <a:bodyPr/>
+                    <a:lstStyle/>
+                    <a:p>
+                      <a:pPr algn="ctr"/>
+                      <a:r>
+                        <a:rPr sz="1500" b="0">
+                          <a:solidFill>
+                            <a:srgbClr val="2C3E50"/>
+                          </a:solidFill>
+                          <a:latin typeface="맑은 고딕"/>
+                        </a:rPr>
+                        <a:t>11.75%</a:t>
+                      </a:r>
+                    </a:p>
+                  </a:txBody>
+                  <a:tcPr>
+                    <a:solidFill>
+                      <a:srgbClr val="FFFFFF"/>
+                    </a:solidFill>
+                  </a:tcPr>
+                </a:tc>
+                <a:tc>
+                  <a:txBody>
+                    <a:bodyPr/>
+                    <a:lstStyle/>
+                    <a:p>
+                      <a:pPr algn="ctr"/>
+                      <a:r>
+                        <a:rPr sz="1500" b="0">
+                          <a:solidFill>
+                            <a:srgbClr val="2C3E50"/>
+                          </a:solidFill>
+                          <a:latin typeface="맑은 고딕"/>
+                        </a:rPr>
+                        <a:t>100.0</a:t>
+                      </a:r>
+                    </a:p>
+                  </a:txBody>
+                  <a:tcPr>
+                    <a:solidFill>
+                      <a:srgbClr val="D5F5E3"/>
+                    </a:solidFill>
+                  </a:tcPr>
+                </a:tc>
+                <a:tc>
+                  <a:txBody>
+                    <a:bodyPr/>
+                    <a:lstStyle/>
+                    <a:p>
+                      <a:pPr algn="ctr"/>
+                      <a:r>
+                        <a:rPr sz="1500" b="0">
+                          <a:solidFill>
+                            <a:srgbClr val="2C3E50"/>
+                          </a:solidFill>
+                          <a:latin typeface="맑은 고딕"/>
+                        </a:rPr>
+                        <a:t>100.0</a:t>
+                      </a:r>
+                    </a:p>
+                  </a:txBody>
+                  <a:tcPr>
+                    <a:solidFill>
+                      <a:srgbClr val="D5F5E3"/>
+                    </a:solidFill>
+                  </a:tcPr>
+                </a:tc>
+                <a:tc>
+                  <a:txBody>
+                    <a:bodyPr/>
+                    <a:lstStyle/>
+                    <a:p>
+                      <a:pPr algn="ctr"/>
+                      <a:r>
+                        <a:rPr sz="1500" b="0">
+                          <a:solidFill>
+                            <a:srgbClr val="2C3E50"/>
+                          </a:solidFill>
+                          <a:latin typeface="맑은 고딕"/>
+                        </a:rPr>
+                        <a:t>100.0</a:t>
+                      </a:r>
+                    </a:p>
+                  </a:txBody>
+                  <a:tcPr>
+                    <a:solidFill>
+                      <a:srgbClr val="D5F5E3"/>
+                    </a:solidFill>
+                  </a:tcPr>
+                </a:tc>
+              </a:tr>
+              <a:tr h="441960">
+                <a:tc>
+                  <a:txBody>
+                    <a:bodyPr/>
+                    <a:lstStyle/>
+                    <a:p>
+                      <a:pPr algn="ctr"/>
+                      <a:r>
+                        <a:rPr sz="1500" b="0">
+                          <a:solidFill>
+                            <a:srgbClr val="2C3E50"/>
+                          </a:solidFill>
+                          <a:latin typeface="맑은 고딕"/>
+                        </a:rPr>
+                        <a:t>Strikeout</a:t>
+                      </a:r>
+                    </a:p>
+                  </a:txBody>
+                  <a:tcPr>
+                    <a:solidFill>
+                      <a:srgbClr val="FFFFFF"/>
+                    </a:solidFill>
+                  </a:tcPr>
+                </a:tc>
+                <a:tc>
+                  <a:txBody>
+                    <a:bodyPr/>
+                    <a:lstStyle/>
+                    <a:p>
+                      <a:pPr algn="ctr"/>
+                      <a:r>
+                        <a:rPr sz="1500" b="0">
+                          <a:solidFill>
+                            <a:srgbClr val="2C3E50"/>
+                          </a:solidFill>
+                          <a:latin typeface="맑은 고딕"/>
+                        </a:rPr>
+                        <a:t>5.89%</a:t>
+                      </a:r>
+                    </a:p>
+                  </a:txBody>
+                  <a:tcPr>
+                    <a:solidFill>
+                      <a:srgbClr val="FFFFFF"/>
+                    </a:solidFill>
+                  </a:tcPr>
+                </a:tc>
+                <a:tc>
+                  <a:txBody>
+                    <a:bodyPr/>
+                    <a:lstStyle/>
+                    <a:p>
+                      <a:pPr algn="ctr"/>
+                      <a:r>
+                        <a:rPr sz="1500" b="0">
+                          <a:solidFill>
+                            <a:srgbClr val="2C3E50"/>
+                          </a:solidFill>
+                          <a:latin typeface="맑은 고딕"/>
+                        </a:rPr>
+                        <a:t>100.0</a:t>
+                      </a:r>
+                    </a:p>
+                  </a:txBody>
+                  <a:tcPr>
+                    <a:solidFill>
+                      <a:srgbClr val="D5F5E3"/>
+                    </a:solidFill>
+                  </a:tcPr>
+                </a:tc>
+                <a:tc>
+                  <a:txBody>
+                    <a:bodyPr/>
+                    <a:lstStyle/>
+                    <a:p>
+                      <a:pPr algn="ctr"/>
+                      <a:r>
+                        <a:rPr sz="1500" b="0">
+                          <a:solidFill>
+                            <a:srgbClr val="2C3E50"/>
+                          </a:solidFill>
+                          <a:latin typeface="맑은 고딕"/>
+                        </a:rPr>
+                        <a:t>99.9</a:t>
+                      </a:r>
+                    </a:p>
+                  </a:txBody>
+                  <a:tcPr>
+                    <a:solidFill>
+                      <a:srgbClr val="D5F5E3"/>
+                    </a:solidFill>
+                  </a:tcPr>
+                </a:tc>
+                <a:tc>
+                  <a:txBody>
+                    <a:bodyPr/>
+                    <a:lstStyle/>
+                    <a:p>
+                      <a:pPr algn="ctr"/>
+                      <a:r>
+                        <a:rPr sz="1500" b="0">
+                          <a:solidFill>
+                            <a:srgbClr val="2C3E50"/>
+                          </a:solidFill>
+                          <a:latin typeface="맑은 고딕"/>
+                        </a:rPr>
+                        <a:t>99.8</a:t>
+                      </a:r>
+                    </a:p>
+                  </a:txBody>
+                  <a:tcPr>
+                    <a:solidFill>
+                      <a:srgbClr val="D5F5E3"/>
+                    </a:solidFill>
+                  </a:tcPr>
+                </a:tc>
+              </a:tr>
+              <a:tr h="441960">
+                <a:tc>
+                  <a:txBody>
+                    <a:bodyPr/>
+                    <a:lstStyle/>
+                    <a:p>
+                      <a:pPr algn="ctr"/>
+                      <a:r>
+                        <a:rPr sz="1500" b="0">
+                          <a:solidFill>
+                            <a:srgbClr val="2C3E50"/>
+                          </a:solidFill>
+                          <a:latin typeface="맑은 고딕"/>
+                        </a:rPr>
+                        <a:t>Walk</a:t>
+                      </a:r>
+                    </a:p>
+                  </a:txBody>
+                  <a:tcPr>
+                    <a:solidFill>
+                      <a:srgbClr val="FFFFFF"/>
+                    </a:solidFill>
+                  </a:tcPr>
+                </a:tc>
+                <a:tc>
+                  <a:txBody>
+                    <a:bodyPr/>
+                    <a:lstStyle/>
+                    <a:p>
+                      <a:pPr algn="ctr"/>
+                      <a:r>
+                        <a:rPr sz="1500" b="0">
+                          <a:solidFill>
+                            <a:srgbClr val="2C3E50"/>
+                          </a:solidFill>
+                          <a:latin typeface="맑은 고딕"/>
+                        </a:rPr>
+                        <a:t>2.04%</a:t>
+                      </a:r>
+                    </a:p>
+                  </a:txBody>
+                  <a:tcPr>
+                    <a:solidFill>
+                      <a:srgbClr val="FFFFFF"/>
+                    </a:solidFill>
+                  </a:tcPr>
+                </a:tc>
+                <a:tc>
+                  <a:txBody>
+                    <a:bodyPr/>
+                    <a:lstStyle/>
+                    <a:p>
+                      <a:pPr algn="ctr"/>
+                      <a:r>
+                        <a:rPr sz="1500" b="0">
+                          <a:solidFill>
+                            <a:srgbClr val="2C3E50"/>
+                          </a:solidFill>
+                          <a:latin typeface="맑은 고딕"/>
+                        </a:rPr>
+                        <a:t>98.2</a:t>
+                      </a:r>
+                    </a:p>
+                  </a:txBody>
+                  <a:tcPr>
+                    <a:solidFill>
+                      <a:srgbClr val="D5F5E3"/>
+                    </a:solidFill>
+                  </a:tcPr>
+                </a:tc>
+                <a:tc>
+                  <a:txBody>
+                    <a:bodyPr/>
+                    <a:lstStyle/>
+                    <a:p>
+                      <a:pPr algn="ctr"/>
+                      <a:r>
+                        <a:rPr sz="1500" b="0">
+                          <a:solidFill>
+                            <a:srgbClr val="2C3E50"/>
+                          </a:solidFill>
+                          <a:latin typeface="맑은 고딕"/>
+                        </a:rPr>
+                        <a:t>98.0</a:t>
+                      </a:r>
+                    </a:p>
+                  </a:txBody>
+                  <a:tcPr>
+                    <a:solidFill>
+                      <a:srgbClr val="D5F5E3"/>
+                    </a:solidFill>
+                  </a:tcPr>
+                </a:tc>
+                <a:tc>
+                  <a:txBody>
+                    <a:bodyPr/>
+                    <a:lstStyle/>
+                    <a:p>
+                      <a:pPr algn="ctr"/>
+                      <a:r>
+                        <a:rPr sz="1500" b="0">
+                          <a:solidFill>
+                            <a:srgbClr val="2C3E50"/>
+                          </a:solidFill>
+                          <a:latin typeface="맑은 고딕"/>
+                        </a:rPr>
+                        <a:t>99.0</a:t>
+                      </a:r>
+                    </a:p>
+                  </a:txBody>
+                  <a:tcPr>
+                    <a:solidFill>
+                      <a:srgbClr val="D5F5E3"/>
+                    </a:solidFill>
+                  </a:tcPr>
+                </a:tc>
+              </a:tr>
+              <a:tr h="441960">
+                <a:tc>
+                  <a:txBody>
+                    <a:bodyPr/>
+                    <a:lstStyle/>
+                    <a:p>
+                      <a:pPr algn="ctr"/>
+                      <a:r>
+                        <a:rPr sz="1500" b="0">
+                          <a:solidFill>
+                            <a:srgbClr val="2C3E50"/>
+                          </a:solidFill>
+                          <a:latin typeface="맑은 고딕"/>
+                        </a:rPr>
+                        <a:t>HBP</a:t>
+                      </a:r>
+                    </a:p>
+                  </a:txBody>
+                  <a:tcPr>
+                    <a:solidFill>
+                      <a:srgbClr val="FFFFFF"/>
+                    </a:solidFill>
+                  </a:tcPr>
+                </a:tc>
+                <a:tc>
+                  <a:txBody>
+                    <a:bodyPr/>
+                    <a:lstStyle/>
+                    <a:p>
+                      <a:pPr algn="ctr"/>
+                      <a:r>
+                        <a:rPr sz="1500" b="0">
+                          <a:solidFill>
+                            <a:srgbClr val="2C3E50"/>
+                          </a:solidFill>
+                          <a:latin typeface="맑은 고딕"/>
+                        </a:rPr>
+                        <a:t>0.28%</a:t>
+                      </a:r>
+                    </a:p>
+                  </a:txBody>
+                  <a:tcPr>
+                    <a:solidFill>
+                      <a:srgbClr val="FFFFFF"/>
+                    </a:solidFill>
+                  </a:tcPr>
+                </a:tc>
+                <a:tc>
+                  <a:txBody>
+                    <a:bodyPr/>
+                    <a:lstStyle/>
+                    <a:p>
+                      <a:pPr algn="ctr"/>
+                      <a:r>
+                        <a:rPr sz="1500" b="0">
+                          <a:solidFill>
+                            <a:srgbClr val="2C3E50"/>
+                          </a:solidFill>
+                          <a:latin typeface="맑은 고딕"/>
+                        </a:rPr>
+                        <a:t>95.3</a:t>
+                      </a:r>
+                    </a:p>
+                  </a:txBody>
+                  <a:tcPr>
+                    <a:solidFill>
+                      <a:srgbClr val="D5F5E3"/>
+                    </a:solidFill>
+                  </a:tcPr>
+                </a:tc>
+                <a:tc>
+                  <a:txBody>
+                    <a:bodyPr/>
+                    <a:lstStyle/>
+                    <a:p>
+                      <a:pPr algn="ctr"/>
+                      <a:r>
+                        <a:rPr sz="1500" b="0">
+                          <a:solidFill>
+                            <a:srgbClr val="2C3E50"/>
+                          </a:solidFill>
+                          <a:latin typeface="맑은 고딕"/>
+                        </a:rPr>
+                        <a:t>92.2</a:t>
+                      </a:r>
+                    </a:p>
+                  </a:txBody>
+                  <a:tcPr>
+                    <a:solidFill>
+                      <a:srgbClr val="D5F5E3"/>
+                    </a:solidFill>
+                  </a:tcPr>
+                </a:tc>
+                <a:tc>
+                  <a:txBody>
+                    <a:bodyPr/>
+                    <a:lstStyle/>
+                    <a:p>
+                      <a:pPr algn="ctr"/>
+                      <a:r>
+                        <a:rPr sz="1500" b="0">
+                          <a:solidFill>
+                            <a:srgbClr val="2C3E50"/>
+                          </a:solidFill>
+                          <a:latin typeface="맑은 고딕"/>
+                        </a:rPr>
+                        <a:t>92.2</a:t>
+                      </a:r>
+                    </a:p>
+                  </a:txBody>
+                  <a:tcPr>
+                    <a:solidFill>
+                      <a:srgbClr val="D5F5E3"/>
+                    </a:solidFill>
+                  </a:tcPr>
+                </a:tc>
+              </a:tr>
+              <a:tr h="441960">
+                <a:tc>
+                  <a:txBody>
+                    <a:bodyPr/>
+                    <a:lstStyle/>
+                    <a:p>
+                      <a:pPr algn="ctr"/>
+                      <a:r>
+                        <a:rPr sz="1500" b="1">
+                          <a:solidFill>
+                            <a:srgbClr val="FFFFFF"/>
+                          </a:solidFill>
+                          <a:latin typeface="맑은 고딕"/>
+                        </a:rPr>
+                        <a:t>Overall</a:t>
+                      </a:r>
+                    </a:p>
+                  </a:txBody>
+                  <a:tcPr>
+                    <a:solidFill>
+                      <a:srgbClr val="2C3E50"/>
+                    </a:solidFill>
+                  </a:tcPr>
+                </a:tc>
+                <a:tc>
+                  <a:txBody>
+                    <a:bodyPr/>
+                    <a:lstStyle/>
+                    <a:p>
+                      <a:pPr algn="ctr"/>
+                      <a:r>
+                        <a:rPr sz="1500" b="1">
+                          <a:solidFill>
+                            <a:srgbClr val="FFFFFF"/>
+                          </a:solidFill>
+                          <a:latin typeface="맑은 고딕"/>
+                        </a:rPr>
+                        <a:t>—</a:t>
+                      </a:r>
+                    </a:p>
+                  </a:txBody>
+                  <a:tcPr>
+                    <a:solidFill>
+                      <a:srgbClr val="2C3E50"/>
+                    </a:solidFill>
+                  </a:tcPr>
+                </a:tc>
+                <a:tc>
+                  <a:txBody>
+                    <a:bodyPr/>
+                    <a:lstStyle/>
+                    <a:p>
+                      <a:pPr algn="ctr"/>
+                      <a:r>
+                        <a:rPr sz="1500" b="1">
+                          <a:solidFill>
+                            <a:srgbClr val="FFFFFF"/>
+                          </a:solidFill>
+                          <a:latin typeface="맑은 고딕"/>
+                        </a:rPr>
+                        <a:t>98.0</a:t>
+                      </a:r>
+                    </a:p>
+                  </a:txBody>
+                  <a:tcPr>
+                    <a:solidFill>
+                      <a:srgbClr val="2C3E50"/>
+                    </a:solidFill>
+                  </a:tcPr>
+                </a:tc>
+                <a:tc>
+                  <a:txBody>
+                    <a:bodyPr/>
+                    <a:lstStyle/>
+                    <a:p>
+                      <a:pPr algn="ctr"/>
+                      <a:r>
+                        <a:rPr sz="1500" b="1">
+                          <a:solidFill>
+                            <a:srgbClr val="FFFFFF"/>
+                          </a:solidFill>
+                          <a:latin typeface="맑은 고딕"/>
+                        </a:rPr>
+                        <a:t>98.0</a:t>
+                      </a:r>
+                    </a:p>
+                  </a:txBody>
+                  <a:tcPr>
+                    <a:solidFill>
+                      <a:srgbClr val="2C3E50"/>
+                    </a:solidFill>
+                  </a:tcPr>
+                </a:tc>
+                <a:tc>
+                  <a:txBody>
+                    <a:bodyPr/>
+                    <a:lstStyle/>
+                    <a:p>
+                      <a:pPr algn="ctr"/>
+                      <a:r>
+                        <a:rPr sz="1500" b="1">
+                          <a:solidFill>
+                            <a:srgbClr val="FFFFFF"/>
+                          </a:solidFill>
+                          <a:latin typeface="맑은 고딕"/>
+                        </a:rPr>
+                        <a:t>98.0</a:t>
+                      </a:r>
+                    </a:p>
+                  </a:txBody>
+                  <a:tcPr>
+                    <a:solidFill>
+                      <a:srgbClr val="2C3E50"/>
+                    </a:solidFill>
+                  </a:tcPr>
+                </a:tc>
+              </a:tr>
+            </a:tbl>
+          </a:graphicData>
+        </a:graphic>
+      </p:graphicFrame>
+      <p:sp>
+        <p:nvSpPr>
+          <p:cNvPr id="5" name="TextBox 4"/>
+          <p:cNvSpPr txBox="1"/>
+          <p:nvPr/>
+        </p:nvSpPr>
+        <p:spPr>
+          <a:xfrm>
+            <a:off x="457200" y="6400800"/>
+            <a:ext cx="11277295" cy="457200"/>
+          </a:xfrm>
+          <a:prstGeom prst="rect">
+            <a:avLst/>
+          </a:prstGeom>
+          <a:noFill/>
+        </p:spPr>
+        <p:txBody>
+          <a:bodyPr wrap="square">
+            <a:spAutoFit/>
+          </a:bodyPr>
+          <a:lstStyle/>
+          <a:p>
+            <a:pPr algn="ctr"/>
+            <a:r>
+              <a:rPr sz="1300" b="0" i="1">
+                <a:solidFill>
+                  <a:srgbClr val="2C3E50"/>
+                </a:solidFill>
+                <a:latin typeface="맑은 고딕"/>
+              </a:rPr>
+              <a:t>MLP 135d: Walk 98.2%, Single 88.9%, HBP 95.3%  →  Transformer와 Top-4 동등 (98.0%)</a:t>
+            </a:r>
+          </a:p>
+        </p:txBody>
+      </p:sp>
+    </p:spTree>
+  </p:cSld>
+  <p:clrMapOvr>
+    <a:masterClrMapping/>
+  </p:clrMapOvr>
+</p:sld>
+</file>
+
+<file path=ppt/slides/slide8.xml><?xml version="1.0" encoding="utf-8"?>
+<p:sld xmlns:a="http://schemas.openxmlformats.org/drawingml/2006/main" xmlns:p="http://schemas.openxmlformats.org/presentationml/2006/main" xmlns:r="http://schemas.openxmlformats.org/officeDocument/2006/relationships">
+  <p:cSld>
+    <p:spTree>
+      <p:nvGrpSpPr>
+        <p:cNvPr id="1" name=""/>
+        <p:cNvGrpSpPr/>
+        <p:nvPr/>
+      </p:nvGrpSpPr>
+      <p:grpSpPr/>
+      <p:sp>
+        <p:nvSpPr>
+          <p:cNvPr id="2" name="Rectangle 1"/>
+          <p:cNvSpPr/>
+          <p:nvPr/>
+        </p:nvSpPr>
+        <p:spPr>
+          <a:xfrm>
+            <a:off x="0" y="0"/>
+            <a:ext cx="12191695" cy="914400"/>
+          </a:xfrm>
+          <a:prstGeom prst="rect">
+            <a:avLst/>
+          </a:prstGeom>
+          <a:solidFill>
+            <a:srgbClr val="2C3E50"/>
+          </a:solidFill>
+          <a:ln>
+            <a:noFill/>
+          </a:ln>
+        </p:spPr>
+        <p:style>
+          <a:lnRef idx="1">
+            <a:schemeClr val="accent1"/>
+          </a:lnRef>
+          <a:fillRef idx="3">
+            <a:schemeClr val="accent1"/>
+          </a:fillRef>
+          <a:effectRef idx="2">
+            <a:schemeClr val="accent1"/>
+          </a:effectRef>
+          <a:fontRef idx="minor">
+            <a:schemeClr val="lt1"/>
+          </a:fontRef>
+        </p:style>
+        <p:txBody>
+          <a:bodyPr rtlCol="0" anchor="ctr"/>
+          <a:lstStyle/>
+          <a:p>
+            <a:pPr algn="ctr"/>
+          </a:p>
+        </p:txBody>
+      </p:sp>
+      <p:sp>
+        <p:nvSpPr>
+          <p:cNvPr id="3" name="TextBox 2"/>
+          <p:cNvSpPr txBox="1"/>
+          <p:nvPr/>
+        </p:nvSpPr>
+        <p:spPr>
+          <a:xfrm>
+            <a:off x="457200" y="91440"/>
+            <a:ext cx="11277295" cy="731520"/>
+          </a:xfrm>
+          <a:prstGeom prst="rect">
+            <a:avLst/>
+          </a:prstGeom>
+          <a:noFill/>
+        </p:spPr>
+        <p:txBody>
+          <a:bodyPr wrap="square">
+            <a:spAutoFit/>
+          </a:bodyPr>
+          <a:lstStyle/>
+          <a:p>
+            <a:pPr algn="l"/>
+            <a:r>
+              <a:rPr sz="2800" b="1">
+                <a:solidFill>
+                  <a:srgbClr val="FFFFFF"/>
+                </a:solidFill>
+                <a:latin typeface="맑은 고딕"/>
+              </a:rPr>
               <a:t>Top-4 Precision: Per-class 분석</a:t>
             </a:r>
           </a:p>
@@ -10003,7 +11423,7 @@
 </p:sld>
 </file>
 
-<file path=ppt/slides/slide7.xml><?xml version="1.0" encoding="utf-8"?>
+<file path=ppt/slides/slide9.xml><?xml version="1.0" encoding="utf-8"?>
 <p:sld xmlns:a="http://schemas.openxmlformats.org/drawingml/2006/main" xmlns:p="http://schemas.openxmlformats.org/presentationml/2006/main" xmlns:r="http://schemas.openxmlformats.org/officeDocument/2006/relationships">
   <p:cSld>
     <p:spTree>
